--- a/plugins/gradient-cio/assets/examples/gradient-decision-ic-memo.pptx
+++ b/plugins/gradient-cio/assets/examples/gradient-decision-ic-memo.pptx
@@ -223,6 +223,125 @@
               </a:solidFill>
             </c:spPr>
           </c:dPt>
+          <c:dLbls>
+            <c:dLbl>
+              <c:idx val="0"/>
+              <c:tx>
+                <c:rich>
+                  <a:bodyPr/>
+                  <a:lstStyle/>
+                  <a:p>
+                    <a:r>
+                      <a:rPr lang="en-US" sz="800"/>
+                      <a:t>52.0%</a:t>
+                    </a:r>
+                  </a:p>
+                </c:rich>
+              </c:tx>
+              <c:dLblPos val="outEnd"/>
+              <c:showLegendKey val="0"/>
+              <c:showVal val="0"/>
+              <c:showCatName val="0"/>
+              <c:showSerName val="0"/>
+              <c:showPercent val="0"/>
+              <c:showBubbleSize val="0"/>
+            </c:dLbl>
+            <c:dLbl>
+              <c:idx val="1"/>
+              <c:tx>
+                <c:rich>
+                  <a:bodyPr/>
+                  <a:lstStyle/>
+                  <a:p>
+                    <a:r>
+                      <a:rPr lang="en-US" sz="800"/>
+                      <a:t>19.0%</a:t>
+                    </a:r>
+                  </a:p>
+                </c:rich>
+              </c:tx>
+              <c:dLblPos val="outEnd"/>
+              <c:showLegendKey val="0"/>
+              <c:showVal val="0"/>
+              <c:showCatName val="0"/>
+              <c:showSerName val="0"/>
+              <c:showPercent val="0"/>
+              <c:showBubbleSize val="0"/>
+            </c:dLbl>
+            <c:dLbl>
+              <c:idx val="2"/>
+              <c:tx>
+                <c:rich>
+                  <a:bodyPr/>
+                  <a:lstStyle/>
+                  <a:p>
+                    <a:r>
+                      <a:rPr lang="en-US" sz="800"/>
+                      <a:t>17.0%</a:t>
+                    </a:r>
+                  </a:p>
+                </c:rich>
+              </c:tx>
+              <c:dLblPos val="outEnd"/>
+              <c:showLegendKey val="0"/>
+              <c:showVal val="0"/>
+              <c:showCatName val="0"/>
+              <c:showSerName val="0"/>
+              <c:showPercent val="0"/>
+              <c:showBubbleSize val="0"/>
+            </c:dLbl>
+            <c:dLbl>
+              <c:idx val="3"/>
+              <c:tx>
+                <c:rich>
+                  <a:bodyPr/>
+                  <a:lstStyle/>
+                  <a:p>
+                    <a:r>
+                      <a:rPr lang="en-US" sz="800"/>
+                      <a:t>11.0%</a:t>
+                    </a:r>
+                  </a:p>
+                </c:rich>
+              </c:tx>
+              <c:dLblPos val="outEnd"/>
+              <c:showLegendKey val="0"/>
+              <c:showVal val="0"/>
+              <c:showCatName val="0"/>
+              <c:showSerName val="0"/>
+              <c:showPercent val="0"/>
+              <c:showBubbleSize val="0"/>
+            </c:dLbl>
+            <c:dLbl>
+              <c:idx val="4"/>
+              <c:tx>
+                <c:rich>
+                  <a:bodyPr/>
+                  <a:lstStyle/>
+                  <a:p>
+                    <a:r>
+                      <a:rPr lang="en-US" sz="800"/>
+                      <a:t>1.0%</a:t>
+                    </a:r>
+                  </a:p>
+                </c:rich>
+              </c:tx>
+              <c:dLblPos val="outEnd"/>
+              <c:showLegendKey val="0"/>
+              <c:showVal val="0"/>
+              <c:showCatName val="0"/>
+              <c:showSerName val="0"/>
+              <c:showPercent val="0"/>
+              <c:showBubbleSize val="0"/>
+            </c:dLbl>
+            <c:dLblPos val="outEnd"/>
+            <c:showLegendKey val="0"/>
+            <c:showVal val="0"/>
+            <c:showCatName val="0"/>
+            <c:showSerName val="0"/>
+            <c:showPercent val="0"/>
+            <c:showBubbleSize val="0"/>
+          </c:dLbls>
           <c:cat>
             <c:strRef>
               <c:f>Sheet1!$A$2:$A$6</c:f>
@@ -657,6 +776,81 @@
               </a:solidFill>
             </c:spPr>
           </c:dPt>
+          <c:dLbls>
+            <c:dLbl>
+              <c:idx val="0"/>
+              <c:tx>
+                <c:rich>
+                  <a:bodyPr/>
+                  <a:lstStyle/>
+                  <a:p>
+                    <a:r>
+                      <a:rPr lang="en-US" sz="800"/>
+                      <a:t>52.0%</a:t>
+                    </a:r>
+                  </a:p>
+                </c:rich>
+              </c:tx>
+              <c:dLblPos val="outEnd"/>
+              <c:showLegendKey val="0"/>
+              <c:showVal val="0"/>
+              <c:showCatName val="0"/>
+              <c:showSerName val="0"/>
+              <c:showPercent val="0"/>
+              <c:showBubbleSize val="0"/>
+            </c:dLbl>
+            <c:dLbl>
+              <c:idx val="1"/>
+              <c:tx>
+                <c:rich>
+                  <a:bodyPr/>
+                  <a:lstStyle/>
+                  <a:p>
+                    <a:r>
+                      <a:rPr lang="en-US" sz="800"/>
+                      <a:t>19.0%</a:t>
+                    </a:r>
+                  </a:p>
+                </c:rich>
+              </c:tx>
+              <c:dLblPos val="outEnd"/>
+              <c:showLegendKey val="0"/>
+              <c:showVal val="0"/>
+              <c:showCatName val="0"/>
+              <c:showSerName val="0"/>
+              <c:showPercent val="0"/>
+              <c:showBubbleSize val="0"/>
+            </c:dLbl>
+            <c:dLbl>
+              <c:idx val="2"/>
+              <c:tx>
+                <c:rich>
+                  <a:bodyPr/>
+                  <a:lstStyle/>
+                  <a:p>
+                    <a:r>
+                      <a:rPr lang="en-US" sz="800"/>
+                      <a:t>1.0%</a:t>
+                    </a:r>
+                  </a:p>
+                </c:rich>
+              </c:tx>
+              <c:dLblPos val="outEnd"/>
+              <c:showLegendKey val="0"/>
+              <c:showVal val="0"/>
+              <c:showCatName val="0"/>
+              <c:showSerName val="0"/>
+              <c:showPercent val="0"/>
+              <c:showBubbleSize val="0"/>
+            </c:dLbl>
+            <c:dLblPos val="outEnd"/>
+            <c:showLegendKey val="0"/>
+            <c:showVal val="0"/>
+            <c:showCatName val="0"/>
+            <c:showSerName val="0"/>
+            <c:showPercent val="0"/>
+            <c:showBubbleSize val="0"/>
+          </c:dLbls>
           <c:cat>
             <c:strRef>
               <c:f>Sheet1!$A$2:$A$4</c:f>
@@ -834,6 +1028,81 @@
               </a:solidFill>
             </c:spPr>
           </c:dPt>
+          <c:dLbls>
+            <c:dLbl>
+              <c:idx val="0"/>
+              <c:tx>
+                <c:rich>
+                  <a:bodyPr/>
+                  <a:lstStyle/>
+                  <a:p>
+                    <a:r>
+                      <a:rPr lang="en-US" sz="800"/>
+                      <a:t>48.0%</a:t>
+                    </a:r>
+                  </a:p>
+                </c:rich>
+              </c:tx>
+              <c:dLblPos val="outEnd"/>
+              <c:showLegendKey val="0"/>
+              <c:showVal val="0"/>
+              <c:showCatName val="0"/>
+              <c:showSerName val="0"/>
+              <c:showPercent val="0"/>
+              <c:showBubbleSize val="0"/>
+            </c:dLbl>
+            <c:dLbl>
+              <c:idx val="1"/>
+              <c:tx>
+                <c:rich>
+                  <a:bodyPr/>
+                  <a:lstStyle/>
+                  <a:p>
+                    <a:r>
+                      <a:rPr lang="en-US" sz="800"/>
+                      <a:t>21.0%</a:t>
+                    </a:r>
+                  </a:p>
+                </c:rich>
+              </c:tx>
+              <c:dLblPos val="outEnd"/>
+              <c:showLegendKey val="0"/>
+              <c:showVal val="0"/>
+              <c:showCatName val="0"/>
+              <c:showSerName val="0"/>
+              <c:showPercent val="0"/>
+              <c:showBubbleSize val="0"/>
+            </c:dLbl>
+            <c:dLbl>
+              <c:idx val="2"/>
+              <c:tx>
+                <c:rich>
+                  <a:bodyPr/>
+                  <a:lstStyle/>
+                  <a:p>
+                    <a:r>
+                      <a:rPr lang="en-US" sz="800"/>
+                      <a:t>3.0%</a:t>
+                    </a:r>
+                  </a:p>
+                </c:rich>
+              </c:tx>
+              <c:dLblPos val="outEnd"/>
+              <c:showLegendKey val="0"/>
+              <c:showVal val="0"/>
+              <c:showCatName val="0"/>
+              <c:showSerName val="0"/>
+              <c:showPercent val="0"/>
+              <c:showBubbleSize val="0"/>
+            </c:dLbl>
+            <c:dLblPos val="outEnd"/>
+            <c:showLegendKey val="0"/>
+            <c:showVal val="0"/>
+            <c:showCatName val="0"/>
+            <c:showSerName val="0"/>
+            <c:showPercent val="0"/>
+            <c:showBubbleSize val="0"/>
+          </c:dLbls>
           <c:cat>
             <c:strRef>
               <c:f>Sheet1!$A$2:$A$4</c:f>
@@ -1027,6 +1296,125 @@
               </a:solidFill>
             </c:spPr>
           </c:dPt>
+          <c:dLbls>
+            <c:dLbl>
+              <c:idx val="0"/>
+              <c:tx>
+                <c:rich>
+                  <a:bodyPr/>
+                  <a:lstStyle/>
+                  <a:p>
+                    <a:r>
+                      <a:rPr lang="en-US" sz="800"/>
+                      <a:t>+700 bps</a:t>
+                    </a:r>
+                  </a:p>
+                </c:rich>
+              </c:tx>
+              <c:dLblPos val="outEnd"/>
+              <c:showLegendKey val="0"/>
+              <c:showVal val="0"/>
+              <c:showCatName val="0"/>
+              <c:showSerName val="0"/>
+              <c:showPercent val="0"/>
+              <c:showBubbleSize val="0"/>
+            </c:dLbl>
+            <c:dLbl>
+              <c:idx val="1"/>
+              <c:tx>
+                <c:rich>
+                  <a:bodyPr/>
+                  <a:lstStyle/>
+                  <a:p>
+                    <a:r>
+                      <a:rPr lang="en-US" sz="800"/>
+                      <a:t>−600 bps</a:t>
+                    </a:r>
+                  </a:p>
+                </c:rich>
+              </c:tx>
+              <c:dLblPos val="outEnd"/>
+              <c:showLegendKey val="0"/>
+              <c:showVal val="0"/>
+              <c:showCatName val="0"/>
+              <c:showSerName val="0"/>
+              <c:showPercent val="0"/>
+              <c:showBubbleSize val="0"/>
+            </c:dLbl>
+            <c:dLbl>
+              <c:idx val="2"/>
+              <c:tx>
+                <c:rich>
+                  <a:bodyPr/>
+                  <a:lstStyle/>
+                  <a:p>
+                    <a:r>
+                      <a:rPr lang="en-US" sz="800"/>
+                      <a:t>+200 bps</a:t>
+                    </a:r>
+                  </a:p>
+                </c:rich>
+              </c:tx>
+              <c:dLblPos val="outEnd"/>
+              <c:showLegendKey val="0"/>
+              <c:showVal val="0"/>
+              <c:showCatName val="0"/>
+              <c:showSerName val="0"/>
+              <c:showPercent val="0"/>
+              <c:showBubbleSize val="0"/>
+            </c:dLbl>
+            <c:dLbl>
+              <c:idx val="3"/>
+              <c:tx>
+                <c:rich>
+                  <a:bodyPr/>
+                  <a:lstStyle/>
+                  <a:p>
+                    <a:r>
+                      <a:rPr lang="en-US" sz="800"/>
+                      <a:t>+100 bps</a:t>
+                    </a:r>
+                  </a:p>
+                </c:rich>
+              </c:tx>
+              <c:dLblPos val="outEnd"/>
+              <c:showLegendKey val="0"/>
+              <c:showVal val="0"/>
+              <c:showCatName val="0"/>
+              <c:showSerName val="0"/>
+              <c:showPercent val="0"/>
+              <c:showBubbleSize val="0"/>
+            </c:dLbl>
+            <c:dLbl>
+              <c:idx val="4"/>
+              <c:tx>
+                <c:rich>
+                  <a:bodyPr/>
+                  <a:lstStyle/>
+                  <a:p>
+                    <a:r>
+                      <a:rPr lang="en-US" sz="800"/>
+                      <a:t>−400 bps</a:t>
+                    </a:r>
+                  </a:p>
+                </c:rich>
+              </c:tx>
+              <c:dLblPos val="outEnd"/>
+              <c:showLegendKey val="0"/>
+              <c:showVal val="0"/>
+              <c:showCatName val="0"/>
+              <c:showSerName val="0"/>
+              <c:showPercent val="0"/>
+              <c:showBubbleSize val="0"/>
+            </c:dLbl>
+            <c:dLblPos val="outEnd"/>
+            <c:showLegendKey val="0"/>
+            <c:showVal val="0"/>
+            <c:showCatName val="0"/>
+            <c:showSerName val="0"/>
+            <c:showPercent val="0"/>
+            <c:showBubbleSize val="0"/>
+          </c:dLbls>
           <c:cat>
             <c:strRef>
               <c:f>Sheet1!$A$2:$A$6</c:f>
@@ -1200,6 +1588,37 @@
               </a:solidFill>
             </c:spPr>
           </c:dPt>
+          <c:dLbls>
+            <c:dLbl>
+              <c:idx val="0"/>
+              <c:tx>
+                <c:rich>
+                  <a:bodyPr/>
+                  <a:lstStyle/>
+                  <a:p>
+                    <a:r>
+                      <a:rPr lang="en-US" sz="800"/>
+                      <a:t>8.5%</a:t>
+                    </a:r>
+                  </a:p>
+                </c:rich>
+              </c:tx>
+              <c:dLblPos val="outEnd"/>
+              <c:showLegendKey val="0"/>
+              <c:showVal val="0"/>
+              <c:showCatName val="0"/>
+              <c:showSerName val="0"/>
+              <c:showPercent val="0"/>
+              <c:showBubbleSize val="0"/>
+            </c:dLbl>
+            <c:dLblPos val="outEnd"/>
+            <c:showLegendKey val="0"/>
+            <c:showVal val="0"/>
+            <c:showCatName val="0"/>
+            <c:showSerName val="0"/>
+            <c:showPercent val="0"/>
+            <c:showBubbleSize val="0"/>
+          </c:dLbls>
           <c:cat>
             <c:strRef>
               <c:f>Sheet1!$A$2:$A$2</c:f>
@@ -1496,6 +1915,15 @@
       <c:legendPos val="b"/>
       <c:layout/>
       <c:overlay val="0"/>
+      <c:txPr>
+        <a:bodyPr/>
+        <a:lstStyle/>
+        <a:p>
+          <a:pPr>
+            <a:defRPr sz="700"/>
+          </a:pPr>
+        </a:p>
+      </c:txPr>
     </c:legend>
     <c:plotVisOnly val="1"/>
     <c:dispBlanksAs val="gap"/>
@@ -1561,6 +1989,59 @@
               </a:solidFill>
             </c:spPr>
           </c:dPt>
+          <c:dLbls>
+            <c:dLbl>
+              <c:idx val="0"/>
+              <c:tx>
+                <c:rich>
+                  <a:bodyPr/>
+                  <a:lstStyle/>
+                  <a:p>
+                    <a:r>
+                      <a:rPr lang="en-US" sz="800"/>
+                      <a:t>+6.2%</a:t>
+                    </a:r>
+                  </a:p>
+                </c:rich>
+              </c:tx>
+              <c:dLblPos val="outEnd"/>
+              <c:showLegendKey val="0"/>
+              <c:showVal val="0"/>
+              <c:showCatName val="0"/>
+              <c:showSerName val="0"/>
+              <c:showPercent val="0"/>
+              <c:showBubbleSize val="0"/>
+            </c:dLbl>
+            <c:dLbl>
+              <c:idx val="1"/>
+              <c:tx>
+                <c:rich>
+                  <a:bodyPr/>
+                  <a:lstStyle/>
+                  <a:p>
+                    <a:r>
+                      <a:rPr lang="en-US" sz="800"/>
+                      <a:t>+5.2%</a:t>
+                    </a:r>
+                  </a:p>
+                </c:rich>
+              </c:tx>
+              <c:dLblPos val="outEnd"/>
+              <c:showLegendKey val="0"/>
+              <c:showVal val="0"/>
+              <c:showCatName val="0"/>
+              <c:showSerName val="0"/>
+              <c:showPercent val="0"/>
+              <c:showBubbleSize val="0"/>
+            </c:dLbl>
+            <c:dLblPos val="outEnd"/>
+            <c:showLegendKey val="0"/>
+            <c:showVal val="0"/>
+            <c:showCatName val="0"/>
+            <c:showSerName val="0"/>
+            <c:showPercent val="0"/>
+            <c:showBubbleSize val="0"/>
+          </c:dLbls>
           <c:cat>
             <c:strRef>
               <c:f>Sheet1!$A$2:$A$3</c:f>
@@ -1887,6 +2368,59 @@
               </a:solidFill>
             </c:spPr>
           </c:dPt>
+          <c:dLbls>
+            <c:dLbl>
+              <c:idx val="0"/>
+              <c:tx>
+                <c:rich>
+                  <a:bodyPr/>
+                  <a:lstStyle/>
+                  <a:p>
+                    <a:r>
+                      <a:rPr lang="en-US" sz="800"/>
+                      <a:t>−34 bps</a:t>
+                    </a:r>
+                  </a:p>
+                </c:rich>
+              </c:tx>
+              <c:dLblPos val="outEnd"/>
+              <c:showLegendKey val="0"/>
+              <c:showVal val="0"/>
+              <c:showCatName val="0"/>
+              <c:showSerName val="0"/>
+              <c:showPercent val="0"/>
+              <c:showBubbleSize val="0"/>
+            </c:dLbl>
+            <c:dLbl>
+              <c:idx val="1"/>
+              <c:tx>
+                <c:rich>
+                  <a:bodyPr/>
+                  <a:lstStyle/>
+                  <a:p>
+                    <a:r>
+                      <a:rPr lang="en-US" sz="800"/>
+                      <a:t>+499 bps</a:t>
+                    </a:r>
+                  </a:p>
+                </c:rich>
+              </c:tx>
+              <c:dLblPos val="outEnd"/>
+              <c:showLegendKey val="0"/>
+              <c:showVal val="0"/>
+              <c:showCatName val="0"/>
+              <c:showSerName val="0"/>
+              <c:showPercent val="0"/>
+              <c:showBubbleSize val="0"/>
+            </c:dLbl>
+            <c:dLblPos val="outEnd"/>
+            <c:showLegendKey val="0"/>
+            <c:showVal val="0"/>
+            <c:showCatName val="0"/>
+            <c:showSerName val="0"/>
+            <c:showPercent val="0"/>
+            <c:showBubbleSize val="0"/>
+          </c:dLbls>
           <c:cat>
             <c:strRef>
               <c:f>Sheet1!$A$2:$A$3</c:f>
@@ -2050,6 +2584,59 @@
               </a:solidFill>
             </c:spPr>
           </c:dPt>
+          <c:dLbls>
+            <c:dLbl>
+              <c:idx val="0"/>
+              <c:tx>
+                <c:rich>
+                  <a:bodyPr/>
+                  <a:lstStyle/>
+                  <a:p>
+                    <a:r>
+                      <a:rPr lang="en-US" sz="800"/>
+                      <a:t>−24.0%</a:t>
+                    </a:r>
+                  </a:p>
+                </c:rich>
+              </c:tx>
+              <c:dLblPos val="outEnd"/>
+              <c:showLegendKey val="0"/>
+              <c:showVal val="0"/>
+              <c:showCatName val="0"/>
+              <c:showSerName val="0"/>
+              <c:showPercent val="0"/>
+              <c:showBubbleSize val="0"/>
+            </c:dLbl>
+            <c:dLbl>
+              <c:idx val="1"/>
+              <c:tx>
+                <c:rich>
+                  <a:bodyPr/>
+                  <a:lstStyle/>
+                  <a:p>
+                    <a:r>
+                      <a:rPr lang="en-US" sz="800"/>
+                      <a:t>−14.0%</a:t>
+                    </a:r>
+                  </a:p>
+                </c:rich>
+              </c:tx>
+              <c:dLblPos val="outEnd"/>
+              <c:showLegendKey val="0"/>
+              <c:showVal val="0"/>
+              <c:showCatName val="0"/>
+              <c:showSerName val="0"/>
+              <c:showPercent val="0"/>
+              <c:showBubbleSize val="0"/>
+            </c:dLbl>
+            <c:dLblPos val="outEnd"/>
+            <c:showLegendKey val="0"/>
+            <c:showVal val="0"/>
+            <c:showCatName val="0"/>
+            <c:showSerName val="0"/>
+            <c:showPercent val="0"/>
+            <c:showBubbleSize val="0"/>
+          </c:dLbls>
           <c:cat>
             <c:strRef>
               <c:f>Sheet1!$A$2:$A$3</c:f>
@@ -2229,6 +2816,103 @@
               </a:solidFill>
             </c:spPr>
           </c:dPt>
+          <c:dLbls>
+            <c:dLbl>
+              <c:idx val="0"/>
+              <c:tx>
+                <c:rich>
+                  <a:bodyPr/>
+                  <a:lstStyle/>
+                  <a:p>
+                    <a:r>
+                      <a:rPr lang="en-US" sz="800"/>
+                      <a:t>44.6%</a:t>
+                    </a:r>
+                  </a:p>
+                </c:rich>
+              </c:tx>
+              <c:dLblPos val="outEnd"/>
+              <c:showLegendKey val="0"/>
+              <c:showVal val="0"/>
+              <c:showCatName val="0"/>
+              <c:showSerName val="0"/>
+              <c:showPercent val="0"/>
+              <c:showBubbleSize val="0"/>
+            </c:dLbl>
+            <c:dLbl>
+              <c:idx val="1"/>
+              <c:tx>
+                <c:rich>
+                  <a:bodyPr/>
+                  <a:lstStyle/>
+                  <a:p>
+                    <a:r>
+                      <a:rPr lang="en-US" sz="800"/>
+                      <a:t>11.9%</a:t>
+                    </a:r>
+                  </a:p>
+                </c:rich>
+              </c:tx>
+              <c:dLblPos val="outEnd"/>
+              <c:showLegendKey val="0"/>
+              <c:showVal val="0"/>
+              <c:showCatName val="0"/>
+              <c:showSerName val="0"/>
+              <c:showPercent val="0"/>
+              <c:showBubbleSize val="0"/>
+            </c:dLbl>
+            <c:dLbl>
+              <c:idx val="2"/>
+              <c:tx>
+                <c:rich>
+                  <a:bodyPr/>
+                  <a:lstStyle/>
+                  <a:p>
+                    <a:r>
+                      <a:rPr lang="en-US" sz="800"/>
+                      <a:t>11.9%</a:t>
+                    </a:r>
+                  </a:p>
+                </c:rich>
+              </c:tx>
+              <c:dLblPos val="outEnd"/>
+              <c:showLegendKey val="0"/>
+              <c:showVal val="0"/>
+              <c:showCatName val="0"/>
+              <c:showSerName val="0"/>
+              <c:showPercent val="0"/>
+              <c:showBubbleSize val="0"/>
+            </c:dLbl>
+            <c:dLbl>
+              <c:idx val="3"/>
+              <c:tx>
+                <c:rich>
+                  <a:bodyPr/>
+                  <a:lstStyle/>
+                  <a:p>
+                    <a:r>
+                      <a:rPr lang="en-US" sz="800"/>
+                      <a:t>31.7%</a:t>
+                    </a:r>
+                  </a:p>
+                </c:rich>
+              </c:tx>
+              <c:dLblPos val="outEnd"/>
+              <c:showLegendKey val="0"/>
+              <c:showVal val="0"/>
+              <c:showCatName val="0"/>
+              <c:showSerName val="0"/>
+              <c:showPercent val="0"/>
+              <c:showBubbleSize val="0"/>
+            </c:dLbl>
+            <c:dLblPos val="outEnd"/>
+            <c:showLegendKey val="0"/>
+            <c:showVal val="0"/>
+            <c:showCatName val="0"/>
+            <c:showSerName val="0"/>
+            <c:showPercent val="0"/>
+            <c:showBubbleSize val="0"/>
+          </c:dLbls>
           <c:cat>
             <c:strRef>
               <c:f>Sheet1!$A$2:$A$5</c:f>
@@ -5780,7 +6464,7 @@
         </p:nvSpPr>
         <p:spPr>
           <a:xfrm>
-            <a:off x="685800" y="1828800"/>
+            <a:off x="685800" y="1664208"/>
             <a:ext cx="9966960" cy="274320"/>
           </a:xfrm>
           <a:prstGeom prst="rect">
@@ -5798,7 +6482,7 @@
               <a:spcAft>
                 <a:spcPts val="0"/>
               </a:spcAft>
-              <a:defRPr sz="900" b="1">
+              <a:defRPr sz="850" b="1">
                 <a:solidFill>
                   <a:srgbClr val="C6F432"/>
                 </a:solidFill>
@@ -5822,7 +6506,7 @@
         </p:nvSpPr>
         <p:spPr>
           <a:xfrm>
-            <a:off x="685800" y="2176272"/>
+            <a:off x="685800" y="2011680"/>
             <a:ext cx="9966960" cy="1234440"/>
           </a:xfrm>
           <a:prstGeom prst="rect">
@@ -5840,7 +6524,7 @@
               <a:spcAft>
                 <a:spcPts val="0"/>
               </a:spcAft>
-              <a:defRPr sz="3400" b="1">
+              <a:defRPr sz="3300" b="1">
                 <a:solidFill>
                   <a:srgbClr val="FFFFFF"/>
                 </a:solidFill>
@@ -5851,7 +6535,7 @@
               <a:rPr>
                 <a:latin typeface="Inter"/>
               </a:rPr>
-              <a:t>Rebalance: Gradient Global Growth III</a:t>
+              <a:t>Rebalance: Northstar Global Growth Fund</a:t>
             </a:r>
           </a:p>
         </p:txBody>
@@ -5864,8 +6548,8 @@
         </p:nvSpPr>
         <p:spPr>
           <a:xfrm>
-            <a:off x="685800" y="3456432"/>
-            <a:ext cx="9692640" cy="640080"/>
+            <a:off x="685800" y="3273552"/>
+            <a:ext cx="9692640" cy="594360"/>
           </a:xfrm>
           <a:prstGeom prst="rect">
             <a:avLst/>
@@ -5882,7 +6566,7 @@
               <a:spcAft>
                 <a:spcPts val="0"/>
               </a:spcAft>
-              <a:defRPr sz="1500" b="0">
+              <a:defRPr sz="1400" b="0">
                 <a:solidFill>
                   <a:srgbClr val="9AA5B1"/>
                 </a:solidFill>
@@ -5893,7 +6577,7 @@
               <a:rPr>
                 <a:latin typeface="Inter"/>
               </a:rPr>
-              <a:t>Example Foundation · Prepared for the Investment Committee · Meeting 2026-10-15</a:t>
+              <a:t>Northstar Foundation · Investment Committee meeting 2026-10-15</a:t>
             </a:r>
           </a:p>
         </p:txBody>
@@ -5906,8 +6590,8 @@
         </p:nvSpPr>
         <p:spPr>
           <a:xfrm>
-            <a:off x="685800" y="4251960"/>
-            <a:ext cx="1005840" cy="54864"/>
+            <a:off x="685800" y="4005072"/>
+            <a:ext cx="822960" cy="45720"/>
           </a:xfrm>
           <a:prstGeom prst="rect">
             <a:avLst/>
@@ -5955,8 +6639,8 @@
         </p:nvSpPr>
         <p:spPr>
           <a:xfrm>
-            <a:off x="685800" y="4572000"/>
-            <a:ext cx="3063240" cy="182880"/>
+            <a:off x="685800" y="4315968"/>
+            <a:ext cx="4709160" cy="182880"/>
           </a:xfrm>
           <a:prstGeom prst="rect">
             <a:avLst/>
@@ -5984,7 +6668,7 @@
               <a:rPr>
                 <a:latin typeface="Inter"/>
               </a:rPr>
-              <a:t>MEMO TYPE</a:t>
+              <a:t>DECISION</a:t>
             </a:r>
           </a:p>
         </p:txBody>
@@ -5997,8 +6681,8 @@
         </p:nvSpPr>
         <p:spPr>
           <a:xfrm>
-            <a:off x="685800" y="4773168"/>
-            <a:ext cx="3063240" cy="320040"/>
+            <a:off x="685800" y="4507992"/>
+            <a:ext cx="4709160" cy="310896"/>
           </a:xfrm>
           <a:prstGeom prst="rect">
             <a:avLst/>
@@ -6039,8 +6723,8 @@
         </p:nvSpPr>
         <p:spPr>
           <a:xfrm>
-            <a:off x="4160520" y="4572000"/>
-            <a:ext cx="3063240" cy="182880"/>
+            <a:off x="5852160" y="4315968"/>
+            <a:ext cx="4709160" cy="182880"/>
           </a:xfrm>
           <a:prstGeom prst="rect">
             <a:avLst/>
@@ -6081,8 +6765,8 @@
         </p:nvSpPr>
         <p:spPr>
           <a:xfrm>
-            <a:off x="4160520" y="4773168"/>
-            <a:ext cx="3063240" cy="320040"/>
+            <a:off x="5852160" y="4507992"/>
+            <a:ext cx="4709160" cy="310896"/>
           </a:xfrm>
           <a:prstGeom prst="rect">
             <a:avLst/>
@@ -6123,8 +6807,8 @@
         </p:nvSpPr>
         <p:spPr>
           <a:xfrm>
-            <a:off x="7635240" y="4572000"/>
-            <a:ext cx="3063240" cy="182880"/>
+            <a:off x="685800" y="4937759"/>
+            <a:ext cx="4709160" cy="182880"/>
           </a:xfrm>
           <a:prstGeom prst="rect">
             <a:avLst/>
@@ -6165,8 +6849,8 @@
         </p:nvSpPr>
         <p:spPr>
           <a:xfrm>
-            <a:off x="7635240" y="4773168"/>
-            <a:ext cx="3063240" cy="320040"/>
+            <a:off x="685800" y="5129783"/>
+            <a:ext cx="4709160" cy="310896"/>
           </a:xfrm>
           <a:prstGeom prst="rect">
             <a:avLst/>
@@ -6207,8 +6891,8 @@
         </p:nvSpPr>
         <p:spPr>
           <a:xfrm>
-            <a:off x="685800" y="5230368"/>
-            <a:ext cx="3063240" cy="182880"/>
+            <a:off x="5852160" y="4937759"/>
+            <a:ext cx="4709160" cy="182880"/>
           </a:xfrm>
           <a:prstGeom prst="rect">
             <a:avLst/>
@@ -6249,8 +6933,8 @@
         </p:nvSpPr>
         <p:spPr>
           <a:xfrm>
-            <a:off x="685800" y="5431536"/>
-            <a:ext cx="3063240" cy="320040"/>
+            <a:off x="5852160" y="5129783"/>
+            <a:ext cx="4709160" cy="310896"/>
           </a:xfrm>
           <a:prstGeom prst="rect">
             <a:avLst/>
@@ -6285,182 +6969,14 @@
       </p:sp>
       <p:sp>
         <p:nvSpPr>
-          <p:cNvPr id="17" name="TextBox 16"/>
-          <p:cNvSpPr txBox="1"/>
-          <p:nvPr/>
-        </p:nvSpPr>
-        <p:spPr>
-          <a:xfrm>
-            <a:off x="4160520" y="5230368"/>
-            <a:ext cx="3063240" cy="182880"/>
-          </a:xfrm>
-          <a:prstGeom prst="rect">
-            <a:avLst/>
-          </a:prstGeom>
-          <a:noFill/>
-        </p:spPr>
-        <p:txBody>
-          <a:bodyPr wrap="none" lIns="9144" rIns="9144" tIns="9144" bIns="9144" anchor="t">
-            <a:spAutoFit/>
-          </a:bodyPr>
-          <a:lstStyle/>
-          <a:p>
-            <a:pPr algn="l">
-              <a:spcAft>
-                <a:spcPts val="0"/>
-              </a:spcAft>
-              <a:defRPr sz="700" b="1">
-                <a:solidFill>
-                  <a:srgbClr val="8A94A1"/>
-                </a:solidFill>
-                <a:latin typeface="Inter"/>
-              </a:defRPr>
-            </a:pPr>
-            <a:r>
-              <a:rPr>
-                <a:latin typeface="Inter"/>
-              </a:rPr>
-              <a:t>ASSUMPTION SET</a:t>
-            </a:r>
-          </a:p>
-        </p:txBody>
-      </p:sp>
-      <p:sp>
-        <p:nvSpPr>
-          <p:cNvPr id="18" name="TextBox 17"/>
-          <p:cNvSpPr txBox="1"/>
-          <p:nvPr/>
-        </p:nvSpPr>
-        <p:spPr>
-          <a:xfrm>
-            <a:off x="4160520" y="5431536"/>
-            <a:ext cx="3063240" cy="320040"/>
-          </a:xfrm>
-          <a:prstGeom prst="rect">
-            <a:avLst/>
-          </a:prstGeom>
-          <a:noFill/>
-        </p:spPr>
-        <p:txBody>
-          <a:bodyPr wrap="none" lIns="9144" rIns="9144" tIns="9144" bIns="9144" anchor="t">
-            <a:spAutoFit/>
-          </a:bodyPr>
-          <a:lstStyle/>
-          <a:p>
-            <a:pPr algn="l">
-              <a:spcAft>
-                <a:spcPts val="0"/>
-              </a:spcAft>
-              <a:defRPr sz="1000" b="1">
-                <a:solidFill>
-                  <a:srgbClr val="FFFFFF"/>
-                </a:solidFill>
-                <a:latin typeface="Inter"/>
-              </a:defRPr>
-            </a:pPr>
-            <a:r>
-              <a:rPr>
-                <a:latin typeface="Inter"/>
-              </a:rPr>
-              <a:t>ICAPM Q3 2026</a:t>
-            </a:r>
-          </a:p>
-        </p:txBody>
-      </p:sp>
-      <p:sp>
-        <p:nvSpPr>
-          <p:cNvPr id="19" name="TextBox 18"/>
-          <p:cNvSpPr txBox="1"/>
-          <p:nvPr/>
-        </p:nvSpPr>
-        <p:spPr>
-          <a:xfrm>
-            <a:off x="7635240" y="5230368"/>
-            <a:ext cx="3063240" cy="182880"/>
-          </a:xfrm>
-          <a:prstGeom prst="rect">
-            <a:avLst/>
-          </a:prstGeom>
-          <a:noFill/>
-        </p:spPr>
-        <p:txBody>
-          <a:bodyPr wrap="none" lIns="9144" rIns="9144" tIns="9144" bIns="9144" anchor="t">
-            <a:spAutoFit/>
-          </a:bodyPr>
-          <a:lstStyle/>
-          <a:p>
-            <a:pPr algn="l">
-              <a:spcAft>
-                <a:spcPts val="0"/>
-              </a:spcAft>
-              <a:defRPr sz="700" b="1">
-                <a:solidFill>
-                  <a:srgbClr val="8A94A1"/>
-                </a:solidFill>
-                <a:latin typeface="Inter"/>
-              </a:defRPr>
-            </a:pPr>
-            <a:r>
-              <a:rPr>
-                <a:latin typeface="Inter"/>
-              </a:rPr>
-              <a:t>STATUS</a:t>
-            </a:r>
-          </a:p>
-        </p:txBody>
-      </p:sp>
-      <p:sp>
-        <p:nvSpPr>
-          <p:cNvPr id="20" name="TextBox 19"/>
-          <p:cNvSpPr txBox="1"/>
-          <p:nvPr/>
-        </p:nvSpPr>
-        <p:spPr>
-          <a:xfrm>
-            <a:off x="7635240" y="5431536"/>
-            <a:ext cx="3063240" cy="320040"/>
-          </a:xfrm>
-          <a:prstGeom prst="rect">
-            <a:avLst/>
-          </a:prstGeom>
-          <a:noFill/>
-        </p:spPr>
-        <p:txBody>
-          <a:bodyPr wrap="none" lIns="9144" rIns="9144" tIns="9144" bIns="9144" anchor="t">
-            <a:spAutoFit/>
-          </a:bodyPr>
-          <a:lstStyle/>
-          <a:p>
-            <a:pPr algn="l">
-              <a:spcAft>
-                <a:spcPts val="0"/>
-              </a:spcAft>
-              <a:defRPr sz="1000" b="1">
-                <a:solidFill>
-                  <a:srgbClr val="FFFFFF"/>
-                </a:solidFill>
-                <a:latin typeface="Inter"/>
-              </a:defRPr>
-            </a:pPr>
-            <a:r>
-              <a:rPr>
-                <a:latin typeface="Inter"/>
-              </a:rPr>
-              <a:t>Draft</a:t>
-            </a:r>
-          </a:p>
-        </p:txBody>
-      </p:sp>
-      <p:sp>
-        <p:nvSpPr>
-          <p:cNvPr id="21" name="Rectangle 20"/>
+          <p:cNvPr id="17" name="Rectangle 16"/>
           <p:cNvSpPr/>
           <p:nvPr/>
         </p:nvSpPr>
         <p:spPr>
           <a:xfrm>
-            <a:off x="685800" y="5833872"/>
-            <a:ext cx="3063240" cy="384048"/>
+            <a:off x="685800" y="5687568"/>
+            <a:ext cx="3337560" cy="530352"/>
           </a:xfrm>
           <a:prstGeom prst="rect">
             <a:avLst/>
@@ -6502,91 +7018,175 @@
       </p:sp>
       <p:sp>
         <p:nvSpPr>
+          <p:cNvPr id="18" name="TextBox 17"/>
+          <p:cNvSpPr txBox="1"/>
+          <p:nvPr/>
+        </p:nvSpPr>
+        <p:spPr>
+          <a:xfrm>
+            <a:off x="822960" y="5760720"/>
+            <a:ext cx="3063240" cy="128016"/>
+          </a:xfrm>
+          <a:prstGeom prst="rect">
+            <a:avLst/>
+          </a:prstGeom>
+          <a:noFill/>
+        </p:spPr>
+        <p:txBody>
+          <a:bodyPr wrap="none" lIns="9144" rIns="9144" tIns="9144" bIns="9144" anchor="t">
+            <a:spAutoFit/>
+          </a:bodyPr>
+          <a:lstStyle/>
+          <a:p>
+            <a:pPr algn="l">
+              <a:spcAft>
+                <a:spcPts val="0"/>
+              </a:spcAft>
+              <a:defRPr sz="620" b="1">
+                <a:solidFill>
+                  <a:srgbClr val="0D1117"/>
+                </a:solidFill>
+                <a:latin typeface="Inter"/>
+              </a:defRPr>
+            </a:pPr>
+            <a:r>
+              <a:rPr>
+                <a:latin typeface="Inter"/>
+              </a:rPr>
+              <a:t>POLICY ALIGNMENT</a:t>
+            </a:r>
+          </a:p>
+        </p:txBody>
+      </p:sp>
+      <p:sp>
+        <p:nvSpPr>
+          <p:cNvPr id="19" name="TextBox 18"/>
+          <p:cNvSpPr txBox="1"/>
+          <p:nvPr/>
+        </p:nvSpPr>
+        <p:spPr>
+          <a:xfrm>
+            <a:off x="822960" y="5916168"/>
+            <a:ext cx="3063240" cy="182880"/>
+          </a:xfrm>
+          <a:prstGeom prst="rect">
+            <a:avLst/>
+          </a:prstGeom>
+          <a:noFill/>
+        </p:spPr>
+        <p:txBody>
+          <a:bodyPr wrap="none" lIns="9144" rIns="9144" tIns="9144" bIns="9144" anchor="t">
+            <a:spAutoFit/>
+          </a:bodyPr>
+          <a:lstStyle/>
+          <a:p>
+            <a:pPr algn="l">
+              <a:spcAft>
+                <a:spcPts val="0"/>
+              </a:spcAft>
+              <a:defRPr sz="900" b="1">
+                <a:solidFill>
+                  <a:srgbClr val="0D1117"/>
+                </a:solidFill>
+                <a:latin typeface="Inter"/>
+              </a:defRPr>
+            </a:pPr>
+            <a:r>
+              <a:rPr>
+                <a:latin typeface="Inter"/>
+              </a:rPr>
+              <a:t>2 breaches · 1 watch · 3 not assessed</a:t>
+            </a:r>
+          </a:p>
+        </p:txBody>
+      </p:sp>
+      <p:sp>
+        <p:nvSpPr>
+          <p:cNvPr id="20" name="TextBox 19"/>
+          <p:cNvSpPr txBox="1"/>
+          <p:nvPr/>
+        </p:nvSpPr>
+        <p:spPr>
+          <a:xfrm>
+            <a:off x="685800" y="6400800"/>
+            <a:ext cx="8046720" cy="146304"/>
+          </a:xfrm>
+          <a:prstGeom prst="rect">
+            <a:avLst/>
+          </a:prstGeom>
+          <a:noFill/>
+        </p:spPr>
+        <p:txBody>
+          <a:bodyPr wrap="none" lIns="9144" rIns="9144" tIns="9144" bIns="9144" anchor="t">
+            <a:spAutoFit/>
+          </a:bodyPr>
+          <a:lstStyle/>
+          <a:p>
+            <a:pPr algn="l">
+              <a:spcAft>
+                <a:spcPts val="0"/>
+              </a:spcAft>
+              <a:defRPr sz="700" b="0">
+                <a:solidFill>
+                  <a:srgbClr val="8A94A1"/>
+                </a:solidFill>
+                <a:latin typeface="Inter"/>
+              </a:defRPr>
+            </a:pPr>
+            <a:r>
+              <a:rPr>
+                <a:latin typeface="Inter"/>
+              </a:rPr>
+              <a:t>Confidential — Investment Committee</a:t>
+            </a:r>
+          </a:p>
+        </p:txBody>
+      </p:sp>
+      <p:sp>
+        <p:nvSpPr>
+          <p:cNvPr id="21" name="TextBox 20"/>
+          <p:cNvSpPr txBox="1"/>
+          <p:nvPr/>
+        </p:nvSpPr>
+        <p:spPr>
+          <a:xfrm>
+            <a:off x="685800" y="6556248"/>
+            <a:ext cx="8046720" cy="128016"/>
+          </a:xfrm>
+          <a:prstGeom prst="rect">
+            <a:avLst/>
+          </a:prstGeom>
+          <a:noFill/>
+        </p:spPr>
+        <p:txBody>
+          <a:bodyPr wrap="none" lIns="9144" rIns="9144" tIns="9144" bIns="9144" anchor="t">
+            <a:spAutoFit/>
+          </a:bodyPr>
+          <a:lstStyle/>
+          <a:p>
+            <a:pPr algn="l">
+              <a:spcAft>
+                <a:spcPts val="0"/>
+              </a:spcAft>
+              <a:defRPr sz="650" b="0">
+                <a:solidFill>
+                  <a:srgbClr val="8A94A1"/>
+                </a:solidFill>
+                <a:latin typeface="Inter"/>
+              </a:defRPr>
+            </a:pPr>
+            <a:r>
+              <a:rPr>
+                <a:latin typeface="Inter"/>
+              </a:rPr>
+              <a:t>Illustrative sample · not client data</a:t>
+            </a:r>
+          </a:p>
+        </p:txBody>
+      </p:sp>
+      <p:sp>
+        <p:nvSpPr>
           <p:cNvPr id="22" name="TextBox 21"/>
-          <p:cNvSpPr txBox="1"/>
-          <p:nvPr/>
-        </p:nvSpPr>
-        <p:spPr>
-          <a:xfrm>
-            <a:off x="822960" y="5934456"/>
-            <a:ext cx="2788920" cy="164592"/>
-          </a:xfrm>
-          <a:prstGeom prst="rect">
-            <a:avLst/>
-          </a:prstGeom>
-          <a:noFill/>
-        </p:spPr>
-        <p:txBody>
-          <a:bodyPr wrap="none" lIns="9144" rIns="9144" tIns="9144" bIns="9144" anchor="t">
-            <a:spAutoFit/>
-          </a:bodyPr>
-          <a:lstStyle/>
-          <a:p>
-            <a:pPr algn="l">
-              <a:spcAft>
-                <a:spcPts val="0"/>
-              </a:spcAft>
-              <a:defRPr sz="800" b="1">
-                <a:solidFill>
-                  <a:srgbClr val="0D1117"/>
-                </a:solidFill>
-                <a:latin typeface="Inter"/>
-              </a:defRPr>
-            </a:pPr>
-            <a:r>
-              <a:rPr>
-                <a:latin typeface="Inter"/>
-              </a:rPr>
-              <a:t>2 breaches · 1 watch · 3 not assessed</a:t>
-            </a:r>
-          </a:p>
-        </p:txBody>
-      </p:sp>
-      <p:sp>
-        <p:nvSpPr>
-          <p:cNvPr id="23" name="TextBox 22"/>
-          <p:cNvSpPr txBox="1"/>
-          <p:nvPr/>
-        </p:nvSpPr>
-        <p:spPr>
-          <a:xfrm>
-            <a:off x="685800" y="6473952"/>
-            <a:ext cx="8046720" cy="182880"/>
-          </a:xfrm>
-          <a:prstGeom prst="rect">
-            <a:avLst/>
-          </a:prstGeom>
-          <a:noFill/>
-        </p:spPr>
-        <p:txBody>
-          <a:bodyPr wrap="none" lIns="9144" rIns="9144" tIns="9144" bIns="9144" anchor="t">
-            <a:spAutoFit/>
-          </a:bodyPr>
-          <a:lstStyle/>
-          <a:p>
-            <a:pPr algn="l">
-              <a:spcAft>
-                <a:spcPts val="0"/>
-              </a:spcAft>
-              <a:defRPr sz="700" b="0">
-                <a:solidFill>
-                  <a:srgbClr val="8A94A1"/>
-                </a:solidFill>
-                <a:latin typeface="Inter"/>
-              </a:defRPr>
-            </a:pPr>
-            <a:r>
-              <a:rPr>
-                <a:latin typeface="Inter"/>
-              </a:rPr>
-              <a:t>DRAFT — for committee review · Illustrative data</a:t>
-            </a:r>
-          </a:p>
-        </p:txBody>
-      </p:sp>
-      <p:sp>
-        <p:nvSpPr>
-          <p:cNvPr id="24" name="TextBox 23"/>
           <p:cNvSpPr txBox="1"/>
           <p:nvPr/>
         </p:nvSpPr>
@@ -6701,6 +7301,48 @@
         </p:nvSpPr>
         <p:spPr>
           <a:xfrm>
+            <a:off x="5897880" y="310896"/>
+            <a:ext cx="4800600" cy="256032"/>
+          </a:xfrm>
+          <a:prstGeom prst="rect">
+            <a:avLst/>
+          </a:prstGeom>
+          <a:noFill/>
+        </p:spPr>
+        <p:txBody>
+          <a:bodyPr wrap="none" lIns="9144" rIns="9144" tIns="9144" bIns="9144" anchor="t">
+            <a:spAutoFit/>
+          </a:bodyPr>
+          <a:lstStyle/>
+          <a:p>
+            <a:pPr algn="r">
+              <a:spcAft>
+                <a:spcPts val="0"/>
+              </a:spcAft>
+              <a:defRPr sz="680" b="1">
+                <a:solidFill>
+                  <a:srgbClr val="4F6B00"/>
+                </a:solidFill>
+                <a:latin typeface="Inter"/>
+              </a:defRPr>
+            </a:pPr>
+            <a:r>
+              <a:rPr>
+                <a:latin typeface="Inter"/>
+              </a:rPr>
+              <a:t>Illustrative, Gradient Maintained — demo data, not the client's holdings or managers</a:t>
+            </a:r>
+          </a:p>
+        </p:txBody>
+      </p:sp>
+      <p:sp>
+        <p:nvSpPr>
+          <p:cNvPr id="4" name="TextBox 3"/>
+          <p:cNvSpPr txBox="1"/>
+          <p:nvPr/>
+        </p:nvSpPr>
+        <p:spPr>
+          <a:xfrm>
             <a:off x="640080" y="566928"/>
             <a:ext cx="10058400" cy="530352"/>
           </a:xfrm>
@@ -6737,7 +7379,7 @@
       </p:sp>
       <p:sp>
         <p:nvSpPr>
-          <p:cNvPr id="4" name="Rectangle 3"/>
+          <p:cNvPr id="5" name="Rectangle 4"/>
           <p:cNvSpPr/>
           <p:nvPr/>
         </p:nvSpPr>
@@ -6786,7 +7428,7 @@
       </p:sp>
       <p:sp>
         <p:nvSpPr>
-          <p:cNvPr id="5" name="Rectangle 4"/>
+          <p:cNvPr id="6" name="Rectangle 5"/>
           <p:cNvSpPr/>
           <p:nvPr/>
         </p:nvSpPr>
@@ -6835,7 +7477,7 @@
       </p:sp>
       <p:sp>
         <p:nvSpPr>
-          <p:cNvPr id="6" name="TextBox 5"/>
+          <p:cNvPr id="7" name="TextBox 6"/>
           <p:cNvSpPr txBox="1"/>
           <p:nvPr/>
         </p:nvSpPr>
@@ -6877,7 +7519,7 @@
       </p:sp>
       <p:sp>
         <p:nvSpPr>
-          <p:cNvPr id="7" name="TextBox 6"/>
+          <p:cNvPr id="8" name="TextBox 7"/>
           <p:cNvSpPr txBox="1"/>
           <p:nvPr/>
         </p:nvSpPr>
@@ -6912,14 +7554,14 @@
               <a:rPr>
                 <a:latin typeface="Inter"/>
               </a:rPr>
-              <a:t>POLICY STATUS MATRIX (TEST)</a:t>
+              <a:t>POLICY STATUS MATRIX</a:t>
             </a:r>
           </a:p>
         </p:txBody>
       </p:sp>
       <p:graphicFrame>
         <p:nvGraphicFramePr>
-          <p:cNvPr id="8" name="Table 7"/>
+          <p:cNvPr id="9" name="Table 8"/>
           <p:cNvGraphicFramePr>
             <a:graphicFrameLocks noGrp="1"/>
           </p:cNvGraphicFramePr>
@@ -7219,7 +7861,7 @@
       </p:graphicFrame>
       <p:sp>
         <p:nvSpPr>
-          <p:cNvPr id="9" name="Rectangle 8"/>
+          <p:cNvPr id="10" name="Rectangle 9"/>
           <p:cNvSpPr/>
           <p:nvPr/>
         </p:nvSpPr>
@@ -7268,7 +7910,7 @@
       </p:sp>
       <p:sp>
         <p:nvSpPr>
-          <p:cNvPr id="10" name="TextBox 9"/>
+          <p:cNvPr id="11" name="TextBox 10"/>
           <p:cNvSpPr txBox="1"/>
           <p:nvPr/>
         </p:nvSpPr>
@@ -7310,7 +7952,7 @@
       </p:sp>
       <p:sp>
         <p:nvSpPr>
-          <p:cNvPr id="11" name="TextBox 10"/>
+          <p:cNvPr id="12" name="TextBox 11"/>
           <p:cNvSpPr txBox="1"/>
           <p:nvPr/>
         </p:nvSpPr>
@@ -7345,14 +7987,14 @@
               <a:rPr>
                 <a:latin typeface="Inter"/>
               </a:rPr>
-              <a:t>DRAFT — for committee review · Illustrative data · Data as of 2026-09-30</a:t>
-            </a:r>
-          </a:p>
-        </p:txBody>
-      </p:sp>
-      <p:sp>
-        <p:nvSpPr>
-          <p:cNvPr id="12" name="TextBox 11"/>
+              <a:t>Confidential — Investment Committee · Data as of 2026-09-30</a:t>
+            </a:r>
+          </a:p>
+        </p:txBody>
+      </p:sp>
+      <p:sp>
+        <p:nvSpPr>
+          <p:cNvPr id="13" name="TextBox 12"/>
           <p:cNvSpPr txBox="1"/>
           <p:nvPr/>
         </p:nvSpPr>
@@ -7467,6 +8109,48 @@
         </p:nvSpPr>
         <p:spPr>
           <a:xfrm>
+            <a:off x="5897880" y="310896"/>
+            <a:ext cx="4800600" cy="256032"/>
+          </a:xfrm>
+          <a:prstGeom prst="rect">
+            <a:avLst/>
+          </a:prstGeom>
+          <a:noFill/>
+        </p:spPr>
+        <p:txBody>
+          <a:bodyPr wrap="none" lIns="9144" rIns="9144" tIns="9144" bIns="9144" anchor="t">
+            <a:spAutoFit/>
+          </a:bodyPr>
+          <a:lstStyle/>
+          <a:p>
+            <a:pPr algn="r">
+              <a:spcAft>
+                <a:spcPts val="0"/>
+              </a:spcAft>
+              <a:defRPr sz="680" b="1">
+                <a:solidFill>
+                  <a:srgbClr val="4F6B00"/>
+                </a:solidFill>
+                <a:latin typeface="Inter"/>
+              </a:defRPr>
+            </a:pPr>
+            <a:r>
+              <a:rPr>
+                <a:latin typeface="Inter"/>
+              </a:rPr>
+              <a:t>Illustrative, Gradient Maintained — demo data, not the client's holdings or managers</a:t>
+            </a:r>
+          </a:p>
+        </p:txBody>
+      </p:sp>
+      <p:sp>
+        <p:nvSpPr>
+          <p:cNvPr id="4" name="TextBox 3"/>
+          <p:cNvSpPr txBox="1"/>
+          <p:nvPr/>
+        </p:nvSpPr>
+        <p:spPr>
+          <a:xfrm>
             <a:off x="640080" y="566928"/>
             <a:ext cx="10058400" cy="530352"/>
           </a:xfrm>
@@ -7503,7 +8187,7 @@
       </p:sp>
       <p:sp>
         <p:nvSpPr>
-          <p:cNvPr id="4" name="Rectangle 3"/>
+          <p:cNvPr id="5" name="Rectangle 4"/>
           <p:cNvSpPr/>
           <p:nvPr/>
         </p:nvSpPr>
@@ -7552,7 +8236,7 @@
       </p:sp>
       <p:sp>
         <p:nvSpPr>
-          <p:cNvPr id="5" name="Rectangle 4"/>
+          <p:cNvPr id="6" name="Rectangle 5"/>
           <p:cNvSpPr/>
           <p:nvPr/>
         </p:nvSpPr>
@@ -7601,7 +8285,7 @@
       </p:sp>
       <p:sp>
         <p:nvSpPr>
-          <p:cNvPr id="6" name="TextBox 5"/>
+          <p:cNvPr id="7" name="TextBox 6"/>
           <p:cNvSpPr txBox="1"/>
           <p:nvPr/>
         </p:nvSpPr>
@@ -7643,7 +8327,7 @@
       </p:sp>
       <p:sp>
         <p:nvSpPr>
-          <p:cNvPr id="7" name="TextBox 6"/>
+          <p:cNvPr id="8" name="TextBox 7"/>
           <p:cNvSpPr txBox="1"/>
           <p:nvPr/>
         </p:nvSpPr>
@@ -7704,7 +8388,7 @@
       </p:sp>
       <p:sp>
         <p:nvSpPr>
-          <p:cNvPr id="8" name="Rectangle 7"/>
+          <p:cNvPr id="9" name="Rectangle 8"/>
           <p:cNvSpPr/>
           <p:nvPr/>
         </p:nvSpPr>
@@ -7753,7 +8437,7 @@
       </p:sp>
       <p:sp>
         <p:nvSpPr>
-          <p:cNvPr id="9" name="TextBox 8"/>
+          <p:cNvPr id="10" name="TextBox 9"/>
           <p:cNvSpPr txBox="1"/>
           <p:nvPr/>
         </p:nvSpPr>
@@ -7795,7 +8479,7 @@
       </p:sp>
       <p:sp>
         <p:nvSpPr>
-          <p:cNvPr id="10" name="TextBox 9"/>
+          <p:cNvPr id="11" name="TextBox 10"/>
           <p:cNvSpPr txBox="1"/>
           <p:nvPr/>
         </p:nvSpPr>
@@ -7830,14 +8514,14 @@
               <a:rPr>
                 <a:latin typeface="Inter"/>
               </a:rPr>
-              <a:t>DRAFT — for committee review · Illustrative data · Data as of 2026-09-30</a:t>
-            </a:r>
-          </a:p>
-        </p:txBody>
-      </p:sp>
-      <p:sp>
-        <p:nvSpPr>
-          <p:cNvPr id="11" name="TextBox 10"/>
+              <a:t>Confidential — Investment Committee · Data as of 2026-09-30</a:t>
+            </a:r>
+          </a:p>
+        </p:txBody>
+      </p:sp>
+      <p:sp>
+        <p:nvSpPr>
+          <p:cNvPr id="12" name="TextBox 11"/>
           <p:cNvSpPr txBox="1"/>
           <p:nvPr/>
         </p:nvSpPr>
@@ -7952,6 +8636,48 @@
         </p:nvSpPr>
         <p:spPr>
           <a:xfrm>
+            <a:off x="5897880" y="310896"/>
+            <a:ext cx="4800600" cy="256032"/>
+          </a:xfrm>
+          <a:prstGeom prst="rect">
+            <a:avLst/>
+          </a:prstGeom>
+          <a:noFill/>
+        </p:spPr>
+        <p:txBody>
+          <a:bodyPr wrap="none" lIns="9144" rIns="9144" tIns="9144" bIns="9144" anchor="t">
+            <a:spAutoFit/>
+          </a:bodyPr>
+          <a:lstStyle/>
+          <a:p>
+            <a:pPr algn="r">
+              <a:spcAft>
+                <a:spcPts val="0"/>
+              </a:spcAft>
+              <a:defRPr sz="680" b="1">
+                <a:solidFill>
+                  <a:srgbClr val="4F6B00"/>
+                </a:solidFill>
+                <a:latin typeface="Inter"/>
+              </a:defRPr>
+            </a:pPr>
+            <a:r>
+              <a:rPr>
+                <a:latin typeface="Inter"/>
+              </a:rPr>
+              <a:t>Illustrative, Gradient Maintained — demo data, not the client's holdings or managers</a:t>
+            </a:r>
+          </a:p>
+        </p:txBody>
+      </p:sp>
+      <p:sp>
+        <p:nvSpPr>
+          <p:cNvPr id="4" name="TextBox 3"/>
+          <p:cNvSpPr txBox="1"/>
+          <p:nvPr/>
+        </p:nvSpPr>
+        <p:spPr>
+          <a:xfrm>
             <a:off x="640080" y="566928"/>
             <a:ext cx="10058400" cy="530352"/>
           </a:xfrm>
@@ -7988,7 +8714,7 @@
       </p:sp>
       <p:sp>
         <p:nvSpPr>
-          <p:cNvPr id="4" name="Rectangle 3"/>
+          <p:cNvPr id="5" name="Rectangle 4"/>
           <p:cNvSpPr/>
           <p:nvPr/>
         </p:nvSpPr>
@@ -8037,7 +8763,7 @@
       </p:sp>
       <p:sp>
         <p:nvSpPr>
-          <p:cNvPr id="5" name="Rectangle 4"/>
+          <p:cNvPr id="6" name="Rectangle 5"/>
           <p:cNvSpPr/>
           <p:nvPr/>
         </p:nvSpPr>
@@ -8086,7 +8812,7 @@
       </p:sp>
       <p:sp>
         <p:nvSpPr>
-          <p:cNvPr id="6" name="TextBox 5"/>
+          <p:cNvPr id="7" name="TextBox 6"/>
           <p:cNvSpPr txBox="1"/>
           <p:nvPr/>
         </p:nvSpPr>
@@ -8128,7 +8854,7 @@
       </p:sp>
       <p:sp>
         <p:nvSpPr>
-          <p:cNvPr id="7" name="TextBox 6"/>
+          <p:cNvPr id="8" name="TextBox 7"/>
           <p:cNvSpPr txBox="1"/>
           <p:nvPr/>
         </p:nvSpPr>
@@ -8170,7 +8896,7 @@
       </p:sp>
       <p:graphicFrame>
         <p:nvGraphicFramePr>
-          <p:cNvPr id="8" name="Chart 7"/>
+          <p:cNvPr id="9" name="Chart 8"/>
           <p:cNvGraphicFramePr>
             <a:graphicFrameLocks noGrp="1"/>
           </p:cNvGraphicFramePr>
@@ -8188,7 +8914,7 @@
       </p:graphicFrame>
       <p:sp>
         <p:nvSpPr>
-          <p:cNvPr id="9" name="Rectangle 8"/>
+          <p:cNvPr id="10" name="Rectangle 9"/>
           <p:cNvSpPr/>
           <p:nvPr/>
         </p:nvSpPr>
@@ -8237,7 +8963,7 @@
       </p:sp>
       <p:sp>
         <p:nvSpPr>
-          <p:cNvPr id="10" name="TextBox 9"/>
+          <p:cNvPr id="11" name="TextBox 10"/>
           <p:cNvSpPr txBox="1"/>
           <p:nvPr/>
         </p:nvSpPr>
@@ -8279,7 +9005,7 @@
       </p:sp>
       <p:sp>
         <p:nvSpPr>
-          <p:cNvPr id="11" name="TextBox 10"/>
+          <p:cNvPr id="12" name="TextBox 11"/>
           <p:cNvSpPr txBox="1"/>
           <p:nvPr/>
         </p:nvSpPr>
@@ -8314,14 +9040,14 @@
               <a:rPr>
                 <a:latin typeface="Inter"/>
               </a:rPr>
-              <a:t>DRAFT — for committee review · Illustrative data · Data as of 2026-09-30</a:t>
-            </a:r>
-          </a:p>
-        </p:txBody>
-      </p:sp>
-      <p:sp>
-        <p:nvSpPr>
-          <p:cNvPr id="12" name="TextBox 11"/>
+              <a:t>Confidential — Investment Committee · Data as of 2026-09-30</a:t>
+            </a:r>
+          </a:p>
+        </p:txBody>
+      </p:sp>
+      <p:sp>
+        <p:nvSpPr>
+          <p:cNvPr id="13" name="TextBox 12"/>
           <p:cNvSpPr txBox="1"/>
           <p:nvPr/>
         </p:nvSpPr>
@@ -8436,6 +9162,48 @@
         </p:nvSpPr>
         <p:spPr>
           <a:xfrm>
+            <a:off x="5897880" y="310896"/>
+            <a:ext cx="4800600" cy="256032"/>
+          </a:xfrm>
+          <a:prstGeom prst="rect">
+            <a:avLst/>
+          </a:prstGeom>
+          <a:noFill/>
+        </p:spPr>
+        <p:txBody>
+          <a:bodyPr wrap="none" lIns="9144" rIns="9144" tIns="9144" bIns="9144" anchor="t">
+            <a:spAutoFit/>
+          </a:bodyPr>
+          <a:lstStyle/>
+          <a:p>
+            <a:pPr algn="r">
+              <a:spcAft>
+                <a:spcPts val="0"/>
+              </a:spcAft>
+              <a:defRPr sz="680" b="1">
+                <a:solidFill>
+                  <a:srgbClr val="4F6B00"/>
+                </a:solidFill>
+                <a:latin typeface="Inter"/>
+              </a:defRPr>
+            </a:pPr>
+            <a:r>
+              <a:rPr>
+                <a:latin typeface="Inter"/>
+              </a:rPr>
+              <a:t>Illustrative, Gradient Maintained — demo data, not the client's holdings or managers</a:t>
+            </a:r>
+          </a:p>
+        </p:txBody>
+      </p:sp>
+      <p:sp>
+        <p:nvSpPr>
+          <p:cNvPr id="4" name="TextBox 3"/>
+          <p:cNvSpPr txBox="1"/>
+          <p:nvPr/>
+        </p:nvSpPr>
+        <p:spPr>
+          <a:xfrm>
             <a:off x="640080" y="566928"/>
             <a:ext cx="10058400" cy="530352"/>
           </a:xfrm>
@@ -8472,7 +9240,7 @@
       </p:sp>
       <p:sp>
         <p:nvSpPr>
-          <p:cNvPr id="4" name="Rectangle 3"/>
+          <p:cNvPr id="5" name="Rectangle 4"/>
           <p:cNvSpPr/>
           <p:nvPr/>
         </p:nvSpPr>
@@ -8521,7 +9289,7 @@
       </p:sp>
       <p:sp>
         <p:nvSpPr>
-          <p:cNvPr id="5" name="Rectangle 4"/>
+          <p:cNvPr id="6" name="Rectangle 5"/>
           <p:cNvSpPr/>
           <p:nvPr/>
         </p:nvSpPr>
@@ -8570,7 +9338,7 @@
       </p:sp>
       <p:sp>
         <p:nvSpPr>
-          <p:cNvPr id="6" name="TextBox 5"/>
+          <p:cNvPr id="7" name="TextBox 6"/>
           <p:cNvSpPr txBox="1"/>
           <p:nvPr/>
         </p:nvSpPr>
@@ -8612,7 +9380,7 @@
       </p:sp>
       <p:sp>
         <p:nvSpPr>
-          <p:cNvPr id="7" name="Rectangle 6"/>
+          <p:cNvPr id="8" name="Rectangle 7"/>
           <p:cNvSpPr/>
           <p:nvPr/>
         </p:nvSpPr>
@@ -8661,7 +9429,7 @@
       </p:sp>
       <p:sp>
         <p:nvSpPr>
-          <p:cNvPr id="8" name="Rectangle 7"/>
+          <p:cNvPr id="9" name="Rectangle 8"/>
           <p:cNvSpPr/>
           <p:nvPr/>
         </p:nvSpPr>
@@ -8710,7 +9478,7 @@
       </p:sp>
       <p:sp>
         <p:nvSpPr>
-          <p:cNvPr id="9" name="TextBox 8"/>
+          <p:cNvPr id="10" name="TextBox 9"/>
           <p:cNvSpPr txBox="1"/>
           <p:nvPr/>
         </p:nvSpPr>
@@ -8752,7 +9520,7 @@
       </p:sp>
       <p:sp>
         <p:nvSpPr>
-          <p:cNvPr id="10" name="TextBox 9"/>
+          <p:cNvPr id="11" name="TextBox 10"/>
           <p:cNvSpPr txBox="1"/>
           <p:nvPr/>
         </p:nvSpPr>
@@ -8794,7 +9562,7 @@
       </p:sp>
       <p:sp>
         <p:nvSpPr>
-          <p:cNvPr id="11" name="Rectangle 10"/>
+          <p:cNvPr id="12" name="Rectangle 11"/>
           <p:cNvSpPr/>
           <p:nvPr/>
         </p:nvSpPr>
@@ -8843,7 +9611,7 @@
       </p:sp>
       <p:sp>
         <p:nvSpPr>
-          <p:cNvPr id="12" name="TextBox 11"/>
+          <p:cNvPr id="13" name="TextBox 12"/>
           <p:cNvSpPr txBox="1"/>
           <p:nvPr/>
         </p:nvSpPr>
@@ -8885,7 +9653,7 @@
       </p:sp>
       <p:sp>
         <p:nvSpPr>
-          <p:cNvPr id="13" name="TextBox 12"/>
+          <p:cNvPr id="14" name="TextBox 13"/>
           <p:cNvSpPr txBox="1"/>
           <p:nvPr/>
         </p:nvSpPr>
@@ -8920,14 +9688,14 @@
               <a:rPr>
                 <a:latin typeface="Inter"/>
               </a:rPr>
-              <a:t>DRAFT — for committee review · Illustrative data · Data as of 2026-09-30</a:t>
-            </a:r>
-          </a:p>
-        </p:txBody>
-      </p:sp>
-      <p:sp>
-        <p:nvSpPr>
-          <p:cNvPr id="14" name="TextBox 13"/>
+              <a:t>Confidential — Investment Committee · Data as of 2026-09-30</a:t>
+            </a:r>
+          </a:p>
+        </p:txBody>
+      </p:sp>
+      <p:sp>
+        <p:nvSpPr>
+          <p:cNvPr id="15" name="TextBox 14"/>
           <p:cNvSpPr txBox="1"/>
           <p:nvPr/>
         </p:nvSpPr>
@@ -9042,6 +9810,48 @@
         </p:nvSpPr>
         <p:spPr>
           <a:xfrm>
+            <a:off x="5897880" y="310896"/>
+            <a:ext cx="4800600" cy="256032"/>
+          </a:xfrm>
+          <a:prstGeom prst="rect">
+            <a:avLst/>
+          </a:prstGeom>
+          <a:noFill/>
+        </p:spPr>
+        <p:txBody>
+          <a:bodyPr wrap="none" lIns="9144" rIns="9144" tIns="9144" bIns="9144" anchor="t">
+            <a:spAutoFit/>
+          </a:bodyPr>
+          <a:lstStyle/>
+          <a:p>
+            <a:pPr algn="r">
+              <a:spcAft>
+                <a:spcPts val="0"/>
+              </a:spcAft>
+              <a:defRPr sz="680" b="1">
+                <a:solidFill>
+                  <a:srgbClr val="4F6B00"/>
+                </a:solidFill>
+                <a:latin typeface="Inter"/>
+              </a:defRPr>
+            </a:pPr>
+            <a:r>
+              <a:rPr>
+                <a:latin typeface="Inter"/>
+              </a:rPr>
+              <a:t>Illustrative, Gradient Maintained — demo data, not the client's holdings or managers</a:t>
+            </a:r>
+          </a:p>
+        </p:txBody>
+      </p:sp>
+      <p:sp>
+        <p:nvSpPr>
+          <p:cNvPr id="4" name="TextBox 3"/>
+          <p:cNvSpPr txBox="1"/>
+          <p:nvPr/>
+        </p:nvSpPr>
+        <p:spPr>
+          <a:xfrm>
             <a:off x="640080" y="566928"/>
             <a:ext cx="10058400" cy="530352"/>
           </a:xfrm>
@@ -9078,7 +9888,7 @@
       </p:sp>
       <p:sp>
         <p:nvSpPr>
-          <p:cNvPr id="4" name="Rectangle 3"/>
+          <p:cNvPr id="5" name="Rectangle 4"/>
           <p:cNvSpPr/>
           <p:nvPr/>
         </p:nvSpPr>
@@ -9127,7 +9937,7 @@
       </p:sp>
       <p:sp>
         <p:nvSpPr>
-          <p:cNvPr id="5" name="Rectangle 4"/>
+          <p:cNvPr id="6" name="Rectangle 5"/>
           <p:cNvSpPr/>
           <p:nvPr/>
         </p:nvSpPr>
@@ -9176,7 +9986,7 @@
       </p:sp>
       <p:sp>
         <p:nvSpPr>
-          <p:cNvPr id="6" name="TextBox 5"/>
+          <p:cNvPr id="7" name="TextBox 6"/>
           <p:cNvSpPr txBox="1"/>
           <p:nvPr/>
         </p:nvSpPr>
@@ -9218,7 +10028,7 @@
       </p:sp>
       <p:sp>
         <p:nvSpPr>
-          <p:cNvPr id="7" name="TextBox 6"/>
+          <p:cNvPr id="8" name="TextBox 7"/>
           <p:cNvSpPr txBox="1"/>
           <p:nvPr/>
         </p:nvSpPr>
@@ -9260,7 +10070,7 @@
       </p:sp>
       <p:sp>
         <p:nvSpPr>
-          <p:cNvPr id="8" name="Rectangle 7"/>
+          <p:cNvPr id="9" name="Rectangle 8"/>
           <p:cNvSpPr/>
           <p:nvPr/>
         </p:nvSpPr>
@@ -9309,7 +10119,7 @@
       </p:sp>
       <p:sp>
         <p:nvSpPr>
-          <p:cNvPr id="9" name="TextBox 8"/>
+          <p:cNvPr id="10" name="TextBox 9"/>
           <p:cNvSpPr txBox="1"/>
           <p:nvPr/>
         </p:nvSpPr>
@@ -9351,7 +10161,7 @@
       </p:sp>
       <p:sp>
         <p:nvSpPr>
-          <p:cNvPr id="10" name="TextBox 9"/>
+          <p:cNvPr id="11" name="TextBox 10"/>
           <p:cNvSpPr txBox="1"/>
           <p:nvPr/>
         </p:nvSpPr>
@@ -9386,14 +10196,14 @@
               <a:rPr>
                 <a:latin typeface="Inter"/>
               </a:rPr>
-              <a:t>DRAFT — for committee review · Illustrative data · Data as of 2026-09-30</a:t>
-            </a:r>
-          </a:p>
-        </p:txBody>
-      </p:sp>
-      <p:sp>
-        <p:nvSpPr>
-          <p:cNvPr id="11" name="TextBox 10"/>
+              <a:t>Confidential — Investment Committee · Data as of 2026-09-30</a:t>
+            </a:r>
+          </a:p>
+        </p:txBody>
+      </p:sp>
+      <p:sp>
+        <p:nvSpPr>
+          <p:cNvPr id="12" name="TextBox 11"/>
           <p:cNvSpPr txBox="1"/>
           <p:nvPr/>
         </p:nvSpPr>
@@ -9508,6 +10318,48 @@
         </p:nvSpPr>
         <p:spPr>
           <a:xfrm>
+            <a:off x="5897880" y="310896"/>
+            <a:ext cx="4800600" cy="256032"/>
+          </a:xfrm>
+          <a:prstGeom prst="rect">
+            <a:avLst/>
+          </a:prstGeom>
+          <a:noFill/>
+        </p:spPr>
+        <p:txBody>
+          <a:bodyPr wrap="none" lIns="9144" rIns="9144" tIns="9144" bIns="9144" anchor="t">
+            <a:spAutoFit/>
+          </a:bodyPr>
+          <a:lstStyle/>
+          <a:p>
+            <a:pPr algn="r">
+              <a:spcAft>
+                <a:spcPts val="0"/>
+              </a:spcAft>
+              <a:defRPr sz="680" b="1">
+                <a:solidFill>
+                  <a:srgbClr val="4F6B00"/>
+                </a:solidFill>
+                <a:latin typeface="Inter"/>
+              </a:defRPr>
+            </a:pPr>
+            <a:r>
+              <a:rPr>
+                <a:latin typeface="Inter"/>
+              </a:rPr>
+              <a:t>Illustrative, Gradient Maintained — demo data, not the client's holdings or managers</a:t>
+            </a:r>
+          </a:p>
+        </p:txBody>
+      </p:sp>
+      <p:sp>
+        <p:nvSpPr>
+          <p:cNvPr id="4" name="TextBox 3"/>
+          <p:cNvSpPr txBox="1"/>
+          <p:nvPr/>
+        </p:nvSpPr>
+        <p:spPr>
+          <a:xfrm>
             <a:off x="640080" y="566928"/>
             <a:ext cx="10058400" cy="530352"/>
           </a:xfrm>
@@ -9544,7 +10396,7 @@
       </p:sp>
       <p:sp>
         <p:nvSpPr>
-          <p:cNvPr id="4" name="Rectangle 3"/>
+          <p:cNvPr id="5" name="Rectangle 4"/>
           <p:cNvSpPr/>
           <p:nvPr/>
         </p:nvSpPr>
@@ -9593,7 +10445,7 @@
       </p:sp>
       <p:sp>
         <p:nvSpPr>
-          <p:cNvPr id="5" name="Rectangle 4"/>
+          <p:cNvPr id="6" name="Rectangle 5"/>
           <p:cNvSpPr/>
           <p:nvPr/>
         </p:nvSpPr>
@@ -9642,7 +10494,7 @@
       </p:sp>
       <p:sp>
         <p:nvSpPr>
-          <p:cNvPr id="6" name="TextBox 5"/>
+          <p:cNvPr id="7" name="TextBox 6"/>
           <p:cNvSpPr txBox="1"/>
           <p:nvPr/>
         </p:nvSpPr>
@@ -9684,7 +10536,7 @@
       </p:sp>
       <p:sp>
         <p:nvSpPr>
-          <p:cNvPr id="7" name="TextBox 6"/>
+          <p:cNvPr id="8" name="TextBox 7"/>
           <p:cNvSpPr txBox="1"/>
           <p:nvPr/>
         </p:nvSpPr>
@@ -9726,7 +10578,7 @@
       </p:sp>
       <p:graphicFrame>
         <p:nvGraphicFramePr>
-          <p:cNvPr id="8" name="Chart 7"/>
+          <p:cNvPr id="9" name="Chart 8"/>
           <p:cNvGraphicFramePr>
             <a:graphicFrameLocks noGrp="1"/>
           </p:cNvGraphicFramePr>
@@ -9744,7 +10596,7 @@
       </p:graphicFrame>
       <p:sp>
         <p:nvSpPr>
-          <p:cNvPr id="9" name="Rectangle 8"/>
+          <p:cNvPr id="10" name="Rectangle 9"/>
           <p:cNvSpPr/>
           <p:nvPr/>
         </p:nvSpPr>
@@ -9793,7 +10645,7 @@
       </p:sp>
       <p:sp>
         <p:nvSpPr>
-          <p:cNvPr id="10" name="TextBox 9"/>
+          <p:cNvPr id="11" name="TextBox 10"/>
           <p:cNvSpPr txBox="1"/>
           <p:nvPr/>
         </p:nvSpPr>
@@ -9835,7 +10687,7 @@
       </p:sp>
       <p:sp>
         <p:nvSpPr>
-          <p:cNvPr id="11" name="TextBox 10"/>
+          <p:cNvPr id="12" name="TextBox 11"/>
           <p:cNvSpPr txBox="1"/>
           <p:nvPr/>
         </p:nvSpPr>
@@ -9870,14 +10722,14 @@
               <a:rPr>
                 <a:latin typeface="Inter"/>
               </a:rPr>
-              <a:t>DRAFT — for committee review · Illustrative data · Data as of 2026-09-30</a:t>
-            </a:r>
-          </a:p>
-        </p:txBody>
-      </p:sp>
-      <p:sp>
-        <p:nvSpPr>
-          <p:cNvPr id="12" name="TextBox 11"/>
+              <a:t>Confidential — Investment Committee · Data as of 2026-09-30</a:t>
+            </a:r>
+          </a:p>
+        </p:txBody>
+      </p:sp>
+      <p:sp>
+        <p:nvSpPr>
+          <p:cNvPr id="13" name="TextBox 12"/>
           <p:cNvSpPr txBox="1"/>
           <p:nvPr/>
         </p:nvSpPr>
@@ -9992,6 +10844,48 @@
         </p:nvSpPr>
         <p:spPr>
           <a:xfrm>
+            <a:off x="5897880" y="310896"/>
+            <a:ext cx="4800600" cy="256032"/>
+          </a:xfrm>
+          <a:prstGeom prst="rect">
+            <a:avLst/>
+          </a:prstGeom>
+          <a:noFill/>
+        </p:spPr>
+        <p:txBody>
+          <a:bodyPr wrap="none" lIns="9144" rIns="9144" tIns="9144" bIns="9144" anchor="t">
+            <a:spAutoFit/>
+          </a:bodyPr>
+          <a:lstStyle/>
+          <a:p>
+            <a:pPr algn="r">
+              <a:spcAft>
+                <a:spcPts val="0"/>
+              </a:spcAft>
+              <a:defRPr sz="680" b="1">
+                <a:solidFill>
+                  <a:srgbClr val="4F6B00"/>
+                </a:solidFill>
+                <a:latin typeface="Inter"/>
+              </a:defRPr>
+            </a:pPr>
+            <a:r>
+              <a:rPr>
+                <a:latin typeface="Inter"/>
+              </a:rPr>
+              <a:t>Illustrative, Gradient Maintained — demo data, not the client's holdings or managers</a:t>
+            </a:r>
+          </a:p>
+        </p:txBody>
+      </p:sp>
+      <p:sp>
+        <p:nvSpPr>
+          <p:cNvPr id="4" name="TextBox 3"/>
+          <p:cNvSpPr txBox="1"/>
+          <p:nvPr/>
+        </p:nvSpPr>
+        <p:spPr>
+          <a:xfrm>
             <a:off x="640080" y="566928"/>
             <a:ext cx="10058400" cy="530352"/>
           </a:xfrm>
@@ -10028,7 +10922,7 @@
       </p:sp>
       <p:sp>
         <p:nvSpPr>
-          <p:cNvPr id="4" name="Rectangle 3"/>
+          <p:cNvPr id="5" name="Rectangle 4"/>
           <p:cNvSpPr/>
           <p:nvPr/>
         </p:nvSpPr>
@@ -10077,7 +10971,7 @@
       </p:sp>
       <p:sp>
         <p:nvSpPr>
-          <p:cNvPr id="5" name="Rectangle 4"/>
+          <p:cNvPr id="6" name="Rectangle 5"/>
           <p:cNvSpPr/>
           <p:nvPr/>
         </p:nvSpPr>
@@ -10126,7 +11020,7 @@
       </p:sp>
       <p:sp>
         <p:nvSpPr>
-          <p:cNvPr id="6" name="TextBox 5"/>
+          <p:cNvPr id="7" name="TextBox 6"/>
           <p:cNvSpPr txBox="1"/>
           <p:nvPr/>
         </p:nvSpPr>
@@ -10168,7 +11062,7 @@
       </p:sp>
       <p:sp>
         <p:nvSpPr>
-          <p:cNvPr id="7" name="TextBox 6"/>
+          <p:cNvPr id="8" name="TextBox 7"/>
           <p:cNvSpPr txBox="1"/>
           <p:nvPr/>
         </p:nvSpPr>
@@ -10229,7 +11123,7 @@
       </p:sp>
       <p:sp>
         <p:nvSpPr>
-          <p:cNvPr id="8" name="Rectangle 7"/>
+          <p:cNvPr id="9" name="Rectangle 8"/>
           <p:cNvSpPr/>
           <p:nvPr/>
         </p:nvSpPr>
@@ -10278,7 +11172,7 @@
       </p:sp>
       <p:sp>
         <p:nvSpPr>
-          <p:cNvPr id="9" name="TextBox 8"/>
+          <p:cNvPr id="10" name="TextBox 9"/>
           <p:cNvSpPr txBox="1"/>
           <p:nvPr/>
         </p:nvSpPr>
@@ -10320,7 +11214,7 @@
       </p:sp>
       <p:sp>
         <p:nvSpPr>
-          <p:cNvPr id="10" name="TextBox 9"/>
+          <p:cNvPr id="11" name="TextBox 10"/>
           <p:cNvSpPr txBox="1"/>
           <p:nvPr/>
         </p:nvSpPr>
@@ -10355,14 +11249,14 @@
               <a:rPr>
                 <a:latin typeface="Inter"/>
               </a:rPr>
-              <a:t>DRAFT — for committee review · Illustrative data · Data as of 2026-09-30</a:t>
-            </a:r>
-          </a:p>
-        </p:txBody>
-      </p:sp>
-      <p:sp>
-        <p:nvSpPr>
-          <p:cNvPr id="11" name="TextBox 10"/>
+              <a:t>Confidential — Investment Committee · Data as of 2026-09-30</a:t>
+            </a:r>
+          </a:p>
+        </p:txBody>
+      </p:sp>
+      <p:sp>
+        <p:nvSpPr>
+          <p:cNvPr id="12" name="TextBox 11"/>
           <p:cNvSpPr txBox="1"/>
           <p:nvPr/>
         </p:nvSpPr>
@@ -10477,6 +11371,48 @@
         </p:nvSpPr>
         <p:spPr>
           <a:xfrm>
+            <a:off x="5897880" y="310896"/>
+            <a:ext cx="4800600" cy="256032"/>
+          </a:xfrm>
+          <a:prstGeom prst="rect">
+            <a:avLst/>
+          </a:prstGeom>
+          <a:noFill/>
+        </p:spPr>
+        <p:txBody>
+          <a:bodyPr wrap="none" lIns="9144" rIns="9144" tIns="9144" bIns="9144" anchor="t">
+            <a:spAutoFit/>
+          </a:bodyPr>
+          <a:lstStyle/>
+          <a:p>
+            <a:pPr algn="r">
+              <a:spcAft>
+                <a:spcPts val="0"/>
+              </a:spcAft>
+              <a:defRPr sz="680" b="1">
+                <a:solidFill>
+                  <a:srgbClr val="4F6B00"/>
+                </a:solidFill>
+                <a:latin typeface="Inter"/>
+              </a:defRPr>
+            </a:pPr>
+            <a:r>
+              <a:rPr>
+                <a:latin typeface="Inter"/>
+              </a:rPr>
+              <a:t>Illustrative, Gradient Maintained — demo data, not the client's holdings or managers</a:t>
+            </a:r>
+          </a:p>
+        </p:txBody>
+      </p:sp>
+      <p:sp>
+        <p:nvSpPr>
+          <p:cNvPr id="4" name="TextBox 3"/>
+          <p:cNvSpPr txBox="1"/>
+          <p:nvPr/>
+        </p:nvSpPr>
+        <p:spPr>
+          <a:xfrm>
             <a:off x="640080" y="566928"/>
             <a:ext cx="10058400" cy="530352"/>
           </a:xfrm>
@@ -10513,7 +11449,7 @@
       </p:sp>
       <p:sp>
         <p:nvSpPr>
-          <p:cNvPr id="4" name="Rectangle 3"/>
+          <p:cNvPr id="5" name="Rectangle 4"/>
           <p:cNvSpPr/>
           <p:nvPr/>
         </p:nvSpPr>
@@ -10562,7 +11498,7 @@
       </p:sp>
       <p:sp>
         <p:nvSpPr>
-          <p:cNvPr id="5" name="Rectangle 4"/>
+          <p:cNvPr id="6" name="Rectangle 5"/>
           <p:cNvSpPr/>
           <p:nvPr/>
         </p:nvSpPr>
@@ -10611,7 +11547,7 @@
       </p:sp>
       <p:sp>
         <p:nvSpPr>
-          <p:cNvPr id="6" name="TextBox 5"/>
+          <p:cNvPr id="7" name="TextBox 6"/>
           <p:cNvSpPr txBox="1"/>
           <p:nvPr/>
         </p:nvSpPr>
@@ -10653,7 +11589,7 @@
       </p:sp>
       <p:sp>
         <p:nvSpPr>
-          <p:cNvPr id="7" name="TextBox 6"/>
+          <p:cNvPr id="8" name="TextBox 7"/>
           <p:cNvSpPr txBox="1"/>
           <p:nvPr/>
         </p:nvSpPr>
@@ -10695,7 +11631,7 @@
       </p:sp>
       <p:graphicFrame>
         <p:nvGraphicFramePr>
-          <p:cNvPr id="8" name="Chart 7"/>
+          <p:cNvPr id="9" name="Chart 8"/>
           <p:cNvGraphicFramePr>
             <a:graphicFrameLocks noGrp="1"/>
           </p:cNvGraphicFramePr>
@@ -10713,7 +11649,7 @@
       </p:graphicFrame>
       <p:sp>
         <p:nvSpPr>
-          <p:cNvPr id="9" name="Rectangle 8"/>
+          <p:cNvPr id="10" name="Rectangle 9"/>
           <p:cNvSpPr/>
           <p:nvPr/>
         </p:nvSpPr>
@@ -10762,7 +11698,7 @@
       </p:sp>
       <p:sp>
         <p:nvSpPr>
-          <p:cNvPr id="10" name="TextBox 9"/>
+          <p:cNvPr id="11" name="TextBox 10"/>
           <p:cNvSpPr txBox="1"/>
           <p:nvPr/>
         </p:nvSpPr>
@@ -10804,7 +11740,7 @@
       </p:sp>
       <p:sp>
         <p:nvSpPr>
-          <p:cNvPr id="11" name="TextBox 10"/>
+          <p:cNvPr id="12" name="TextBox 11"/>
           <p:cNvSpPr txBox="1"/>
           <p:nvPr/>
         </p:nvSpPr>
@@ -10839,14 +11775,14 @@
               <a:rPr>
                 <a:latin typeface="Inter"/>
               </a:rPr>
-              <a:t>DRAFT — for committee review · Illustrative data · Data as of 2026-09-30</a:t>
-            </a:r>
-          </a:p>
-        </p:txBody>
-      </p:sp>
-      <p:sp>
-        <p:nvSpPr>
-          <p:cNvPr id="12" name="TextBox 11"/>
+              <a:t>Confidential — Investment Committee · Data as of 2026-09-30</a:t>
+            </a:r>
+          </a:p>
+        </p:txBody>
+      </p:sp>
+      <p:sp>
+        <p:nvSpPr>
+          <p:cNvPr id="13" name="TextBox 12"/>
           <p:cNvSpPr txBox="1"/>
           <p:nvPr/>
         </p:nvSpPr>
@@ -10961,6 +11897,48 @@
         </p:nvSpPr>
         <p:spPr>
           <a:xfrm>
+            <a:off x="5897880" y="310896"/>
+            <a:ext cx="4800600" cy="256032"/>
+          </a:xfrm>
+          <a:prstGeom prst="rect">
+            <a:avLst/>
+          </a:prstGeom>
+          <a:noFill/>
+        </p:spPr>
+        <p:txBody>
+          <a:bodyPr wrap="none" lIns="9144" rIns="9144" tIns="9144" bIns="9144" anchor="t">
+            <a:spAutoFit/>
+          </a:bodyPr>
+          <a:lstStyle/>
+          <a:p>
+            <a:pPr algn="r">
+              <a:spcAft>
+                <a:spcPts val="0"/>
+              </a:spcAft>
+              <a:defRPr sz="680" b="1">
+                <a:solidFill>
+                  <a:srgbClr val="4F6B00"/>
+                </a:solidFill>
+                <a:latin typeface="Inter"/>
+              </a:defRPr>
+            </a:pPr>
+            <a:r>
+              <a:rPr>
+                <a:latin typeface="Inter"/>
+              </a:rPr>
+              <a:t>Illustrative, Gradient Maintained — demo data, not the client's holdings or managers</a:t>
+            </a:r>
+          </a:p>
+        </p:txBody>
+      </p:sp>
+      <p:sp>
+        <p:nvSpPr>
+          <p:cNvPr id="4" name="TextBox 3"/>
+          <p:cNvSpPr txBox="1"/>
+          <p:nvPr/>
+        </p:nvSpPr>
+        <p:spPr>
+          <a:xfrm>
             <a:off x="640080" y="566928"/>
             <a:ext cx="10058400" cy="530352"/>
           </a:xfrm>
@@ -10997,7 +11975,7 @@
       </p:sp>
       <p:sp>
         <p:nvSpPr>
-          <p:cNvPr id="4" name="Rectangle 3"/>
+          <p:cNvPr id="5" name="Rectangle 4"/>
           <p:cNvSpPr/>
           <p:nvPr/>
         </p:nvSpPr>
@@ -11046,7 +12024,7 @@
       </p:sp>
       <p:sp>
         <p:nvSpPr>
-          <p:cNvPr id="5" name="Rectangle 4"/>
+          <p:cNvPr id="6" name="Rectangle 5"/>
           <p:cNvSpPr/>
           <p:nvPr/>
         </p:nvSpPr>
@@ -11095,7 +12073,7 @@
       </p:sp>
       <p:sp>
         <p:nvSpPr>
-          <p:cNvPr id="6" name="TextBox 5"/>
+          <p:cNvPr id="7" name="TextBox 6"/>
           <p:cNvSpPr txBox="1"/>
           <p:nvPr/>
         </p:nvSpPr>
@@ -11137,7 +12115,7 @@
       </p:sp>
       <p:sp>
         <p:nvSpPr>
-          <p:cNvPr id="7" name="Rectangle 6"/>
+          <p:cNvPr id="8" name="Rectangle 7"/>
           <p:cNvSpPr/>
           <p:nvPr/>
         </p:nvSpPr>
@@ -11186,7 +12164,7 @@
       </p:sp>
       <p:sp>
         <p:nvSpPr>
-          <p:cNvPr id="8" name="Rectangle 7"/>
+          <p:cNvPr id="9" name="Rectangle 8"/>
           <p:cNvSpPr/>
           <p:nvPr/>
         </p:nvSpPr>
@@ -11235,7 +12213,7 @@
       </p:sp>
       <p:sp>
         <p:nvSpPr>
-          <p:cNvPr id="9" name="TextBox 8"/>
+          <p:cNvPr id="10" name="TextBox 9"/>
           <p:cNvSpPr txBox="1"/>
           <p:nvPr/>
         </p:nvSpPr>
@@ -11277,7 +12255,7 @@
       </p:sp>
       <p:sp>
         <p:nvSpPr>
-          <p:cNvPr id="10" name="TextBox 9"/>
+          <p:cNvPr id="11" name="TextBox 10"/>
           <p:cNvSpPr txBox="1"/>
           <p:nvPr/>
         </p:nvSpPr>
@@ -11319,7 +12297,7 @@
       </p:sp>
       <p:sp>
         <p:nvSpPr>
-          <p:cNvPr id="11" name="Rectangle 10"/>
+          <p:cNvPr id="12" name="Rectangle 11"/>
           <p:cNvSpPr/>
           <p:nvPr/>
         </p:nvSpPr>
@@ -11368,7 +12346,7 @@
       </p:sp>
       <p:sp>
         <p:nvSpPr>
-          <p:cNvPr id="12" name="Rectangle 11"/>
+          <p:cNvPr id="13" name="Rectangle 12"/>
           <p:cNvSpPr/>
           <p:nvPr/>
         </p:nvSpPr>
@@ -11417,7 +12395,7 @@
       </p:sp>
       <p:sp>
         <p:nvSpPr>
-          <p:cNvPr id="13" name="TextBox 12"/>
+          <p:cNvPr id="14" name="TextBox 13"/>
           <p:cNvSpPr txBox="1"/>
           <p:nvPr/>
         </p:nvSpPr>
@@ -11459,7 +12437,7 @@
       </p:sp>
       <p:sp>
         <p:nvSpPr>
-          <p:cNvPr id="14" name="TextBox 13"/>
+          <p:cNvPr id="15" name="TextBox 14"/>
           <p:cNvSpPr txBox="1"/>
           <p:nvPr/>
         </p:nvSpPr>
@@ -11501,7 +12479,7 @@
       </p:sp>
       <p:sp>
         <p:nvSpPr>
-          <p:cNvPr id="15" name="Rectangle 14"/>
+          <p:cNvPr id="16" name="Rectangle 15"/>
           <p:cNvSpPr/>
           <p:nvPr/>
         </p:nvSpPr>
@@ -11550,7 +12528,7 @@
       </p:sp>
       <p:sp>
         <p:nvSpPr>
-          <p:cNvPr id="16" name="TextBox 15"/>
+          <p:cNvPr id="17" name="TextBox 16"/>
           <p:cNvSpPr txBox="1"/>
           <p:nvPr/>
         </p:nvSpPr>
@@ -11592,7 +12570,7 @@
       </p:sp>
       <p:sp>
         <p:nvSpPr>
-          <p:cNvPr id="17" name="TextBox 16"/>
+          <p:cNvPr id="18" name="TextBox 17"/>
           <p:cNvSpPr txBox="1"/>
           <p:nvPr/>
         </p:nvSpPr>
@@ -11627,14 +12605,14 @@
               <a:rPr>
                 <a:latin typeface="Inter"/>
               </a:rPr>
-              <a:t>DRAFT — for committee review · Illustrative data · Data as of 2026-09-30</a:t>
-            </a:r>
-          </a:p>
-        </p:txBody>
-      </p:sp>
-      <p:sp>
-        <p:nvSpPr>
-          <p:cNvPr id="18" name="TextBox 17"/>
+              <a:t>Confidential — Investment Committee · Data as of 2026-09-30</a:t>
+            </a:r>
+          </a:p>
+        </p:txBody>
+      </p:sp>
+      <p:sp>
+        <p:nvSpPr>
+          <p:cNvPr id="19" name="TextBox 18"/>
           <p:cNvSpPr txBox="1"/>
           <p:nvPr/>
         </p:nvSpPr>
@@ -11749,6 +12727,48 @@
         </p:nvSpPr>
         <p:spPr>
           <a:xfrm>
+            <a:off x="5897880" y="310896"/>
+            <a:ext cx="4800600" cy="256032"/>
+          </a:xfrm>
+          <a:prstGeom prst="rect">
+            <a:avLst/>
+          </a:prstGeom>
+          <a:noFill/>
+        </p:spPr>
+        <p:txBody>
+          <a:bodyPr wrap="none" lIns="9144" rIns="9144" tIns="9144" bIns="9144" anchor="t">
+            <a:spAutoFit/>
+          </a:bodyPr>
+          <a:lstStyle/>
+          <a:p>
+            <a:pPr algn="r">
+              <a:spcAft>
+                <a:spcPts val="0"/>
+              </a:spcAft>
+              <a:defRPr sz="680" b="1">
+                <a:solidFill>
+                  <a:srgbClr val="4F6B00"/>
+                </a:solidFill>
+                <a:latin typeface="Inter"/>
+              </a:defRPr>
+            </a:pPr>
+            <a:r>
+              <a:rPr>
+                <a:latin typeface="Inter"/>
+              </a:rPr>
+              <a:t>Illustrative, Gradient Maintained — demo data, not the client's holdings or managers</a:t>
+            </a:r>
+          </a:p>
+        </p:txBody>
+      </p:sp>
+      <p:sp>
+        <p:nvSpPr>
+          <p:cNvPr id="4" name="TextBox 3"/>
+          <p:cNvSpPr txBox="1"/>
+          <p:nvPr/>
+        </p:nvSpPr>
+        <p:spPr>
+          <a:xfrm>
             <a:off x="640080" y="566928"/>
             <a:ext cx="10058400" cy="530352"/>
           </a:xfrm>
@@ -11785,7 +12805,7 @@
       </p:sp>
       <p:sp>
         <p:nvSpPr>
-          <p:cNvPr id="4" name="Rectangle 3"/>
+          <p:cNvPr id="5" name="Rectangle 4"/>
           <p:cNvSpPr/>
           <p:nvPr/>
         </p:nvSpPr>
@@ -11834,7 +12854,7 @@
       </p:sp>
       <p:sp>
         <p:nvSpPr>
-          <p:cNvPr id="5" name="Rectangle 4"/>
+          <p:cNvPr id="6" name="Rectangle 5"/>
           <p:cNvSpPr/>
           <p:nvPr/>
         </p:nvSpPr>
@@ -11883,7 +12903,7 @@
       </p:sp>
       <p:sp>
         <p:nvSpPr>
-          <p:cNvPr id="6" name="TextBox 5"/>
+          <p:cNvPr id="7" name="TextBox 6"/>
           <p:cNvSpPr txBox="1"/>
           <p:nvPr/>
         </p:nvSpPr>
@@ -11925,7 +12945,7 @@
       </p:sp>
       <p:sp>
         <p:nvSpPr>
-          <p:cNvPr id="7" name="TextBox 6"/>
+          <p:cNvPr id="8" name="TextBox 7"/>
           <p:cNvSpPr txBox="1"/>
           <p:nvPr/>
         </p:nvSpPr>
@@ -11967,7 +12987,7 @@
       </p:sp>
       <p:sp>
         <p:nvSpPr>
-          <p:cNvPr id="8" name="Rectangle 7"/>
+          <p:cNvPr id="9" name="Rectangle 8"/>
           <p:cNvSpPr/>
           <p:nvPr/>
         </p:nvSpPr>
@@ -12016,7 +13036,7 @@
       </p:sp>
       <p:sp>
         <p:nvSpPr>
-          <p:cNvPr id="9" name="TextBox 8"/>
+          <p:cNvPr id="10" name="TextBox 9"/>
           <p:cNvSpPr txBox="1"/>
           <p:nvPr/>
         </p:nvSpPr>
@@ -12058,7 +13078,7 @@
       </p:sp>
       <p:sp>
         <p:nvSpPr>
-          <p:cNvPr id="10" name="TextBox 9"/>
+          <p:cNvPr id="11" name="TextBox 10"/>
           <p:cNvSpPr txBox="1"/>
           <p:nvPr/>
         </p:nvSpPr>
@@ -12093,14 +13113,14 @@
               <a:rPr>
                 <a:latin typeface="Inter"/>
               </a:rPr>
-              <a:t>DRAFT — for committee review · Illustrative data · Data as of 2026-09-30</a:t>
-            </a:r>
-          </a:p>
-        </p:txBody>
-      </p:sp>
-      <p:sp>
-        <p:nvSpPr>
-          <p:cNvPr id="11" name="TextBox 10"/>
+              <a:t>Confidential — Investment Committee · Data as of 2026-09-30</a:t>
+            </a:r>
+          </a:p>
+        </p:txBody>
+      </p:sp>
+      <p:sp>
+        <p:nvSpPr>
+          <p:cNvPr id="12" name="TextBox 11"/>
           <p:cNvSpPr txBox="1"/>
           <p:nvPr/>
         </p:nvSpPr>
@@ -12215,6 +13235,48 @@
         </p:nvSpPr>
         <p:spPr>
           <a:xfrm>
+            <a:off x="5897880" y="310896"/>
+            <a:ext cx="4800600" cy="256032"/>
+          </a:xfrm>
+          <a:prstGeom prst="rect">
+            <a:avLst/>
+          </a:prstGeom>
+          <a:noFill/>
+        </p:spPr>
+        <p:txBody>
+          <a:bodyPr wrap="none" lIns="9144" rIns="9144" tIns="9144" bIns="9144" anchor="t">
+            <a:spAutoFit/>
+          </a:bodyPr>
+          <a:lstStyle/>
+          <a:p>
+            <a:pPr algn="r">
+              <a:spcAft>
+                <a:spcPts val="0"/>
+              </a:spcAft>
+              <a:defRPr sz="680" b="1">
+                <a:solidFill>
+                  <a:srgbClr val="4F6B00"/>
+                </a:solidFill>
+                <a:latin typeface="Inter"/>
+              </a:defRPr>
+            </a:pPr>
+            <a:r>
+              <a:rPr>
+                <a:latin typeface="Inter"/>
+              </a:rPr>
+              <a:t>Illustrative, Gradient Maintained — demo data, not the client's holdings or managers</a:t>
+            </a:r>
+          </a:p>
+        </p:txBody>
+      </p:sp>
+      <p:sp>
+        <p:nvSpPr>
+          <p:cNvPr id="4" name="TextBox 3"/>
+          <p:cNvSpPr txBox="1"/>
+          <p:nvPr/>
+        </p:nvSpPr>
+        <p:spPr>
+          <a:xfrm>
             <a:off x="640080" y="566928"/>
             <a:ext cx="10058400" cy="530352"/>
           </a:xfrm>
@@ -12251,7 +13313,7 @@
       </p:sp>
       <p:sp>
         <p:nvSpPr>
-          <p:cNvPr id="4" name="Rectangle 3"/>
+          <p:cNvPr id="5" name="Rectangle 4"/>
           <p:cNvSpPr/>
           <p:nvPr/>
         </p:nvSpPr>
@@ -12300,7 +13362,7 @@
       </p:sp>
       <p:sp>
         <p:nvSpPr>
-          <p:cNvPr id="5" name="Rectangle 4"/>
+          <p:cNvPr id="6" name="Rectangle 5"/>
           <p:cNvSpPr/>
           <p:nvPr/>
         </p:nvSpPr>
@@ -12349,7 +13411,7 @@
       </p:sp>
       <p:sp>
         <p:nvSpPr>
-          <p:cNvPr id="6" name="TextBox 5"/>
+          <p:cNvPr id="7" name="TextBox 6"/>
           <p:cNvSpPr txBox="1"/>
           <p:nvPr/>
         </p:nvSpPr>
@@ -12391,7 +13453,7 @@
       </p:sp>
       <p:sp>
         <p:nvSpPr>
-          <p:cNvPr id="7" name="Rectangle 6"/>
+          <p:cNvPr id="8" name="Rectangle 7"/>
           <p:cNvSpPr/>
           <p:nvPr/>
         </p:nvSpPr>
@@ -12440,7 +13502,7 @@
       </p:sp>
       <p:sp>
         <p:nvSpPr>
-          <p:cNvPr id="8" name="Rectangle 7"/>
+          <p:cNvPr id="9" name="Rectangle 8"/>
           <p:cNvSpPr/>
           <p:nvPr/>
         </p:nvSpPr>
@@ -12489,7 +13551,7 @@
       </p:sp>
       <p:sp>
         <p:nvSpPr>
-          <p:cNvPr id="9" name="TextBox 8"/>
+          <p:cNvPr id="10" name="TextBox 9"/>
           <p:cNvSpPr txBox="1"/>
           <p:nvPr/>
         </p:nvSpPr>
@@ -12531,7 +13593,7 @@
       </p:sp>
       <p:sp>
         <p:nvSpPr>
-          <p:cNvPr id="10" name="TextBox 9"/>
+          <p:cNvPr id="11" name="TextBox 10"/>
           <p:cNvSpPr txBox="1"/>
           <p:nvPr/>
         </p:nvSpPr>
@@ -12573,7 +13635,7 @@
       </p:sp>
       <p:sp>
         <p:nvSpPr>
-          <p:cNvPr id="11" name="Rectangle 10"/>
+          <p:cNvPr id="12" name="Rectangle 11"/>
           <p:cNvSpPr/>
           <p:nvPr/>
         </p:nvSpPr>
@@ -12622,7 +13684,7 @@
       </p:sp>
       <p:sp>
         <p:nvSpPr>
-          <p:cNvPr id="12" name="Rectangle 11"/>
+          <p:cNvPr id="13" name="Rectangle 12"/>
           <p:cNvSpPr/>
           <p:nvPr/>
         </p:nvSpPr>
@@ -12671,7 +13733,7 @@
       </p:sp>
       <p:sp>
         <p:nvSpPr>
-          <p:cNvPr id="13" name="TextBox 12"/>
+          <p:cNvPr id="14" name="TextBox 13"/>
           <p:cNvSpPr txBox="1"/>
           <p:nvPr/>
         </p:nvSpPr>
@@ -12713,7 +13775,7 @@
       </p:sp>
       <p:sp>
         <p:nvSpPr>
-          <p:cNvPr id="14" name="TextBox 13"/>
+          <p:cNvPr id="15" name="TextBox 14"/>
           <p:cNvSpPr txBox="1"/>
           <p:nvPr/>
         </p:nvSpPr>
@@ -12755,7 +13817,7 @@
       </p:sp>
       <p:sp>
         <p:nvSpPr>
-          <p:cNvPr id="15" name="TextBox 14"/>
+          <p:cNvPr id="16" name="TextBox 15"/>
           <p:cNvSpPr txBox="1"/>
           <p:nvPr/>
         </p:nvSpPr>
@@ -12797,7 +13859,7 @@
       </p:sp>
       <p:sp>
         <p:nvSpPr>
-          <p:cNvPr id="16" name="Rectangle 15"/>
+          <p:cNvPr id="17" name="Rectangle 16"/>
           <p:cNvSpPr/>
           <p:nvPr/>
         </p:nvSpPr>
@@ -12846,7 +13908,7 @@
       </p:sp>
       <p:sp>
         <p:nvSpPr>
-          <p:cNvPr id="17" name="Rectangle 16"/>
+          <p:cNvPr id="18" name="Rectangle 17"/>
           <p:cNvSpPr/>
           <p:nvPr/>
         </p:nvSpPr>
@@ -12895,7 +13957,7 @@
       </p:sp>
       <p:sp>
         <p:nvSpPr>
-          <p:cNvPr id="18" name="TextBox 17"/>
+          <p:cNvPr id="19" name="TextBox 18"/>
           <p:cNvSpPr txBox="1"/>
           <p:nvPr/>
         </p:nvSpPr>
@@ -12937,7 +13999,7 @@
       </p:sp>
       <p:sp>
         <p:nvSpPr>
-          <p:cNvPr id="19" name="TextBox 18"/>
+          <p:cNvPr id="20" name="TextBox 19"/>
           <p:cNvSpPr txBox="1"/>
           <p:nvPr/>
         </p:nvSpPr>
@@ -12979,7 +14041,7 @@
       </p:sp>
       <p:sp>
         <p:nvSpPr>
-          <p:cNvPr id="20" name="TextBox 19"/>
+          <p:cNvPr id="21" name="TextBox 20"/>
           <p:cNvSpPr txBox="1"/>
           <p:nvPr/>
         </p:nvSpPr>
@@ -13021,7 +14083,7 @@
       </p:sp>
       <p:sp>
         <p:nvSpPr>
-          <p:cNvPr id="21" name="Rectangle 20"/>
+          <p:cNvPr id="22" name="Rectangle 21"/>
           <p:cNvSpPr/>
           <p:nvPr/>
         </p:nvSpPr>
@@ -13070,7 +14132,7 @@
       </p:sp>
       <p:sp>
         <p:nvSpPr>
-          <p:cNvPr id="22" name="Rectangle 21"/>
+          <p:cNvPr id="23" name="Rectangle 22"/>
           <p:cNvSpPr/>
           <p:nvPr/>
         </p:nvSpPr>
@@ -13119,7 +14181,7 @@
       </p:sp>
       <p:sp>
         <p:nvSpPr>
-          <p:cNvPr id="23" name="TextBox 22"/>
+          <p:cNvPr id="24" name="TextBox 23"/>
           <p:cNvSpPr txBox="1"/>
           <p:nvPr/>
         </p:nvSpPr>
@@ -13161,7 +14223,7 @@
       </p:sp>
       <p:sp>
         <p:nvSpPr>
-          <p:cNvPr id="24" name="TextBox 23"/>
+          <p:cNvPr id="25" name="TextBox 24"/>
           <p:cNvSpPr txBox="1"/>
           <p:nvPr/>
         </p:nvSpPr>
@@ -13203,7 +14265,7 @@
       </p:sp>
       <p:sp>
         <p:nvSpPr>
-          <p:cNvPr id="25" name="TextBox 24"/>
+          <p:cNvPr id="26" name="TextBox 25"/>
           <p:cNvSpPr txBox="1"/>
           <p:nvPr/>
         </p:nvSpPr>
@@ -13245,7 +14307,7 @@
       </p:sp>
       <p:sp>
         <p:nvSpPr>
-          <p:cNvPr id="26" name="Rectangle 25"/>
+          <p:cNvPr id="27" name="Rectangle 26"/>
           <p:cNvSpPr/>
           <p:nvPr/>
         </p:nvSpPr>
@@ -13294,7 +14356,7 @@
       </p:sp>
       <p:sp>
         <p:nvSpPr>
-          <p:cNvPr id="27" name="Rectangle 26"/>
+          <p:cNvPr id="28" name="Rectangle 27"/>
           <p:cNvSpPr/>
           <p:nvPr/>
         </p:nvSpPr>
@@ -13343,7 +14405,7 @@
       </p:sp>
       <p:sp>
         <p:nvSpPr>
-          <p:cNvPr id="28" name="TextBox 27"/>
+          <p:cNvPr id="29" name="TextBox 28"/>
           <p:cNvSpPr txBox="1"/>
           <p:nvPr/>
         </p:nvSpPr>
@@ -13385,7 +14447,7 @@
       </p:sp>
       <p:sp>
         <p:nvSpPr>
-          <p:cNvPr id="29" name="TextBox 28"/>
+          <p:cNvPr id="30" name="TextBox 29"/>
           <p:cNvSpPr txBox="1"/>
           <p:nvPr/>
         </p:nvSpPr>
@@ -13427,7 +14489,7 @@
       </p:sp>
       <p:sp>
         <p:nvSpPr>
-          <p:cNvPr id="30" name="TextBox 29"/>
+          <p:cNvPr id="31" name="TextBox 30"/>
           <p:cNvSpPr txBox="1"/>
           <p:nvPr/>
         </p:nvSpPr>
@@ -13469,7 +14531,7 @@
       </p:sp>
       <p:sp>
         <p:nvSpPr>
-          <p:cNvPr id="31" name="TextBox 30"/>
+          <p:cNvPr id="32" name="TextBox 31"/>
           <p:cNvSpPr txBox="1"/>
           <p:nvPr/>
         </p:nvSpPr>
@@ -13519,7 +14581,7 @@
       </p:sp>
       <p:sp>
         <p:nvSpPr>
-          <p:cNvPr id="32" name="Rectangle 31"/>
+          <p:cNvPr id="33" name="Rectangle 32"/>
           <p:cNvSpPr/>
           <p:nvPr/>
         </p:nvSpPr>
@@ -13568,7 +14630,7 @@
       </p:sp>
       <p:sp>
         <p:nvSpPr>
-          <p:cNvPr id="33" name="TextBox 32"/>
+          <p:cNvPr id="34" name="TextBox 33"/>
           <p:cNvSpPr txBox="1"/>
           <p:nvPr/>
         </p:nvSpPr>
@@ -13610,7 +14672,7 @@
       </p:sp>
       <p:sp>
         <p:nvSpPr>
-          <p:cNvPr id="34" name="TextBox 33"/>
+          <p:cNvPr id="35" name="TextBox 34"/>
           <p:cNvSpPr txBox="1"/>
           <p:nvPr/>
         </p:nvSpPr>
@@ -13652,7 +14714,7 @@
       </p:sp>
       <p:sp>
         <p:nvSpPr>
-          <p:cNvPr id="35" name="Rectangle 34"/>
+          <p:cNvPr id="36" name="Rectangle 35"/>
           <p:cNvSpPr/>
           <p:nvPr/>
         </p:nvSpPr>
@@ -13701,7 +14763,7 @@
       </p:sp>
       <p:sp>
         <p:nvSpPr>
-          <p:cNvPr id="36" name="TextBox 35"/>
+          <p:cNvPr id="37" name="TextBox 36"/>
           <p:cNvSpPr txBox="1"/>
           <p:nvPr/>
         </p:nvSpPr>
@@ -13743,7 +14805,7 @@
       </p:sp>
       <p:sp>
         <p:nvSpPr>
-          <p:cNvPr id="37" name="TextBox 36"/>
+          <p:cNvPr id="38" name="TextBox 37"/>
           <p:cNvSpPr txBox="1"/>
           <p:nvPr/>
         </p:nvSpPr>
@@ -13778,14 +14840,14 @@
               <a:rPr>
                 <a:latin typeface="Inter"/>
               </a:rPr>
-              <a:t>DRAFT — for committee review · Illustrative data · Data as of 2026-09-30</a:t>
-            </a:r>
-          </a:p>
-        </p:txBody>
-      </p:sp>
-      <p:sp>
-        <p:nvSpPr>
-          <p:cNvPr id="38" name="TextBox 37"/>
+              <a:t>Confidential — Investment Committee · Data as of 2026-09-30</a:t>
+            </a:r>
+          </a:p>
+        </p:txBody>
+      </p:sp>
+      <p:sp>
+        <p:nvSpPr>
+          <p:cNvPr id="39" name="TextBox 38"/>
           <p:cNvSpPr txBox="1"/>
           <p:nvPr/>
         </p:nvSpPr>
@@ -13900,6 +14962,48 @@
         </p:nvSpPr>
         <p:spPr>
           <a:xfrm>
+            <a:off x="5897880" y="310896"/>
+            <a:ext cx="4800600" cy="256032"/>
+          </a:xfrm>
+          <a:prstGeom prst="rect">
+            <a:avLst/>
+          </a:prstGeom>
+          <a:noFill/>
+        </p:spPr>
+        <p:txBody>
+          <a:bodyPr wrap="none" lIns="9144" rIns="9144" tIns="9144" bIns="9144" anchor="t">
+            <a:spAutoFit/>
+          </a:bodyPr>
+          <a:lstStyle/>
+          <a:p>
+            <a:pPr algn="r">
+              <a:spcAft>
+                <a:spcPts val="0"/>
+              </a:spcAft>
+              <a:defRPr sz="680" b="1">
+                <a:solidFill>
+                  <a:srgbClr val="4F6B00"/>
+                </a:solidFill>
+                <a:latin typeface="Inter"/>
+              </a:defRPr>
+            </a:pPr>
+            <a:r>
+              <a:rPr>
+                <a:latin typeface="Inter"/>
+              </a:rPr>
+              <a:t>Illustrative, Gradient Maintained — demo data, not the client's holdings or managers</a:t>
+            </a:r>
+          </a:p>
+        </p:txBody>
+      </p:sp>
+      <p:sp>
+        <p:nvSpPr>
+          <p:cNvPr id="4" name="TextBox 3"/>
+          <p:cNvSpPr txBox="1"/>
+          <p:nvPr/>
+        </p:nvSpPr>
+        <p:spPr>
+          <a:xfrm>
             <a:off x="640080" y="566928"/>
             <a:ext cx="10058400" cy="530352"/>
           </a:xfrm>
@@ -13936,7 +15040,7 @@
       </p:sp>
       <p:sp>
         <p:nvSpPr>
-          <p:cNvPr id="4" name="Rectangle 3"/>
+          <p:cNvPr id="5" name="Rectangle 4"/>
           <p:cNvSpPr/>
           <p:nvPr/>
         </p:nvSpPr>
@@ -13985,7 +15089,7 @@
       </p:sp>
       <p:sp>
         <p:nvSpPr>
-          <p:cNvPr id="5" name="Rectangle 4"/>
+          <p:cNvPr id="6" name="Rectangle 5"/>
           <p:cNvSpPr/>
           <p:nvPr/>
         </p:nvSpPr>
@@ -14034,7 +15138,7 @@
       </p:sp>
       <p:sp>
         <p:nvSpPr>
-          <p:cNvPr id="6" name="TextBox 5"/>
+          <p:cNvPr id="7" name="TextBox 6"/>
           <p:cNvSpPr txBox="1"/>
           <p:nvPr/>
         </p:nvSpPr>
@@ -14076,7 +15180,7 @@
       </p:sp>
       <p:sp>
         <p:nvSpPr>
-          <p:cNvPr id="7" name="TextBox 6"/>
+          <p:cNvPr id="8" name="TextBox 7"/>
           <p:cNvSpPr txBox="1"/>
           <p:nvPr/>
         </p:nvSpPr>
@@ -14111,14 +15215,14 @@
               <a:rPr>
                 <a:latin typeface="Inter"/>
               </a:rPr>
-              <a:t>FACTOR AND CURRENCY EXPOSURE (TEST)</a:t>
+              <a:t>FACTOR AND CURRENCY EXPOSURE</a:t>
             </a:r>
           </a:p>
         </p:txBody>
       </p:sp>
       <p:graphicFrame>
         <p:nvGraphicFramePr>
-          <p:cNvPr id="8" name="Chart 7"/>
+          <p:cNvPr id="9" name="Chart 8"/>
           <p:cNvGraphicFramePr>
             <a:graphicFrameLocks noGrp="1"/>
           </p:cNvGraphicFramePr>
@@ -14136,7 +15240,7 @@
       </p:graphicFrame>
       <p:sp>
         <p:nvSpPr>
-          <p:cNvPr id="9" name="Rectangle 8"/>
+          <p:cNvPr id="10" name="Rectangle 9"/>
           <p:cNvSpPr/>
           <p:nvPr/>
         </p:nvSpPr>
@@ -14185,7 +15289,7 @@
       </p:sp>
       <p:sp>
         <p:nvSpPr>
-          <p:cNvPr id="10" name="TextBox 9"/>
+          <p:cNvPr id="11" name="TextBox 10"/>
           <p:cNvSpPr txBox="1"/>
           <p:nvPr/>
         </p:nvSpPr>
@@ -14227,7 +15331,7 @@
       </p:sp>
       <p:sp>
         <p:nvSpPr>
-          <p:cNvPr id="11" name="TextBox 10"/>
+          <p:cNvPr id="12" name="TextBox 11"/>
           <p:cNvSpPr txBox="1"/>
           <p:nvPr/>
         </p:nvSpPr>
@@ -14262,14 +15366,14 @@
               <a:rPr>
                 <a:latin typeface="Inter"/>
               </a:rPr>
-              <a:t>DRAFT — for committee review · Illustrative data · Data as of 2026-09-30</a:t>
-            </a:r>
-          </a:p>
-        </p:txBody>
-      </p:sp>
-      <p:sp>
-        <p:nvSpPr>
-          <p:cNvPr id="12" name="TextBox 11"/>
+              <a:t>Confidential — Investment Committee · Data as of 2026-09-30</a:t>
+            </a:r>
+          </a:p>
+        </p:txBody>
+      </p:sp>
+      <p:sp>
+        <p:nvSpPr>
+          <p:cNvPr id="13" name="TextBox 12"/>
           <p:cNvSpPr txBox="1"/>
           <p:nvPr/>
         </p:nvSpPr>
@@ -14384,6 +15488,48 @@
         </p:nvSpPr>
         <p:spPr>
           <a:xfrm>
+            <a:off x="5897880" y="310896"/>
+            <a:ext cx="4800600" cy="256032"/>
+          </a:xfrm>
+          <a:prstGeom prst="rect">
+            <a:avLst/>
+          </a:prstGeom>
+          <a:noFill/>
+        </p:spPr>
+        <p:txBody>
+          <a:bodyPr wrap="none" lIns="9144" rIns="9144" tIns="9144" bIns="9144" anchor="t">
+            <a:spAutoFit/>
+          </a:bodyPr>
+          <a:lstStyle/>
+          <a:p>
+            <a:pPr algn="r">
+              <a:spcAft>
+                <a:spcPts val="0"/>
+              </a:spcAft>
+              <a:defRPr sz="680" b="1">
+                <a:solidFill>
+                  <a:srgbClr val="4F6B00"/>
+                </a:solidFill>
+                <a:latin typeface="Inter"/>
+              </a:defRPr>
+            </a:pPr>
+            <a:r>
+              <a:rPr>
+                <a:latin typeface="Inter"/>
+              </a:rPr>
+              <a:t>Illustrative, Gradient Maintained — demo data, not the client's holdings or managers</a:t>
+            </a:r>
+          </a:p>
+        </p:txBody>
+      </p:sp>
+      <p:sp>
+        <p:nvSpPr>
+          <p:cNvPr id="4" name="TextBox 3"/>
+          <p:cNvSpPr txBox="1"/>
+          <p:nvPr/>
+        </p:nvSpPr>
+        <p:spPr>
+          <a:xfrm>
             <a:off x="640080" y="566928"/>
             <a:ext cx="10058400" cy="530352"/>
           </a:xfrm>
@@ -14420,7 +15566,7 @@
       </p:sp>
       <p:sp>
         <p:nvSpPr>
-          <p:cNvPr id="4" name="Rectangle 3"/>
+          <p:cNvPr id="5" name="Rectangle 4"/>
           <p:cNvSpPr/>
           <p:nvPr/>
         </p:nvSpPr>
@@ -14469,7 +15615,7 @@
       </p:sp>
       <p:sp>
         <p:nvSpPr>
-          <p:cNvPr id="5" name="Rectangle 4"/>
+          <p:cNvPr id="6" name="Rectangle 5"/>
           <p:cNvSpPr/>
           <p:nvPr/>
         </p:nvSpPr>
@@ -14518,7 +15664,7 @@
       </p:sp>
       <p:sp>
         <p:nvSpPr>
-          <p:cNvPr id="6" name="TextBox 5"/>
+          <p:cNvPr id="7" name="TextBox 6"/>
           <p:cNvSpPr txBox="1"/>
           <p:nvPr/>
         </p:nvSpPr>
@@ -14560,7 +15706,7 @@
       </p:sp>
       <p:sp>
         <p:nvSpPr>
-          <p:cNvPr id="7" name="TextBox 6"/>
+          <p:cNvPr id="8" name="TextBox 7"/>
           <p:cNvSpPr txBox="1"/>
           <p:nvPr/>
         </p:nvSpPr>
@@ -14602,7 +15748,7 @@
       </p:sp>
       <p:sp>
         <p:nvSpPr>
-          <p:cNvPr id="8" name="Rectangle 7"/>
+          <p:cNvPr id="9" name="Rectangle 8"/>
           <p:cNvSpPr/>
           <p:nvPr/>
         </p:nvSpPr>
@@ -14651,7 +15797,7 @@
       </p:sp>
       <p:sp>
         <p:nvSpPr>
-          <p:cNvPr id="9" name="Rectangle 8"/>
+          <p:cNvPr id="10" name="Rectangle 9"/>
           <p:cNvSpPr/>
           <p:nvPr/>
         </p:nvSpPr>
@@ -14700,7 +15846,7 @@
       </p:sp>
       <p:sp>
         <p:nvSpPr>
-          <p:cNvPr id="10" name="TextBox 9"/>
+          <p:cNvPr id="11" name="TextBox 10"/>
           <p:cNvSpPr txBox="1"/>
           <p:nvPr/>
         </p:nvSpPr>
@@ -14742,7 +15888,7 @@
       </p:sp>
       <p:sp>
         <p:nvSpPr>
-          <p:cNvPr id="11" name="TextBox 10"/>
+          <p:cNvPr id="12" name="TextBox 11"/>
           <p:cNvSpPr txBox="1"/>
           <p:nvPr/>
         </p:nvSpPr>
@@ -14784,7 +15930,7 @@
       </p:sp>
       <p:sp>
         <p:nvSpPr>
-          <p:cNvPr id="12" name="Rectangle 11"/>
+          <p:cNvPr id="13" name="Rectangle 12"/>
           <p:cNvSpPr/>
           <p:nvPr/>
         </p:nvSpPr>
@@ -14833,7 +15979,7 @@
       </p:sp>
       <p:sp>
         <p:nvSpPr>
-          <p:cNvPr id="13" name="TextBox 12"/>
+          <p:cNvPr id="14" name="TextBox 13"/>
           <p:cNvSpPr txBox="1"/>
           <p:nvPr/>
         </p:nvSpPr>
@@ -14875,7 +16021,7 @@
       </p:sp>
       <p:sp>
         <p:nvSpPr>
-          <p:cNvPr id="14" name="TextBox 13"/>
+          <p:cNvPr id="15" name="TextBox 14"/>
           <p:cNvSpPr txBox="1"/>
           <p:nvPr/>
         </p:nvSpPr>
@@ -14910,14 +16056,14 @@
               <a:rPr>
                 <a:latin typeface="Inter"/>
               </a:rPr>
-              <a:t>DRAFT — for committee review · Illustrative data · Data as of 2026-09-30</a:t>
-            </a:r>
-          </a:p>
-        </p:txBody>
-      </p:sp>
-      <p:sp>
-        <p:nvSpPr>
-          <p:cNvPr id="15" name="TextBox 14"/>
+              <a:t>Confidential — Investment Committee · Data as of 2026-09-30</a:t>
+            </a:r>
+          </a:p>
+        </p:txBody>
+      </p:sp>
+      <p:sp>
+        <p:nvSpPr>
+          <p:cNvPr id="16" name="TextBox 15"/>
           <p:cNvSpPr txBox="1"/>
           <p:nvPr/>
         </p:nvSpPr>
@@ -15032,6 +16178,48 @@
         </p:nvSpPr>
         <p:spPr>
           <a:xfrm>
+            <a:off x="5897880" y="310896"/>
+            <a:ext cx="4800600" cy="256032"/>
+          </a:xfrm>
+          <a:prstGeom prst="rect">
+            <a:avLst/>
+          </a:prstGeom>
+          <a:noFill/>
+        </p:spPr>
+        <p:txBody>
+          <a:bodyPr wrap="none" lIns="9144" rIns="9144" tIns="9144" bIns="9144" anchor="t">
+            <a:spAutoFit/>
+          </a:bodyPr>
+          <a:lstStyle/>
+          <a:p>
+            <a:pPr algn="r">
+              <a:spcAft>
+                <a:spcPts val="0"/>
+              </a:spcAft>
+              <a:defRPr sz="680" b="1">
+                <a:solidFill>
+                  <a:srgbClr val="4F6B00"/>
+                </a:solidFill>
+                <a:latin typeface="Inter"/>
+              </a:defRPr>
+            </a:pPr>
+            <a:r>
+              <a:rPr>
+                <a:latin typeface="Inter"/>
+              </a:rPr>
+              <a:t>Illustrative, Gradient Maintained — demo data, not the client's holdings or managers</a:t>
+            </a:r>
+          </a:p>
+        </p:txBody>
+      </p:sp>
+      <p:sp>
+        <p:nvSpPr>
+          <p:cNvPr id="4" name="TextBox 3"/>
+          <p:cNvSpPr txBox="1"/>
+          <p:nvPr/>
+        </p:nvSpPr>
+        <p:spPr>
+          <a:xfrm>
             <a:off x="640080" y="566928"/>
             <a:ext cx="10058400" cy="530352"/>
           </a:xfrm>
@@ -15068,7 +16256,7 @@
       </p:sp>
       <p:sp>
         <p:nvSpPr>
-          <p:cNvPr id="4" name="Rectangle 3"/>
+          <p:cNvPr id="5" name="Rectangle 4"/>
           <p:cNvSpPr/>
           <p:nvPr/>
         </p:nvSpPr>
@@ -15117,7 +16305,7 @@
       </p:sp>
       <p:sp>
         <p:nvSpPr>
-          <p:cNvPr id="5" name="Rectangle 4"/>
+          <p:cNvPr id="6" name="Rectangle 5"/>
           <p:cNvSpPr/>
           <p:nvPr/>
         </p:nvSpPr>
@@ -15166,7 +16354,7 @@
       </p:sp>
       <p:sp>
         <p:nvSpPr>
-          <p:cNvPr id="6" name="TextBox 5"/>
+          <p:cNvPr id="7" name="TextBox 6"/>
           <p:cNvSpPr txBox="1"/>
           <p:nvPr/>
         </p:nvSpPr>
@@ -15208,7 +16396,7 @@
       </p:sp>
       <p:sp>
         <p:nvSpPr>
-          <p:cNvPr id="7" name="TextBox 6"/>
+          <p:cNvPr id="8" name="TextBox 7"/>
           <p:cNvSpPr txBox="1"/>
           <p:nvPr/>
         </p:nvSpPr>
@@ -15250,7 +16438,7 @@
       </p:sp>
       <p:sp>
         <p:nvSpPr>
-          <p:cNvPr id="8" name="Rectangle 7"/>
+          <p:cNvPr id="9" name="Rectangle 8"/>
           <p:cNvSpPr/>
           <p:nvPr/>
         </p:nvSpPr>
@@ -15299,7 +16487,7 @@
       </p:sp>
       <p:sp>
         <p:nvSpPr>
-          <p:cNvPr id="9" name="TextBox 8"/>
+          <p:cNvPr id="10" name="TextBox 9"/>
           <p:cNvSpPr txBox="1"/>
           <p:nvPr/>
         </p:nvSpPr>
@@ -15341,7 +16529,7 @@
       </p:sp>
       <p:sp>
         <p:nvSpPr>
-          <p:cNvPr id="10" name="TextBox 9"/>
+          <p:cNvPr id="11" name="TextBox 10"/>
           <p:cNvSpPr txBox="1"/>
           <p:nvPr/>
         </p:nvSpPr>
@@ -15376,14 +16564,14 @@
               <a:rPr>
                 <a:latin typeface="Inter"/>
               </a:rPr>
-              <a:t>DRAFT — for committee review · Illustrative data · Data as of 2026-09-30</a:t>
-            </a:r>
-          </a:p>
-        </p:txBody>
-      </p:sp>
-      <p:sp>
-        <p:nvSpPr>
-          <p:cNvPr id="11" name="TextBox 10"/>
+              <a:t>Confidential — Investment Committee · Data as of 2026-09-30</a:t>
+            </a:r>
+          </a:p>
+        </p:txBody>
+      </p:sp>
+      <p:sp>
+        <p:nvSpPr>
+          <p:cNvPr id="12" name="TextBox 11"/>
           <p:cNvSpPr txBox="1"/>
           <p:nvPr/>
         </p:nvSpPr>
@@ -15498,6 +16686,48 @@
         </p:nvSpPr>
         <p:spPr>
           <a:xfrm>
+            <a:off x="5897880" y="310896"/>
+            <a:ext cx="4800600" cy="256032"/>
+          </a:xfrm>
+          <a:prstGeom prst="rect">
+            <a:avLst/>
+          </a:prstGeom>
+          <a:noFill/>
+        </p:spPr>
+        <p:txBody>
+          <a:bodyPr wrap="none" lIns="9144" rIns="9144" tIns="9144" bIns="9144" anchor="t">
+            <a:spAutoFit/>
+          </a:bodyPr>
+          <a:lstStyle/>
+          <a:p>
+            <a:pPr algn="r">
+              <a:spcAft>
+                <a:spcPts val="0"/>
+              </a:spcAft>
+              <a:defRPr sz="680" b="1">
+                <a:solidFill>
+                  <a:srgbClr val="4F6B00"/>
+                </a:solidFill>
+                <a:latin typeface="Inter"/>
+              </a:defRPr>
+            </a:pPr>
+            <a:r>
+              <a:rPr>
+                <a:latin typeface="Inter"/>
+              </a:rPr>
+              <a:t>Illustrative, Gradient Maintained — demo data, not the client's holdings or managers</a:t>
+            </a:r>
+          </a:p>
+        </p:txBody>
+      </p:sp>
+      <p:sp>
+        <p:nvSpPr>
+          <p:cNvPr id="4" name="TextBox 3"/>
+          <p:cNvSpPr txBox="1"/>
+          <p:nvPr/>
+        </p:nvSpPr>
+        <p:spPr>
+          <a:xfrm>
             <a:off x="640080" y="566928"/>
             <a:ext cx="10058400" cy="530352"/>
           </a:xfrm>
@@ -15534,7 +16764,7 @@
       </p:sp>
       <p:sp>
         <p:nvSpPr>
-          <p:cNvPr id="4" name="Rectangle 3"/>
+          <p:cNvPr id="5" name="Rectangle 4"/>
           <p:cNvSpPr/>
           <p:nvPr/>
         </p:nvSpPr>
@@ -15583,7 +16813,7 @@
       </p:sp>
       <p:sp>
         <p:nvSpPr>
-          <p:cNvPr id="5" name="Rectangle 4"/>
+          <p:cNvPr id="6" name="Rectangle 5"/>
           <p:cNvSpPr/>
           <p:nvPr/>
         </p:nvSpPr>
@@ -15632,7 +16862,7 @@
       </p:sp>
       <p:sp>
         <p:nvSpPr>
-          <p:cNvPr id="6" name="TextBox 5"/>
+          <p:cNvPr id="7" name="TextBox 6"/>
           <p:cNvSpPr txBox="1"/>
           <p:nvPr/>
         </p:nvSpPr>
@@ -15674,7 +16904,7 @@
       </p:sp>
       <p:sp>
         <p:nvSpPr>
-          <p:cNvPr id="7" name="TextBox 6"/>
+          <p:cNvPr id="8" name="TextBox 7"/>
           <p:cNvSpPr txBox="1"/>
           <p:nvPr/>
         </p:nvSpPr>
@@ -15716,7 +16946,7 @@
       </p:sp>
       <p:graphicFrame>
         <p:nvGraphicFramePr>
-          <p:cNvPr id="8" name="Chart 7"/>
+          <p:cNvPr id="9" name="Chart 8"/>
           <p:cNvGraphicFramePr>
             <a:graphicFrameLocks noGrp="1"/>
           </p:cNvGraphicFramePr>
@@ -15734,7 +16964,7 @@
       </p:graphicFrame>
       <p:sp>
         <p:nvSpPr>
-          <p:cNvPr id="9" name="Rectangle 8"/>
+          <p:cNvPr id="10" name="Rectangle 9"/>
           <p:cNvSpPr/>
           <p:nvPr/>
         </p:nvSpPr>
@@ -15783,7 +17013,7 @@
       </p:sp>
       <p:sp>
         <p:nvSpPr>
-          <p:cNvPr id="10" name="TextBox 9"/>
+          <p:cNvPr id="11" name="TextBox 10"/>
           <p:cNvSpPr txBox="1"/>
           <p:nvPr/>
         </p:nvSpPr>
@@ -15825,7 +17055,7 @@
       </p:sp>
       <p:sp>
         <p:nvSpPr>
-          <p:cNvPr id="11" name="TextBox 10"/>
+          <p:cNvPr id="12" name="TextBox 11"/>
           <p:cNvSpPr txBox="1"/>
           <p:nvPr/>
         </p:nvSpPr>
@@ -15860,14 +17090,14 @@
               <a:rPr>
                 <a:latin typeface="Inter"/>
               </a:rPr>
-              <a:t>DRAFT — for committee review · Illustrative data · Data as of 2026-09-30</a:t>
-            </a:r>
-          </a:p>
-        </p:txBody>
-      </p:sp>
-      <p:sp>
-        <p:nvSpPr>
-          <p:cNvPr id="12" name="TextBox 11"/>
+              <a:t>Confidential — Investment Committee · Data as of 2026-09-30</a:t>
+            </a:r>
+          </a:p>
+        </p:txBody>
+      </p:sp>
+      <p:sp>
+        <p:nvSpPr>
+          <p:cNvPr id="13" name="TextBox 12"/>
           <p:cNvSpPr txBox="1"/>
           <p:nvPr/>
         </p:nvSpPr>
@@ -15982,6 +17212,48 @@
         </p:nvSpPr>
         <p:spPr>
           <a:xfrm>
+            <a:off x="5897880" y="310896"/>
+            <a:ext cx="4800600" cy="256032"/>
+          </a:xfrm>
+          <a:prstGeom prst="rect">
+            <a:avLst/>
+          </a:prstGeom>
+          <a:noFill/>
+        </p:spPr>
+        <p:txBody>
+          <a:bodyPr wrap="none" lIns="9144" rIns="9144" tIns="9144" bIns="9144" anchor="t">
+            <a:spAutoFit/>
+          </a:bodyPr>
+          <a:lstStyle/>
+          <a:p>
+            <a:pPr algn="r">
+              <a:spcAft>
+                <a:spcPts val="0"/>
+              </a:spcAft>
+              <a:defRPr sz="680" b="1">
+                <a:solidFill>
+                  <a:srgbClr val="4F6B00"/>
+                </a:solidFill>
+                <a:latin typeface="Inter"/>
+              </a:defRPr>
+            </a:pPr>
+            <a:r>
+              <a:rPr>
+                <a:latin typeface="Inter"/>
+              </a:rPr>
+              <a:t>Illustrative, Gradient Maintained — demo data, not the client's holdings or managers</a:t>
+            </a:r>
+          </a:p>
+        </p:txBody>
+      </p:sp>
+      <p:sp>
+        <p:nvSpPr>
+          <p:cNvPr id="4" name="TextBox 3"/>
+          <p:cNvSpPr txBox="1"/>
+          <p:nvPr/>
+        </p:nvSpPr>
+        <p:spPr>
+          <a:xfrm>
             <a:off x="640080" y="566928"/>
             <a:ext cx="10058400" cy="530352"/>
           </a:xfrm>
@@ -16018,7 +17290,7 @@
       </p:sp>
       <p:sp>
         <p:nvSpPr>
-          <p:cNvPr id="4" name="Rectangle 3"/>
+          <p:cNvPr id="5" name="Rectangle 4"/>
           <p:cNvSpPr/>
           <p:nvPr/>
         </p:nvSpPr>
@@ -16067,7 +17339,7 @@
       </p:sp>
       <p:sp>
         <p:nvSpPr>
-          <p:cNvPr id="5" name="Rectangle 4"/>
+          <p:cNvPr id="6" name="Rectangle 5"/>
           <p:cNvSpPr/>
           <p:nvPr/>
         </p:nvSpPr>
@@ -16116,7 +17388,7 @@
       </p:sp>
       <p:sp>
         <p:nvSpPr>
-          <p:cNvPr id="6" name="TextBox 5"/>
+          <p:cNvPr id="7" name="TextBox 6"/>
           <p:cNvSpPr txBox="1"/>
           <p:nvPr/>
         </p:nvSpPr>
@@ -16158,7 +17430,7 @@
       </p:sp>
       <p:sp>
         <p:nvSpPr>
-          <p:cNvPr id="7" name="TextBox 6"/>
+          <p:cNvPr id="8" name="TextBox 7"/>
           <p:cNvSpPr txBox="1"/>
           <p:nvPr/>
         </p:nvSpPr>
@@ -16314,7 +17586,7 @@
       </p:sp>
       <p:sp>
         <p:nvSpPr>
-          <p:cNvPr id="8" name="Rectangle 7"/>
+          <p:cNvPr id="9" name="Rectangle 8"/>
           <p:cNvSpPr/>
           <p:nvPr/>
         </p:nvSpPr>
@@ -16363,7 +17635,7 @@
       </p:sp>
       <p:sp>
         <p:nvSpPr>
-          <p:cNvPr id="9" name="TextBox 8"/>
+          <p:cNvPr id="10" name="TextBox 9"/>
           <p:cNvSpPr txBox="1"/>
           <p:nvPr/>
         </p:nvSpPr>
@@ -16405,7 +17677,7 @@
       </p:sp>
       <p:sp>
         <p:nvSpPr>
-          <p:cNvPr id="10" name="TextBox 9"/>
+          <p:cNvPr id="11" name="TextBox 10"/>
           <p:cNvSpPr txBox="1"/>
           <p:nvPr/>
         </p:nvSpPr>
@@ -16440,14 +17712,14 @@
               <a:rPr>
                 <a:latin typeface="Inter"/>
               </a:rPr>
-              <a:t>DRAFT — for committee review · Illustrative data · Data as of 2026-09-30</a:t>
-            </a:r>
-          </a:p>
-        </p:txBody>
-      </p:sp>
-      <p:sp>
-        <p:nvSpPr>
-          <p:cNvPr id="11" name="TextBox 10"/>
+              <a:t>Confidential — Investment Committee · Data as of 2026-09-30</a:t>
+            </a:r>
+          </a:p>
+        </p:txBody>
+      </p:sp>
+      <p:sp>
+        <p:nvSpPr>
+          <p:cNvPr id="12" name="TextBox 11"/>
           <p:cNvSpPr txBox="1"/>
           <p:nvPr/>
         </p:nvSpPr>
@@ -16562,6 +17834,48 @@
         </p:nvSpPr>
         <p:spPr>
           <a:xfrm>
+            <a:off x="5897880" y="310896"/>
+            <a:ext cx="4800600" cy="256032"/>
+          </a:xfrm>
+          <a:prstGeom prst="rect">
+            <a:avLst/>
+          </a:prstGeom>
+          <a:noFill/>
+        </p:spPr>
+        <p:txBody>
+          <a:bodyPr wrap="none" lIns="9144" rIns="9144" tIns="9144" bIns="9144" anchor="t">
+            <a:spAutoFit/>
+          </a:bodyPr>
+          <a:lstStyle/>
+          <a:p>
+            <a:pPr algn="r">
+              <a:spcAft>
+                <a:spcPts val="0"/>
+              </a:spcAft>
+              <a:defRPr sz="680" b="1">
+                <a:solidFill>
+                  <a:srgbClr val="4F6B00"/>
+                </a:solidFill>
+                <a:latin typeface="Inter"/>
+              </a:defRPr>
+            </a:pPr>
+            <a:r>
+              <a:rPr>
+                <a:latin typeface="Inter"/>
+              </a:rPr>
+              <a:t>Illustrative, Gradient Maintained — demo data, not the client's holdings or managers</a:t>
+            </a:r>
+          </a:p>
+        </p:txBody>
+      </p:sp>
+      <p:sp>
+        <p:nvSpPr>
+          <p:cNvPr id="4" name="TextBox 3"/>
+          <p:cNvSpPr txBox="1"/>
+          <p:nvPr/>
+        </p:nvSpPr>
+        <p:spPr>
+          <a:xfrm>
             <a:off x="640080" y="566928"/>
             <a:ext cx="10058400" cy="530352"/>
           </a:xfrm>
@@ -16598,7 +17912,7 @@
       </p:sp>
       <p:sp>
         <p:nvSpPr>
-          <p:cNvPr id="4" name="Rectangle 3"/>
+          <p:cNvPr id="5" name="Rectangle 4"/>
           <p:cNvSpPr/>
           <p:nvPr/>
         </p:nvSpPr>
@@ -16647,7 +17961,7 @@
       </p:sp>
       <p:sp>
         <p:nvSpPr>
-          <p:cNvPr id="5" name="Rectangle 4"/>
+          <p:cNvPr id="6" name="Rectangle 5"/>
           <p:cNvSpPr/>
           <p:nvPr/>
         </p:nvSpPr>
@@ -16696,7 +18010,7 @@
       </p:sp>
       <p:sp>
         <p:nvSpPr>
-          <p:cNvPr id="6" name="TextBox 5"/>
+          <p:cNvPr id="7" name="TextBox 6"/>
           <p:cNvSpPr txBox="1"/>
           <p:nvPr/>
         </p:nvSpPr>
@@ -16738,7 +18052,7 @@
       </p:sp>
       <p:sp>
         <p:nvSpPr>
-          <p:cNvPr id="7" name="TextBox 6"/>
+          <p:cNvPr id="8" name="TextBox 7"/>
           <p:cNvSpPr txBox="1"/>
           <p:nvPr/>
         </p:nvSpPr>
@@ -16780,7 +18094,7 @@
       </p:sp>
       <p:sp>
         <p:nvSpPr>
-          <p:cNvPr id="8" name="Rectangle 7"/>
+          <p:cNvPr id="9" name="Rectangle 8"/>
           <p:cNvSpPr/>
           <p:nvPr/>
         </p:nvSpPr>
@@ -16829,7 +18143,7 @@
       </p:sp>
       <p:sp>
         <p:nvSpPr>
-          <p:cNvPr id="9" name="Rectangle 8"/>
+          <p:cNvPr id="10" name="Rectangle 9"/>
           <p:cNvSpPr/>
           <p:nvPr/>
         </p:nvSpPr>
@@ -16878,7 +18192,7 @@
       </p:sp>
       <p:sp>
         <p:nvSpPr>
-          <p:cNvPr id="10" name="TextBox 9"/>
+          <p:cNvPr id="11" name="TextBox 10"/>
           <p:cNvSpPr txBox="1"/>
           <p:nvPr/>
         </p:nvSpPr>
@@ -16920,7 +18234,7 @@
       </p:sp>
       <p:sp>
         <p:nvSpPr>
-          <p:cNvPr id="11" name="TextBox 10"/>
+          <p:cNvPr id="12" name="TextBox 11"/>
           <p:cNvSpPr txBox="1"/>
           <p:nvPr/>
         </p:nvSpPr>
@@ -16962,7 +18276,7 @@
       </p:sp>
       <p:sp>
         <p:nvSpPr>
-          <p:cNvPr id="12" name="TextBox 11"/>
+          <p:cNvPr id="13" name="TextBox 12"/>
           <p:cNvSpPr txBox="1"/>
           <p:nvPr/>
         </p:nvSpPr>
@@ -17004,7 +18318,7 @@
       </p:sp>
       <p:sp>
         <p:nvSpPr>
-          <p:cNvPr id="13" name="Rectangle 12"/>
+          <p:cNvPr id="14" name="Rectangle 13"/>
           <p:cNvSpPr/>
           <p:nvPr/>
         </p:nvSpPr>
@@ -17053,7 +18367,7 @@
       </p:sp>
       <p:sp>
         <p:nvSpPr>
-          <p:cNvPr id="14" name="Rectangle 13"/>
+          <p:cNvPr id="15" name="Rectangle 14"/>
           <p:cNvSpPr/>
           <p:nvPr/>
         </p:nvSpPr>
@@ -17102,7 +18416,7 @@
       </p:sp>
       <p:sp>
         <p:nvSpPr>
-          <p:cNvPr id="15" name="TextBox 14"/>
+          <p:cNvPr id="16" name="TextBox 15"/>
           <p:cNvSpPr txBox="1"/>
           <p:nvPr/>
         </p:nvSpPr>
@@ -17144,7 +18458,7 @@
       </p:sp>
       <p:sp>
         <p:nvSpPr>
-          <p:cNvPr id="16" name="TextBox 15"/>
+          <p:cNvPr id="17" name="TextBox 16"/>
           <p:cNvSpPr txBox="1"/>
           <p:nvPr/>
         </p:nvSpPr>
@@ -17186,7 +18500,7 @@
       </p:sp>
       <p:sp>
         <p:nvSpPr>
-          <p:cNvPr id="17" name="TextBox 16"/>
+          <p:cNvPr id="18" name="TextBox 17"/>
           <p:cNvSpPr txBox="1"/>
           <p:nvPr/>
         </p:nvSpPr>
@@ -17228,7 +18542,7 @@
       </p:sp>
       <p:sp>
         <p:nvSpPr>
-          <p:cNvPr id="18" name="Rectangle 17"/>
+          <p:cNvPr id="19" name="Rectangle 18"/>
           <p:cNvSpPr/>
           <p:nvPr/>
         </p:nvSpPr>
@@ -17277,7 +18591,7 @@
       </p:sp>
       <p:sp>
         <p:nvSpPr>
-          <p:cNvPr id="19" name="Rectangle 18"/>
+          <p:cNvPr id="20" name="Rectangle 19"/>
           <p:cNvSpPr/>
           <p:nvPr/>
         </p:nvSpPr>
@@ -17326,7 +18640,7 @@
       </p:sp>
       <p:sp>
         <p:nvSpPr>
-          <p:cNvPr id="20" name="TextBox 19"/>
+          <p:cNvPr id="21" name="TextBox 20"/>
           <p:cNvSpPr txBox="1"/>
           <p:nvPr/>
         </p:nvSpPr>
@@ -17368,7 +18682,7 @@
       </p:sp>
       <p:sp>
         <p:nvSpPr>
-          <p:cNvPr id="21" name="TextBox 20"/>
+          <p:cNvPr id="22" name="TextBox 21"/>
           <p:cNvSpPr txBox="1"/>
           <p:nvPr/>
         </p:nvSpPr>
@@ -17410,7 +18724,7 @@
       </p:sp>
       <p:sp>
         <p:nvSpPr>
-          <p:cNvPr id="22" name="TextBox 21"/>
+          <p:cNvPr id="23" name="TextBox 22"/>
           <p:cNvSpPr txBox="1"/>
           <p:nvPr/>
         </p:nvSpPr>
@@ -17452,7 +18766,7 @@
       </p:sp>
       <p:sp>
         <p:nvSpPr>
-          <p:cNvPr id="23" name="Rectangle 22"/>
+          <p:cNvPr id="24" name="Rectangle 23"/>
           <p:cNvSpPr/>
           <p:nvPr/>
         </p:nvSpPr>
@@ -17501,7 +18815,7 @@
       </p:sp>
       <p:sp>
         <p:nvSpPr>
-          <p:cNvPr id="24" name="Rectangle 23"/>
+          <p:cNvPr id="25" name="Rectangle 24"/>
           <p:cNvSpPr/>
           <p:nvPr/>
         </p:nvSpPr>
@@ -17550,7 +18864,7 @@
       </p:sp>
       <p:sp>
         <p:nvSpPr>
-          <p:cNvPr id="25" name="TextBox 24"/>
+          <p:cNvPr id="26" name="TextBox 25"/>
           <p:cNvSpPr txBox="1"/>
           <p:nvPr/>
         </p:nvSpPr>
@@ -17592,7 +18906,7 @@
       </p:sp>
       <p:sp>
         <p:nvSpPr>
-          <p:cNvPr id="26" name="TextBox 25"/>
+          <p:cNvPr id="27" name="TextBox 26"/>
           <p:cNvSpPr txBox="1"/>
           <p:nvPr/>
         </p:nvSpPr>
@@ -17634,7 +18948,7 @@
       </p:sp>
       <p:sp>
         <p:nvSpPr>
-          <p:cNvPr id="27" name="Rectangle 26"/>
+          <p:cNvPr id="28" name="Rectangle 27"/>
           <p:cNvSpPr/>
           <p:nvPr/>
         </p:nvSpPr>
@@ -17683,7 +18997,7 @@
       </p:sp>
       <p:sp>
         <p:nvSpPr>
-          <p:cNvPr id="28" name="TextBox 27"/>
+          <p:cNvPr id="29" name="TextBox 28"/>
           <p:cNvSpPr txBox="1"/>
           <p:nvPr/>
         </p:nvSpPr>
@@ -17725,7 +19039,7 @@
       </p:sp>
       <p:sp>
         <p:nvSpPr>
-          <p:cNvPr id="29" name="TextBox 28"/>
+          <p:cNvPr id="30" name="TextBox 29"/>
           <p:cNvSpPr txBox="1"/>
           <p:nvPr/>
         </p:nvSpPr>
@@ -17760,14 +19074,14 @@
               <a:rPr>
                 <a:latin typeface="Inter"/>
               </a:rPr>
-              <a:t>DRAFT — for committee review · Illustrative data · Data as of 2026-09-30</a:t>
-            </a:r>
-          </a:p>
-        </p:txBody>
-      </p:sp>
-      <p:sp>
-        <p:nvSpPr>
-          <p:cNvPr id="30" name="TextBox 29"/>
+              <a:t>Confidential — Investment Committee · Data as of 2026-09-30</a:t>
+            </a:r>
+          </a:p>
+        </p:txBody>
+      </p:sp>
+      <p:sp>
+        <p:nvSpPr>
+          <p:cNvPr id="31" name="TextBox 30"/>
           <p:cNvSpPr txBox="1"/>
           <p:nvPr/>
         </p:nvSpPr>
@@ -17882,6 +19196,48 @@
         </p:nvSpPr>
         <p:spPr>
           <a:xfrm>
+            <a:off x="5897880" y="310896"/>
+            <a:ext cx="4800600" cy="256032"/>
+          </a:xfrm>
+          <a:prstGeom prst="rect">
+            <a:avLst/>
+          </a:prstGeom>
+          <a:noFill/>
+        </p:spPr>
+        <p:txBody>
+          <a:bodyPr wrap="none" lIns="9144" rIns="9144" tIns="9144" bIns="9144" anchor="t">
+            <a:spAutoFit/>
+          </a:bodyPr>
+          <a:lstStyle/>
+          <a:p>
+            <a:pPr algn="r">
+              <a:spcAft>
+                <a:spcPts val="0"/>
+              </a:spcAft>
+              <a:defRPr sz="680" b="1">
+                <a:solidFill>
+                  <a:srgbClr val="4F6B00"/>
+                </a:solidFill>
+                <a:latin typeface="Inter"/>
+              </a:defRPr>
+            </a:pPr>
+            <a:r>
+              <a:rPr>
+                <a:latin typeface="Inter"/>
+              </a:rPr>
+              <a:t>Illustrative, Gradient Maintained — demo data, not the client's holdings or managers</a:t>
+            </a:r>
+          </a:p>
+        </p:txBody>
+      </p:sp>
+      <p:sp>
+        <p:nvSpPr>
+          <p:cNvPr id="4" name="TextBox 3"/>
+          <p:cNvSpPr txBox="1"/>
+          <p:nvPr/>
+        </p:nvSpPr>
+        <p:spPr>
+          <a:xfrm>
             <a:off x="640080" y="566928"/>
             <a:ext cx="10058400" cy="530352"/>
           </a:xfrm>
@@ -17918,7 +19274,7 @@
       </p:sp>
       <p:sp>
         <p:nvSpPr>
-          <p:cNvPr id="4" name="Rectangle 3"/>
+          <p:cNvPr id="5" name="Rectangle 4"/>
           <p:cNvSpPr/>
           <p:nvPr/>
         </p:nvSpPr>
@@ -17967,7 +19323,7 @@
       </p:sp>
       <p:sp>
         <p:nvSpPr>
-          <p:cNvPr id="5" name="Rectangle 4"/>
+          <p:cNvPr id="6" name="Rectangle 5"/>
           <p:cNvSpPr/>
           <p:nvPr/>
         </p:nvSpPr>
@@ -18016,7 +19372,7 @@
       </p:sp>
       <p:sp>
         <p:nvSpPr>
-          <p:cNvPr id="6" name="TextBox 5"/>
+          <p:cNvPr id="7" name="TextBox 6"/>
           <p:cNvSpPr txBox="1"/>
           <p:nvPr/>
         </p:nvSpPr>
@@ -18058,7 +19414,7 @@
       </p:sp>
       <p:sp>
         <p:nvSpPr>
-          <p:cNvPr id="7" name="TextBox 6"/>
+          <p:cNvPr id="8" name="TextBox 7"/>
           <p:cNvSpPr txBox="1"/>
           <p:nvPr/>
         </p:nvSpPr>
@@ -18100,7 +19456,7 @@
       </p:sp>
       <p:graphicFrame>
         <p:nvGraphicFramePr>
-          <p:cNvPr id="8" name="Chart 7"/>
+          <p:cNvPr id="9" name="Chart 8"/>
           <p:cNvGraphicFramePr>
             <a:graphicFrameLocks noGrp="1"/>
           </p:cNvGraphicFramePr>
@@ -18118,7 +19474,7 @@
       </p:graphicFrame>
       <p:sp>
         <p:nvSpPr>
-          <p:cNvPr id="9" name="Rectangle 8"/>
+          <p:cNvPr id="10" name="Rectangle 9"/>
           <p:cNvSpPr/>
           <p:nvPr/>
         </p:nvSpPr>
@@ -18167,7 +19523,7 @@
       </p:sp>
       <p:sp>
         <p:nvSpPr>
-          <p:cNvPr id="10" name="TextBox 9"/>
+          <p:cNvPr id="11" name="TextBox 10"/>
           <p:cNvSpPr txBox="1"/>
           <p:nvPr/>
         </p:nvSpPr>
@@ -18209,7 +19565,7 @@
       </p:sp>
       <p:sp>
         <p:nvSpPr>
-          <p:cNvPr id="11" name="TextBox 10"/>
+          <p:cNvPr id="12" name="TextBox 11"/>
           <p:cNvSpPr txBox="1"/>
           <p:nvPr/>
         </p:nvSpPr>
@@ -18244,14 +19600,14 @@
               <a:rPr>
                 <a:latin typeface="Inter"/>
               </a:rPr>
-              <a:t>DRAFT — for committee review · Illustrative data · Data as of 2026-09-30</a:t>
-            </a:r>
-          </a:p>
-        </p:txBody>
-      </p:sp>
-      <p:sp>
-        <p:nvSpPr>
-          <p:cNvPr id="12" name="TextBox 11"/>
+              <a:t>Confidential — Investment Committee · Data as of 2026-09-30</a:t>
+            </a:r>
+          </a:p>
+        </p:txBody>
+      </p:sp>
+      <p:sp>
+        <p:nvSpPr>
+          <p:cNvPr id="13" name="TextBox 12"/>
           <p:cNvSpPr txBox="1"/>
           <p:nvPr/>
         </p:nvSpPr>
@@ -18366,6 +19722,48 @@
         </p:nvSpPr>
         <p:spPr>
           <a:xfrm>
+            <a:off x="5897880" y="310896"/>
+            <a:ext cx="4800600" cy="256032"/>
+          </a:xfrm>
+          <a:prstGeom prst="rect">
+            <a:avLst/>
+          </a:prstGeom>
+          <a:noFill/>
+        </p:spPr>
+        <p:txBody>
+          <a:bodyPr wrap="none" lIns="9144" rIns="9144" tIns="9144" bIns="9144" anchor="t">
+            <a:spAutoFit/>
+          </a:bodyPr>
+          <a:lstStyle/>
+          <a:p>
+            <a:pPr algn="r">
+              <a:spcAft>
+                <a:spcPts val="0"/>
+              </a:spcAft>
+              <a:defRPr sz="680" b="1">
+                <a:solidFill>
+                  <a:srgbClr val="4F6B00"/>
+                </a:solidFill>
+                <a:latin typeface="Inter"/>
+              </a:defRPr>
+            </a:pPr>
+            <a:r>
+              <a:rPr>
+                <a:latin typeface="Inter"/>
+              </a:rPr>
+              <a:t>Illustrative, Gradient Maintained — demo data, not the client's holdings or managers</a:t>
+            </a:r>
+          </a:p>
+        </p:txBody>
+      </p:sp>
+      <p:sp>
+        <p:nvSpPr>
+          <p:cNvPr id="4" name="TextBox 3"/>
+          <p:cNvSpPr txBox="1"/>
+          <p:nvPr/>
+        </p:nvSpPr>
+        <p:spPr>
+          <a:xfrm>
             <a:off x="640080" y="566928"/>
             <a:ext cx="10058400" cy="530352"/>
           </a:xfrm>
@@ -18402,7 +19800,7 @@
       </p:sp>
       <p:sp>
         <p:nvSpPr>
-          <p:cNvPr id="4" name="Rectangle 3"/>
+          <p:cNvPr id="5" name="Rectangle 4"/>
           <p:cNvSpPr/>
           <p:nvPr/>
         </p:nvSpPr>
@@ -18451,7 +19849,7 @@
       </p:sp>
       <p:sp>
         <p:nvSpPr>
-          <p:cNvPr id="5" name="Rectangle 4"/>
+          <p:cNvPr id="6" name="Rectangle 5"/>
           <p:cNvSpPr/>
           <p:nvPr/>
         </p:nvSpPr>
@@ -18500,7 +19898,7 @@
       </p:sp>
       <p:sp>
         <p:nvSpPr>
-          <p:cNvPr id="6" name="TextBox 5"/>
+          <p:cNvPr id="7" name="TextBox 6"/>
           <p:cNvSpPr txBox="1"/>
           <p:nvPr/>
         </p:nvSpPr>
@@ -18542,7 +19940,7 @@
       </p:sp>
       <p:sp>
         <p:nvSpPr>
-          <p:cNvPr id="7" name="TextBox 6"/>
+          <p:cNvPr id="8" name="TextBox 7"/>
           <p:cNvSpPr txBox="1"/>
           <p:nvPr/>
         </p:nvSpPr>
@@ -18584,7 +19982,7 @@
       </p:sp>
       <p:sp>
         <p:nvSpPr>
-          <p:cNvPr id="8" name="Rectangle 7"/>
+          <p:cNvPr id="9" name="Rectangle 8"/>
           <p:cNvSpPr/>
           <p:nvPr/>
         </p:nvSpPr>
@@ -18633,7 +20031,7 @@
       </p:sp>
       <p:sp>
         <p:nvSpPr>
-          <p:cNvPr id="9" name="Rectangle 8"/>
+          <p:cNvPr id="10" name="Rectangle 9"/>
           <p:cNvSpPr/>
           <p:nvPr/>
         </p:nvSpPr>
@@ -18682,7 +20080,7 @@
       </p:sp>
       <p:sp>
         <p:nvSpPr>
-          <p:cNvPr id="10" name="TextBox 9"/>
+          <p:cNvPr id="11" name="TextBox 10"/>
           <p:cNvSpPr txBox="1"/>
           <p:nvPr/>
         </p:nvSpPr>
@@ -18724,7 +20122,7 @@
       </p:sp>
       <p:sp>
         <p:nvSpPr>
-          <p:cNvPr id="11" name="TextBox 10"/>
+          <p:cNvPr id="12" name="TextBox 11"/>
           <p:cNvSpPr txBox="1"/>
           <p:nvPr/>
         </p:nvSpPr>
@@ -18766,7 +20164,7 @@
       </p:sp>
       <p:sp>
         <p:nvSpPr>
-          <p:cNvPr id="12" name="Rectangle 11"/>
+          <p:cNvPr id="13" name="Rectangle 12"/>
           <p:cNvSpPr/>
           <p:nvPr/>
         </p:nvSpPr>
@@ -18815,7 +20213,7 @@
       </p:sp>
       <p:sp>
         <p:nvSpPr>
-          <p:cNvPr id="13" name="TextBox 12"/>
+          <p:cNvPr id="14" name="TextBox 13"/>
           <p:cNvSpPr txBox="1"/>
           <p:nvPr/>
         </p:nvSpPr>
@@ -18857,7 +20255,7 @@
       </p:sp>
       <p:sp>
         <p:nvSpPr>
-          <p:cNvPr id="14" name="TextBox 13"/>
+          <p:cNvPr id="15" name="TextBox 14"/>
           <p:cNvSpPr txBox="1"/>
           <p:nvPr/>
         </p:nvSpPr>
@@ -18892,14 +20290,14 @@
               <a:rPr>
                 <a:latin typeface="Inter"/>
               </a:rPr>
-              <a:t>DRAFT — for committee review · Illustrative data · Data as of 2026-09-30</a:t>
-            </a:r>
-          </a:p>
-        </p:txBody>
-      </p:sp>
-      <p:sp>
-        <p:nvSpPr>
-          <p:cNvPr id="15" name="TextBox 14"/>
+              <a:t>Confidential — Investment Committee · Data as of 2026-09-30</a:t>
+            </a:r>
+          </a:p>
+        </p:txBody>
+      </p:sp>
+      <p:sp>
+        <p:nvSpPr>
+          <p:cNvPr id="16" name="TextBox 15"/>
           <p:cNvSpPr txBox="1"/>
           <p:nvPr/>
         </p:nvSpPr>
@@ -19014,6 +20412,48 @@
         </p:nvSpPr>
         <p:spPr>
           <a:xfrm>
+            <a:off x="5897880" y="310896"/>
+            <a:ext cx="4800600" cy="256032"/>
+          </a:xfrm>
+          <a:prstGeom prst="rect">
+            <a:avLst/>
+          </a:prstGeom>
+          <a:noFill/>
+        </p:spPr>
+        <p:txBody>
+          <a:bodyPr wrap="none" lIns="9144" rIns="9144" tIns="9144" bIns="9144" anchor="t">
+            <a:spAutoFit/>
+          </a:bodyPr>
+          <a:lstStyle/>
+          <a:p>
+            <a:pPr algn="r">
+              <a:spcAft>
+                <a:spcPts val="0"/>
+              </a:spcAft>
+              <a:defRPr sz="680" b="1">
+                <a:solidFill>
+                  <a:srgbClr val="4F6B00"/>
+                </a:solidFill>
+                <a:latin typeface="Inter"/>
+              </a:defRPr>
+            </a:pPr>
+            <a:r>
+              <a:rPr>
+                <a:latin typeface="Inter"/>
+              </a:rPr>
+              <a:t>Illustrative, Gradient Maintained — demo data, not the client's holdings or managers</a:t>
+            </a:r>
+          </a:p>
+        </p:txBody>
+      </p:sp>
+      <p:sp>
+        <p:nvSpPr>
+          <p:cNvPr id="4" name="TextBox 3"/>
+          <p:cNvSpPr txBox="1"/>
+          <p:nvPr/>
+        </p:nvSpPr>
+        <p:spPr>
+          <a:xfrm>
             <a:off x="640080" y="566928"/>
             <a:ext cx="10058400" cy="530352"/>
           </a:xfrm>
@@ -19050,7 +20490,7 @@
       </p:sp>
       <p:sp>
         <p:nvSpPr>
-          <p:cNvPr id="4" name="Rectangle 3"/>
+          <p:cNvPr id="5" name="Rectangle 4"/>
           <p:cNvSpPr/>
           <p:nvPr/>
         </p:nvSpPr>
@@ -19099,7 +20539,7 @@
       </p:sp>
       <p:sp>
         <p:nvSpPr>
-          <p:cNvPr id="5" name="Rectangle 4"/>
+          <p:cNvPr id="6" name="Rectangle 5"/>
           <p:cNvSpPr/>
           <p:nvPr/>
         </p:nvSpPr>
@@ -19148,7 +20588,7 @@
       </p:sp>
       <p:sp>
         <p:nvSpPr>
-          <p:cNvPr id="6" name="TextBox 5"/>
+          <p:cNvPr id="7" name="TextBox 6"/>
           <p:cNvSpPr txBox="1"/>
           <p:nvPr/>
         </p:nvSpPr>
@@ -19190,7 +20630,7 @@
       </p:sp>
       <p:sp>
         <p:nvSpPr>
-          <p:cNvPr id="7" name="TextBox 6"/>
+          <p:cNvPr id="8" name="TextBox 7"/>
           <p:cNvSpPr txBox="1"/>
           <p:nvPr/>
         </p:nvSpPr>
@@ -19232,7 +20672,7 @@
       </p:sp>
       <p:sp>
         <p:nvSpPr>
-          <p:cNvPr id="8" name="Rectangle 7"/>
+          <p:cNvPr id="9" name="Rectangle 8"/>
           <p:cNvSpPr/>
           <p:nvPr/>
         </p:nvSpPr>
@@ -19281,7 +20721,7 @@
       </p:sp>
       <p:sp>
         <p:nvSpPr>
-          <p:cNvPr id="9" name="TextBox 8"/>
+          <p:cNvPr id="10" name="TextBox 9"/>
           <p:cNvSpPr txBox="1"/>
           <p:nvPr/>
         </p:nvSpPr>
@@ -19323,7 +20763,7 @@
       </p:sp>
       <p:sp>
         <p:nvSpPr>
-          <p:cNvPr id="10" name="TextBox 9"/>
+          <p:cNvPr id="11" name="TextBox 10"/>
           <p:cNvSpPr txBox="1"/>
           <p:nvPr/>
         </p:nvSpPr>
@@ -19358,14 +20798,14 @@
               <a:rPr>
                 <a:latin typeface="Inter"/>
               </a:rPr>
-              <a:t>DRAFT — for committee review · Illustrative data · Data as of 2026-09-30</a:t>
-            </a:r>
-          </a:p>
-        </p:txBody>
-      </p:sp>
-      <p:sp>
-        <p:nvSpPr>
-          <p:cNvPr id="11" name="TextBox 10"/>
+              <a:t>Confidential — Investment Committee · Data as of 2026-09-30</a:t>
+            </a:r>
+          </a:p>
+        </p:txBody>
+      </p:sp>
+      <p:sp>
+        <p:nvSpPr>
+          <p:cNvPr id="12" name="TextBox 11"/>
           <p:cNvSpPr txBox="1"/>
           <p:nvPr/>
         </p:nvSpPr>
@@ -19480,6 +20920,48 @@
         </p:nvSpPr>
         <p:spPr>
           <a:xfrm>
+            <a:off x="5897880" y="310896"/>
+            <a:ext cx="4800600" cy="256032"/>
+          </a:xfrm>
+          <a:prstGeom prst="rect">
+            <a:avLst/>
+          </a:prstGeom>
+          <a:noFill/>
+        </p:spPr>
+        <p:txBody>
+          <a:bodyPr wrap="none" lIns="9144" rIns="9144" tIns="9144" bIns="9144" anchor="t">
+            <a:spAutoFit/>
+          </a:bodyPr>
+          <a:lstStyle/>
+          <a:p>
+            <a:pPr algn="r">
+              <a:spcAft>
+                <a:spcPts val="0"/>
+              </a:spcAft>
+              <a:defRPr sz="680" b="1">
+                <a:solidFill>
+                  <a:srgbClr val="4F6B00"/>
+                </a:solidFill>
+                <a:latin typeface="Inter"/>
+              </a:defRPr>
+            </a:pPr>
+            <a:r>
+              <a:rPr>
+                <a:latin typeface="Inter"/>
+              </a:rPr>
+              <a:t>Illustrative, Gradient Maintained — demo data, not the client's holdings or managers</a:t>
+            </a:r>
+          </a:p>
+        </p:txBody>
+      </p:sp>
+      <p:sp>
+        <p:nvSpPr>
+          <p:cNvPr id="4" name="TextBox 3"/>
+          <p:cNvSpPr txBox="1"/>
+          <p:nvPr/>
+        </p:nvSpPr>
+        <p:spPr>
+          <a:xfrm>
             <a:off x="640080" y="566928"/>
             <a:ext cx="10058400" cy="530352"/>
           </a:xfrm>
@@ -19516,7 +20998,7 @@
       </p:sp>
       <p:sp>
         <p:nvSpPr>
-          <p:cNvPr id="4" name="Rectangle 3"/>
+          <p:cNvPr id="5" name="Rectangle 4"/>
           <p:cNvSpPr/>
           <p:nvPr/>
         </p:nvSpPr>
@@ -19565,7 +21047,7 @@
       </p:sp>
       <p:sp>
         <p:nvSpPr>
-          <p:cNvPr id="5" name="Rectangle 4"/>
+          <p:cNvPr id="6" name="Rectangle 5"/>
           <p:cNvSpPr/>
           <p:nvPr/>
         </p:nvSpPr>
@@ -19614,7 +21096,7 @@
       </p:sp>
       <p:sp>
         <p:nvSpPr>
-          <p:cNvPr id="6" name="TextBox 5"/>
+          <p:cNvPr id="7" name="TextBox 6"/>
           <p:cNvSpPr txBox="1"/>
           <p:nvPr/>
         </p:nvSpPr>
@@ -19656,7 +21138,7 @@
       </p:sp>
       <p:sp>
         <p:nvSpPr>
-          <p:cNvPr id="7" name="TextBox 6"/>
+          <p:cNvPr id="8" name="TextBox 7"/>
           <p:cNvSpPr txBox="1"/>
           <p:nvPr/>
         </p:nvSpPr>
@@ -19698,7 +21180,7 @@
       </p:sp>
       <p:graphicFrame>
         <p:nvGraphicFramePr>
-          <p:cNvPr id="8" name="Chart 7"/>
+          <p:cNvPr id="9" name="Chart 8"/>
           <p:cNvGraphicFramePr>
             <a:graphicFrameLocks noGrp="1"/>
           </p:cNvGraphicFramePr>
@@ -19716,7 +21198,7 @@
       </p:graphicFrame>
       <p:sp>
         <p:nvSpPr>
-          <p:cNvPr id="9" name="Rectangle 8"/>
+          <p:cNvPr id="10" name="Rectangle 9"/>
           <p:cNvSpPr/>
           <p:nvPr/>
         </p:nvSpPr>
@@ -19765,7 +21247,7 @@
       </p:sp>
       <p:sp>
         <p:nvSpPr>
-          <p:cNvPr id="10" name="TextBox 9"/>
+          <p:cNvPr id="11" name="TextBox 10"/>
           <p:cNvSpPr txBox="1"/>
           <p:nvPr/>
         </p:nvSpPr>
@@ -19807,7 +21289,7 @@
       </p:sp>
       <p:sp>
         <p:nvSpPr>
-          <p:cNvPr id="11" name="TextBox 10"/>
+          <p:cNvPr id="12" name="TextBox 11"/>
           <p:cNvSpPr txBox="1"/>
           <p:nvPr/>
         </p:nvSpPr>
@@ -19842,14 +21324,14 @@
               <a:rPr>
                 <a:latin typeface="Inter"/>
               </a:rPr>
-              <a:t>DRAFT — for committee review · Illustrative data · Data as of 2026-09-30</a:t>
-            </a:r>
-          </a:p>
-        </p:txBody>
-      </p:sp>
-      <p:sp>
-        <p:nvSpPr>
-          <p:cNvPr id="12" name="TextBox 11"/>
+              <a:t>Confidential — Investment Committee · Data as of 2026-09-30</a:t>
+            </a:r>
+          </a:p>
+        </p:txBody>
+      </p:sp>
+      <p:sp>
+        <p:nvSpPr>
+          <p:cNvPr id="13" name="TextBox 12"/>
           <p:cNvSpPr txBox="1"/>
           <p:nvPr/>
         </p:nvSpPr>
@@ -19964,6 +21446,48 @@
         </p:nvSpPr>
         <p:spPr>
           <a:xfrm>
+            <a:off x="5897880" y="310896"/>
+            <a:ext cx="4800600" cy="256032"/>
+          </a:xfrm>
+          <a:prstGeom prst="rect">
+            <a:avLst/>
+          </a:prstGeom>
+          <a:noFill/>
+        </p:spPr>
+        <p:txBody>
+          <a:bodyPr wrap="none" lIns="9144" rIns="9144" tIns="9144" bIns="9144" anchor="t">
+            <a:spAutoFit/>
+          </a:bodyPr>
+          <a:lstStyle/>
+          <a:p>
+            <a:pPr algn="r">
+              <a:spcAft>
+                <a:spcPts val="0"/>
+              </a:spcAft>
+              <a:defRPr sz="680" b="1">
+                <a:solidFill>
+                  <a:srgbClr val="4F6B00"/>
+                </a:solidFill>
+                <a:latin typeface="Inter"/>
+              </a:defRPr>
+            </a:pPr>
+            <a:r>
+              <a:rPr>
+                <a:latin typeface="Inter"/>
+              </a:rPr>
+              <a:t>Illustrative, Gradient Maintained — demo data, not the client's holdings or managers</a:t>
+            </a:r>
+          </a:p>
+        </p:txBody>
+      </p:sp>
+      <p:sp>
+        <p:nvSpPr>
+          <p:cNvPr id="4" name="TextBox 3"/>
+          <p:cNvSpPr txBox="1"/>
+          <p:nvPr/>
+        </p:nvSpPr>
+        <p:spPr>
+          <a:xfrm>
             <a:off x="640080" y="566928"/>
             <a:ext cx="10058400" cy="530352"/>
           </a:xfrm>
@@ -20000,7 +21524,7 @@
       </p:sp>
       <p:sp>
         <p:nvSpPr>
-          <p:cNvPr id="4" name="Rectangle 3"/>
+          <p:cNvPr id="5" name="Rectangle 4"/>
           <p:cNvSpPr/>
           <p:nvPr/>
         </p:nvSpPr>
@@ -20049,7 +21573,7 @@
       </p:sp>
       <p:sp>
         <p:nvSpPr>
-          <p:cNvPr id="5" name="Rectangle 4"/>
+          <p:cNvPr id="6" name="Rectangle 5"/>
           <p:cNvSpPr/>
           <p:nvPr/>
         </p:nvSpPr>
@@ -20098,7 +21622,7 @@
       </p:sp>
       <p:sp>
         <p:nvSpPr>
-          <p:cNvPr id="6" name="TextBox 5"/>
+          <p:cNvPr id="7" name="TextBox 6"/>
           <p:cNvSpPr txBox="1"/>
           <p:nvPr/>
         </p:nvSpPr>
@@ -20140,7 +21664,7 @@
       </p:sp>
       <p:sp>
         <p:nvSpPr>
-          <p:cNvPr id="7" name="TextBox 6"/>
+          <p:cNvPr id="8" name="TextBox 7"/>
           <p:cNvSpPr txBox="1"/>
           <p:nvPr/>
         </p:nvSpPr>
@@ -20391,7 +21915,7 @@
       </p:sp>
       <p:sp>
         <p:nvSpPr>
-          <p:cNvPr id="8" name="Rectangle 7"/>
+          <p:cNvPr id="9" name="Rectangle 8"/>
           <p:cNvSpPr/>
           <p:nvPr/>
         </p:nvSpPr>
@@ -20440,7 +21964,7 @@
       </p:sp>
       <p:sp>
         <p:nvSpPr>
-          <p:cNvPr id="9" name="TextBox 8"/>
+          <p:cNvPr id="10" name="TextBox 9"/>
           <p:cNvSpPr txBox="1"/>
           <p:nvPr/>
         </p:nvSpPr>
@@ -20482,7 +22006,7 @@
       </p:sp>
       <p:sp>
         <p:nvSpPr>
-          <p:cNvPr id="10" name="TextBox 9"/>
+          <p:cNvPr id="11" name="TextBox 10"/>
           <p:cNvSpPr txBox="1"/>
           <p:nvPr/>
         </p:nvSpPr>
@@ -20517,14 +22041,14 @@
               <a:rPr>
                 <a:latin typeface="Inter"/>
               </a:rPr>
-              <a:t>DRAFT — for committee review · Illustrative data · Data as of 2026-09-30</a:t>
-            </a:r>
-          </a:p>
-        </p:txBody>
-      </p:sp>
-      <p:sp>
-        <p:nvSpPr>
-          <p:cNvPr id="11" name="TextBox 10"/>
+              <a:t>Confidential — Investment Committee · Data as of 2026-09-30</a:t>
+            </a:r>
+          </a:p>
+        </p:txBody>
+      </p:sp>
+      <p:sp>
+        <p:nvSpPr>
+          <p:cNvPr id="12" name="TextBox 11"/>
           <p:cNvSpPr txBox="1"/>
           <p:nvPr/>
         </p:nvSpPr>
@@ -20639,6 +22163,48 @@
         </p:nvSpPr>
         <p:spPr>
           <a:xfrm>
+            <a:off x="5897880" y="310896"/>
+            <a:ext cx="4800600" cy="256032"/>
+          </a:xfrm>
+          <a:prstGeom prst="rect">
+            <a:avLst/>
+          </a:prstGeom>
+          <a:noFill/>
+        </p:spPr>
+        <p:txBody>
+          <a:bodyPr wrap="none" lIns="9144" rIns="9144" tIns="9144" bIns="9144" anchor="t">
+            <a:spAutoFit/>
+          </a:bodyPr>
+          <a:lstStyle/>
+          <a:p>
+            <a:pPr algn="r">
+              <a:spcAft>
+                <a:spcPts val="0"/>
+              </a:spcAft>
+              <a:defRPr sz="680" b="1">
+                <a:solidFill>
+                  <a:srgbClr val="4F6B00"/>
+                </a:solidFill>
+                <a:latin typeface="Inter"/>
+              </a:defRPr>
+            </a:pPr>
+            <a:r>
+              <a:rPr>
+                <a:latin typeface="Inter"/>
+              </a:rPr>
+              <a:t>Illustrative, Gradient Maintained — demo data, not the client's holdings or managers</a:t>
+            </a:r>
+          </a:p>
+        </p:txBody>
+      </p:sp>
+      <p:sp>
+        <p:nvSpPr>
+          <p:cNvPr id="4" name="TextBox 3"/>
+          <p:cNvSpPr txBox="1"/>
+          <p:nvPr/>
+        </p:nvSpPr>
+        <p:spPr>
+          <a:xfrm>
             <a:off x="640080" y="566928"/>
             <a:ext cx="10058400" cy="530352"/>
           </a:xfrm>
@@ -20675,7 +22241,7 @@
       </p:sp>
       <p:sp>
         <p:nvSpPr>
-          <p:cNvPr id="4" name="Rectangle 3"/>
+          <p:cNvPr id="5" name="Rectangle 4"/>
           <p:cNvSpPr/>
           <p:nvPr/>
         </p:nvSpPr>
@@ -20724,7 +22290,7 @@
       </p:sp>
       <p:sp>
         <p:nvSpPr>
-          <p:cNvPr id="5" name="Rectangle 4"/>
+          <p:cNvPr id="6" name="Rectangle 5"/>
           <p:cNvSpPr/>
           <p:nvPr/>
         </p:nvSpPr>
@@ -20773,7 +22339,7 @@
       </p:sp>
       <p:sp>
         <p:nvSpPr>
-          <p:cNvPr id="6" name="TextBox 5"/>
+          <p:cNvPr id="7" name="TextBox 6"/>
           <p:cNvSpPr txBox="1"/>
           <p:nvPr/>
         </p:nvSpPr>
@@ -20815,7 +22381,7 @@
       </p:sp>
       <p:sp>
         <p:nvSpPr>
-          <p:cNvPr id="7" name="TextBox 6"/>
+          <p:cNvPr id="8" name="TextBox 7"/>
           <p:cNvSpPr txBox="1"/>
           <p:nvPr/>
         </p:nvSpPr>
@@ -20850,14 +22416,14 @@
               <a:rPr>
                 <a:latin typeface="Inter"/>
               </a:rPr>
-              <a:t>LIQUIDITY TIER MIX (TEST)</a:t>
+              <a:t>LIQUIDITY TIER MIX</a:t>
             </a:r>
           </a:p>
         </p:txBody>
       </p:sp>
       <p:graphicFrame>
         <p:nvGraphicFramePr>
-          <p:cNvPr id="8" name="Chart 7"/>
+          <p:cNvPr id="9" name="Chart 8"/>
           <p:cNvGraphicFramePr>
             <a:graphicFrameLocks noGrp="1"/>
           </p:cNvGraphicFramePr>
@@ -20875,7 +22441,7 @@
       </p:graphicFrame>
       <p:sp>
         <p:nvSpPr>
-          <p:cNvPr id="9" name="Rectangle 8"/>
+          <p:cNvPr id="10" name="Rectangle 9"/>
           <p:cNvSpPr/>
           <p:nvPr/>
         </p:nvSpPr>
@@ -20924,7 +22490,7 @@
       </p:sp>
       <p:sp>
         <p:nvSpPr>
-          <p:cNvPr id="10" name="TextBox 9"/>
+          <p:cNvPr id="11" name="TextBox 10"/>
           <p:cNvSpPr txBox="1"/>
           <p:nvPr/>
         </p:nvSpPr>
@@ -20966,7 +22532,7 @@
       </p:sp>
       <p:sp>
         <p:nvSpPr>
-          <p:cNvPr id="11" name="TextBox 10"/>
+          <p:cNvPr id="12" name="TextBox 11"/>
           <p:cNvSpPr txBox="1"/>
           <p:nvPr/>
         </p:nvSpPr>
@@ -21001,14 +22567,14 @@
               <a:rPr>
                 <a:latin typeface="Inter"/>
               </a:rPr>
-              <a:t>DRAFT — for committee review · Illustrative data · Data as of 2026-09-30</a:t>
-            </a:r>
-          </a:p>
-        </p:txBody>
-      </p:sp>
-      <p:sp>
-        <p:nvSpPr>
-          <p:cNvPr id="12" name="TextBox 11"/>
+              <a:t>Confidential — Investment Committee · Data as of 2026-09-30</a:t>
+            </a:r>
+          </a:p>
+        </p:txBody>
+      </p:sp>
+      <p:sp>
+        <p:nvSpPr>
+          <p:cNvPr id="13" name="TextBox 12"/>
           <p:cNvSpPr txBox="1"/>
           <p:nvPr/>
         </p:nvSpPr>
@@ -21123,6 +22689,48 @@
         </p:nvSpPr>
         <p:spPr>
           <a:xfrm>
+            <a:off x="5897880" y="310896"/>
+            <a:ext cx="4800600" cy="256032"/>
+          </a:xfrm>
+          <a:prstGeom prst="rect">
+            <a:avLst/>
+          </a:prstGeom>
+          <a:noFill/>
+        </p:spPr>
+        <p:txBody>
+          <a:bodyPr wrap="none" lIns="9144" rIns="9144" tIns="9144" bIns="9144" anchor="t">
+            <a:spAutoFit/>
+          </a:bodyPr>
+          <a:lstStyle/>
+          <a:p>
+            <a:pPr algn="r">
+              <a:spcAft>
+                <a:spcPts val="0"/>
+              </a:spcAft>
+              <a:defRPr sz="680" b="1">
+                <a:solidFill>
+                  <a:srgbClr val="4F6B00"/>
+                </a:solidFill>
+                <a:latin typeface="Inter"/>
+              </a:defRPr>
+            </a:pPr>
+            <a:r>
+              <a:rPr>
+                <a:latin typeface="Inter"/>
+              </a:rPr>
+              <a:t>Illustrative, Gradient Maintained — demo data, not the client's holdings or managers</a:t>
+            </a:r>
+          </a:p>
+        </p:txBody>
+      </p:sp>
+      <p:sp>
+        <p:nvSpPr>
+          <p:cNvPr id="4" name="TextBox 3"/>
+          <p:cNvSpPr txBox="1"/>
+          <p:nvPr/>
+        </p:nvSpPr>
+        <p:spPr>
+          <a:xfrm>
             <a:off x="640080" y="566928"/>
             <a:ext cx="10058400" cy="530352"/>
           </a:xfrm>
@@ -21159,7 +22767,7 @@
       </p:sp>
       <p:sp>
         <p:nvSpPr>
-          <p:cNvPr id="4" name="Rectangle 3"/>
+          <p:cNvPr id="5" name="Rectangle 4"/>
           <p:cNvSpPr/>
           <p:nvPr/>
         </p:nvSpPr>
@@ -21208,7 +22816,7 @@
       </p:sp>
       <p:sp>
         <p:nvSpPr>
-          <p:cNvPr id="5" name="Rectangle 4"/>
+          <p:cNvPr id="6" name="Rectangle 5"/>
           <p:cNvSpPr/>
           <p:nvPr/>
         </p:nvSpPr>
@@ -21257,7 +22865,7 @@
       </p:sp>
       <p:sp>
         <p:nvSpPr>
-          <p:cNvPr id="6" name="TextBox 5"/>
+          <p:cNvPr id="7" name="TextBox 6"/>
           <p:cNvSpPr txBox="1"/>
           <p:nvPr/>
         </p:nvSpPr>
@@ -21299,7 +22907,7 @@
       </p:sp>
       <p:sp>
         <p:nvSpPr>
-          <p:cNvPr id="7" name="TextBox 6"/>
+          <p:cNvPr id="8" name="TextBox 7"/>
           <p:cNvSpPr txBox="1"/>
           <p:nvPr/>
         </p:nvSpPr>
@@ -21379,7 +22987,7 @@
       </p:sp>
       <p:sp>
         <p:nvSpPr>
-          <p:cNvPr id="8" name="Rectangle 7"/>
+          <p:cNvPr id="9" name="Rectangle 8"/>
           <p:cNvSpPr/>
           <p:nvPr/>
         </p:nvSpPr>
@@ -21428,7 +23036,7 @@
       </p:sp>
       <p:sp>
         <p:nvSpPr>
-          <p:cNvPr id="9" name="TextBox 8"/>
+          <p:cNvPr id="10" name="TextBox 9"/>
           <p:cNvSpPr txBox="1"/>
           <p:nvPr/>
         </p:nvSpPr>
@@ -21470,7 +23078,7 @@
       </p:sp>
       <p:sp>
         <p:nvSpPr>
-          <p:cNvPr id="10" name="TextBox 9"/>
+          <p:cNvPr id="11" name="TextBox 10"/>
           <p:cNvSpPr txBox="1"/>
           <p:nvPr/>
         </p:nvSpPr>
@@ -21505,14 +23113,14 @@
               <a:rPr>
                 <a:latin typeface="Inter"/>
               </a:rPr>
-              <a:t>DRAFT — for committee review · Illustrative data · Data as of 2026-09-30</a:t>
-            </a:r>
-          </a:p>
-        </p:txBody>
-      </p:sp>
-      <p:sp>
-        <p:nvSpPr>
-          <p:cNvPr id="11" name="TextBox 10"/>
+              <a:t>Confidential — Investment Committee · Data as of 2026-09-30</a:t>
+            </a:r>
+          </a:p>
+        </p:txBody>
+      </p:sp>
+      <p:sp>
+        <p:nvSpPr>
+          <p:cNvPr id="12" name="TextBox 11"/>
           <p:cNvSpPr txBox="1"/>
           <p:nvPr/>
         </p:nvSpPr>
@@ -21627,6 +23235,48 @@
         </p:nvSpPr>
         <p:spPr>
           <a:xfrm>
+            <a:off x="5897880" y="310896"/>
+            <a:ext cx="4800600" cy="256032"/>
+          </a:xfrm>
+          <a:prstGeom prst="rect">
+            <a:avLst/>
+          </a:prstGeom>
+          <a:noFill/>
+        </p:spPr>
+        <p:txBody>
+          <a:bodyPr wrap="none" lIns="9144" rIns="9144" tIns="9144" bIns="9144" anchor="t">
+            <a:spAutoFit/>
+          </a:bodyPr>
+          <a:lstStyle/>
+          <a:p>
+            <a:pPr algn="r">
+              <a:spcAft>
+                <a:spcPts val="0"/>
+              </a:spcAft>
+              <a:defRPr sz="680" b="1">
+                <a:solidFill>
+                  <a:srgbClr val="4F6B00"/>
+                </a:solidFill>
+                <a:latin typeface="Inter"/>
+              </a:defRPr>
+            </a:pPr>
+            <a:r>
+              <a:rPr>
+                <a:latin typeface="Inter"/>
+              </a:rPr>
+              <a:t>Illustrative, Gradient Maintained — demo data, not the client's holdings or managers</a:t>
+            </a:r>
+          </a:p>
+        </p:txBody>
+      </p:sp>
+      <p:sp>
+        <p:nvSpPr>
+          <p:cNvPr id="4" name="TextBox 3"/>
+          <p:cNvSpPr txBox="1"/>
+          <p:nvPr/>
+        </p:nvSpPr>
+        <p:spPr>
+          <a:xfrm>
             <a:off x="640080" y="566928"/>
             <a:ext cx="10058400" cy="530352"/>
           </a:xfrm>
@@ -21663,7 +23313,7 @@
       </p:sp>
       <p:sp>
         <p:nvSpPr>
-          <p:cNvPr id="4" name="Rectangle 3"/>
+          <p:cNvPr id="5" name="Rectangle 4"/>
           <p:cNvSpPr/>
           <p:nvPr/>
         </p:nvSpPr>
@@ -21712,7 +23362,7 @@
       </p:sp>
       <p:sp>
         <p:nvSpPr>
-          <p:cNvPr id="5" name="Rectangle 4"/>
+          <p:cNvPr id="6" name="Rectangle 5"/>
           <p:cNvSpPr/>
           <p:nvPr/>
         </p:nvSpPr>
@@ -21761,7 +23411,7 @@
       </p:sp>
       <p:sp>
         <p:nvSpPr>
-          <p:cNvPr id="6" name="TextBox 5"/>
+          <p:cNvPr id="7" name="TextBox 6"/>
           <p:cNvSpPr txBox="1"/>
           <p:nvPr/>
         </p:nvSpPr>
@@ -21803,7 +23453,7 @@
       </p:sp>
       <p:sp>
         <p:nvSpPr>
-          <p:cNvPr id="7" name="TextBox 6"/>
+          <p:cNvPr id="8" name="TextBox 7"/>
           <p:cNvSpPr txBox="1"/>
           <p:nvPr/>
         </p:nvSpPr>
@@ -21838,14 +23488,14 @@
               <a:rPr>
                 <a:latin typeface="Inter"/>
               </a:rPr>
-              <a:t>COMMITMENTS LIQUIDITY SCORECARD (TEST)</a:t>
+              <a:t>COMMITMENTS LIQUIDITY SCORECARD</a:t>
             </a:r>
           </a:p>
         </p:txBody>
       </p:sp>
       <p:graphicFrame>
         <p:nvGraphicFramePr>
-          <p:cNvPr id="8" name="Table 7"/>
+          <p:cNvPr id="9" name="Table 8"/>
           <p:cNvGraphicFramePr>
             <a:graphicFrameLocks noGrp="1"/>
           </p:cNvGraphicFramePr>
@@ -21983,7 +23633,7 @@
       </p:graphicFrame>
       <p:sp>
         <p:nvSpPr>
-          <p:cNvPr id="9" name="Rectangle 8"/>
+          <p:cNvPr id="10" name="Rectangle 9"/>
           <p:cNvSpPr/>
           <p:nvPr/>
         </p:nvSpPr>
@@ -22032,7 +23682,7 @@
       </p:sp>
       <p:sp>
         <p:nvSpPr>
-          <p:cNvPr id="10" name="TextBox 9"/>
+          <p:cNvPr id="11" name="TextBox 10"/>
           <p:cNvSpPr txBox="1"/>
           <p:nvPr/>
         </p:nvSpPr>
@@ -22074,7 +23724,7 @@
       </p:sp>
       <p:sp>
         <p:nvSpPr>
-          <p:cNvPr id="11" name="TextBox 10"/>
+          <p:cNvPr id="12" name="TextBox 11"/>
           <p:cNvSpPr txBox="1"/>
           <p:nvPr/>
         </p:nvSpPr>
@@ -22109,14 +23759,14 @@
               <a:rPr>
                 <a:latin typeface="Inter"/>
               </a:rPr>
-              <a:t>DRAFT — for committee review · Illustrative data · Data as of 2026-09-30</a:t>
-            </a:r>
-          </a:p>
-        </p:txBody>
-      </p:sp>
-      <p:sp>
-        <p:nvSpPr>
-          <p:cNvPr id="12" name="TextBox 11"/>
+              <a:t>Confidential — Investment Committee · Data as of 2026-09-30</a:t>
+            </a:r>
+          </a:p>
+        </p:txBody>
+      </p:sp>
+      <p:sp>
+        <p:nvSpPr>
+          <p:cNvPr id="13" name="TextBox 12"/>
           <p:cNvSpPr txBox="1"/>
           <p:nvPr/>
         </p:nvSpPr>
@@ -22231,6 +23881,48 @@
         </p:nvSpPr>
         <p:spPr>
           <a:xfrm>
+            <a:off x="5897880" y="310896"/>
+            <a:ext cx="4800600" cy="256032"/>
+          </a:xfrm>
+          <a:prstGeom prst="rect">
+            <a:avLst/>
+          </a:prstGeom>
+          <a:noFill/>
+        </p:spPr>
+        <p:txBody>
+          <a:bodyPr wrap="none" lIns="9144" rIns="9144" tIns="9144" bIns="9144" anchor="t">
+            <a:spAutoFit/>
+          </a:bodyPr>
+          <a:lstStyle/>
+          <a:p>
+            <a:pPr algn="r">
+              <a:spcAft>
+                <a:spcPts val="0"/>
+              </a:spcAft>
+              <a:defRPr sz="680" b="1">
+                <a:solidFill>
+                  <a:srgbClr val="4F6B00"/>
+                </a:solidFill>
+                <a:latin typeface="Inter"/>
+              </a:defRPr>
+            </a:pPr>
+            <a:r>
+              <a:rPr>
+                <a:latin typeface="Inter"/>
+              </a:rPr>
+              <a:t>Illustrative, Gradient Maintained — demo data, not the client's holdings or managers</a:t>
+            </a:r>
+          </a:p>
+        </p:txBody>
+      </p:sp>
+      <p:sp>
+        <p:nvSpPr>
+          <p:cNvPr id="4" name="TextBox 3"/>
+          <p:cNvSpPr txBox="1"/>
+          <p:nvPr/>
+        </p:nvSpPr>
+        <p:spPr>
+          <a:xfrm>
             <a:off x="640080" y="566928"/>
             <a:ext cx="10058400" cy="530352"/>
           </a:xfrm>
@@ -22267,7 +23959,7 @@
       </p:sp>
       <p:sp>
         <p:nvSpPr>
-          <p:cNvPr id="4" name="Rectangle 3"/>
+          <p:cNvPr id="5" name="Rectangle 4"/>
           <p:cNvSpPr/>
           <p:nvPr/>
         </p:nvSpPr>
@@ -22316,7 +24008,7 @@
       </p:sp>
       <p:sp>
         <p:nvSpPr>
-          <p:cNvPr id="5" name="Rectangle 4"/>
+          <p:cNvPr id="6" name="Rectangle 5"/>
           <p:cNvSpPr/>
           <p:nvPr/>
         </p:nvSpPr>
@@ -22365,7 +24057,7 @@
       </p:sp>
       <p:sp>
         <p:nvSpPr>
-          <p:cNvPr id="6" name="TextBox 5"/>
+          <p:cNvPr id="7" name="TextBox 6"/>
           <p:cNvSpPr txBox="1"/>
           <p:nvPr/>
         </p:nvSpPr>
@@ -22407,7 +24099,7 @@
       </p:sp>
       <p:sp>
         <p:nvSpPr>
-          <p:cNvPr id="7" name="TextBox 6"/>
+          <p:cNvPr id="8" name="TextBox 7"/>
           <p:cNvSpPr txBox="1"/>
           <p:nvPr/>
         </p:nvSpPr>
@@ -22442,14 +24134,14 @@
               <a:rPr>
                 <a:latin typeface="Inter"/>
               </a:rPr>
-              <a:t>COMMITMENT PACING (TEST)</a:t>
+              <a:t>COMMITMENT PACING</a:t>
             </a:r>
           </a:p>
         </p:txBody>
       </p:sp>
       <p:graphicFrame>
         <p:nvGraphicFramePr>
-          <p:cNvPr id="8" name="Table 7"/>
+          <p:cNvPr id="9" name="Table 8"/>
           <p:cNvGraphicFramePr>
             <a:graphicFrameLocks noGrp="1"/>
           </p:cNvGraphicFramePr>
@@ -22587,7 +24279,7 @@
       </p:graphicFrame>
       <p:sp>
         <p:nvSpPr>
-          <p:cNvPr id="9" name="Rectangle 8"/>
+          <p:cNvPr id="10" name="Rectangle 9"/>
           <p:cNvSpPr/>
           <p:nvPr/>
         </p:nvSpPr>
@@ -22636,7 +24328,7 @@
       </p:sp>
       <p:sp>
         <p:nvSpPr>
-          <p:cNvPr id="10" name="TextBox 9"/>
+          <p:cNvPr id="11" name="TextBox 10"/>
           <p:cNvSpPr txBox="1"/>
           <p:nvPr/>
         </p:nvSpPr>
@@ -22678,7 +24370,7 @@
       </p:sp>
       <p:sp>
         <p:nvSpPr>
-          <p:cNvPr id="11" name="TextBox 10"/>
+          <p:cNvPr id="12" name="TextBox 11"/>
           <p:cNvSpPr txBox="1"/>
           <p:nvPr/>
         </p:nvSpPr>
@@ -22713,14 +24405,14 @@
               <a:rPr>
                 <a:latin typeface="Inter"/>
               </a:rPr>
-              <a:t>DRAFT — for committee review · Illustrative data · Data as of 2026-09-30</a:t>
-            </a:r>
-          </a:p>
-        </p:txBody>
-      </p:sp>
-      <p:sp>
-        <p:nvSpPr>
-          <p:cNvPr id="12" name="TextBox 11"/>
+              <a:t>Confidential — Investment Committee · Data as of 2026-09-30</a:t>
+            </a:r>
+          </a:p>
+        </p:txBody>
+      </p:sp>
+      <p:sp>
+        <p:nvSpPr>
+          <p:cNvPr id="13" name="TextBox 12"/>
           <p:cNvSpPr txBox="1"/>
           <p:nvPr/>
         </p:nvSpPr>
@@ -22835,6 +24527,48 @@
         </p:nvSpPr>
         <p:spPr>
           <a:xfrm>
+            <a:off x="5897880" y="310896"/>
+            <a:ext cx="4800600" cy="256032"/>
+          </a:xfrm>
+          <a:prstGeom prst="rect">
+            <a:avLst/>
+          </a:prstGeom>
+          <a:noFill/>
+        </p:spPr>
+        <p:txBody>
+          <a:bodyPr wrap="none" lIns="9144" rIns="9144" tIns="9144" bIns="9144" anchor="t">
+            <a:spAutoFit/>
+          </a:bodyPr>
+          <a:lstStyle/>
+          <a:p>
+            <a:pPr algn="r">
+              <a:spcAft>
+                <a:spcPts val="0"/>
+              </a:spcAft>
+              <a:defRPr sz="680" b="1">
+                <a:solidFill>
+                  <a:srgbClr val="4F6B00"/>
+                </a:solidFill>
+                <a:latin typeface="Inter"/>
+              </a:defRPr>
+            </a:pPr>
+            <a:r>
+              <a:rPr>
+                <a:latin typeface="Inter"/>
+              </a:rPr>
+              <a:t>Illustrative, Gradient Maintained — demo data, not the client's holdings or managers</a:t>
+            </a:r>
+          </a:p>
+        </p:txBody>
+      </p:sp>
+      <p:sp>
+        <p:nvSpPr>
+          <p:cNvPr id="4" name="TextBox 3"/>
+          <p:cNvSpPr txBox="1"/>
+          <p:nvPr/>
+        </p:nvSpPr>
+        <p:spPr>
+          <a:xfrm>
             <a:off x="640080" y="566928"/>
             <a:ext cx="10058400" cy="530352"/>
           </a:xfrm>
@@ -22871,7 +24605,7 @@
       </p:sp>
       <p:sp>
         <p:nvSpPr>
-          <p:cNvPr id="4" name="Rectangle 3"/>
+          <p:cNvPr id="5" name="Rectangle 4"/>
           <p:cNvSpPr/>
           <p:nvPr/>
         </p:nvSpPr>
@@ -22920,7 +24654,7 @@
       </p:sp>
       <p:sp>
         <p:nvSpPr>
-          <p:cNvPr id="5" name="Rectangle 4"/>
+          <p:cNvPr id="6" name="Rectangle 5"/>
           <p:cNvSpPr/>
           <p:nvPr/>
         </p:nvSpPr>
@@ -22969,7 +24703,7 @@
       </p:sp>
       <p:sp>
         <p:nvSpPr>
-          <p:cNvPr id="6" name="TextBox 5"/>
+          <p:cNvPr id="7" name="TextBox 6"/>
           <p:cNvSpPr txBox="1"/>
           <p:nvPr/>
         </p:nvSpPr>
@@ -23011,7 +24745,7 @@
       </p:sp>
       <p:sp>
         <p:nvSpPr>
-          <p:cNvPr id="7" name="Rectangle 6"/>
+          <p:cNvPr id="8" name="Rectangle 7"/>
           <p:cNvSpPr/>
           <p:nvPr/>
         </p:nvSpPr>
@@ -23060,7 +24794,7 @@
       </p:sp>
       <p:sp>
         <p:nvSpPr>
-          <p:cNvPr id="8" name="Rectangle 7"/>
+          <p:cNvPr id="9" name="Rectangle 8"/>
           <p:cNvSpPr/>
           <p:nvPr/>
         </p:nvSpPr>
@@ -23109,7 +24843,7 @@
       </p:sp>
       <p:sp>
         <p:nvSpPr>
-          <p:cNvPr id="9" name="TextBox 8"/>
+          <p:cNvPr id="10" name="TextBox 9"/>
           <p:cNvSpPr txBox="1"/>
           <p:nvPr/>
         </p:nvSpPr>
@@ -23151,7 +24885,7 @@
       </p:sp>
       <p:sp>
         <p:nvSpPr>
-          <p:cNvPr id="10" name="TextBox 9"/>
+          <p:cNvPr id="11" name="TextBox 10"/>
           <p:cNvSpPr txBox="1"/>
           <p:nvPr/>
         </p:nvSpPr>
@@ -23193,7 +24927,7 @@
       </p:sp>
       <p:sp>
         <p:nvSpPr>
-          <p:cNvPr id="11" name="Rectangle 10"/>
+          <p:cNvPr id="12" name="Rectangle 11"/>
           <p:cNvSpPr/>
           <p:nvPr/>
         </p:nvSpPr>
@@ -23242,7 +24976,7 @@
       </p:sp>
       <p:sp>
         <p:nvSpPr>
-          <p:cNvPr id="12" name="TextBox 11"/>
+          <p:cNvPr id="13" name="TextBox 12"/>
           <p:cNvSpPr txBox="1"/>
           <p:nvPr/>
         </p:nvSpPr>
@@ -23284,7 +25018,7 @@
       </p:sp>
       <p:sp>
         <p:nvSpPr>
-          <p:cNvPr id="13" name="TextBox 12"/>
+          <p:cNvPr id="14" name="TextBox 13"/>
           <p:cNvSpPr txBox="1"/>
           <p:nvPr/>
         </p:nvSpPr>
@@ -23319,14 +25053,14 @@
               <a:rPr>
                 <a:latin typeface="Inter"/>
               </a:rPr>
-              <a:t>DRAFT — for committee review · Illustrative data · Data as of 2026-09-30</a:t>
-            </a:r>
-          </a:p>
-        </p:txBody>
-      </p:sp>
-      <p:sp>
-        <p:nvSpPr>
-          <p:cNvPr id="14" name="TextBox 13"/>
+              <a:t>Confidential — Investment Committee · Data as of 2026-09-30</a:t>
+            </a:r>
+          </a:p>
+        </p:txBody>
+      </p:sp>
+      <p:sp>
+        <p:nvSpPr>
+          <p:cNvPr id="15" name="TextBox 14"/>
           <p:cNvSpPr txBox="1"/>
           <p:nvPr/>
         </p:nvSpPr>
@@ -23441,6 +25175,48 @@
         </p:nvSpPr>
         <p:spPr>
           <a:xfrm>
+            <a:off x="5897880" y="310896"/>
+            <a:ext cx="4800600" cy="256032"/>
+          </a:xfrm>
+          <a:prstGeom prst="rect">
+            <a:avLst/>
+          </a:prstGeom>
+          <a:noFill/>
+        </p:spPr>
+        <p:txBody>
+          <a:bodyPr wrap="none" lIns="9144" rIns="9144" tIns="9144" bIns="9144" anchor="t">
+            <a:spAutoFit/>
+          </a:bodyPr>
+          <a:lstStyle/>
+          <a:p>
+            <a:pPr algn="r">
+              <a:spcAft>
+                <a:spcPts val="0"/>
+              </a:spcAft>
+              <a:defRPr sz="680" b="1">
+                <a:solidFill>
+                  <a:srgbClr val="4F6B00"/>
+                </a:solidFill>
+                <a:latin typeface="Inter"/>
+              </a:defRPr>
+            </a:pPr>
+            <a:r>
+              <a:rPr>
+                <a:latin typeface="Inter"/>
+              </a:rPr>
+              <a:t>Illustrative, Gradient Maintained — demo data, not the client's holdings or managers</a:t>
+            </a:r>
+          </a:p>
+        </p:txBody>
+      </p:sp>
+      <p:sp>
+        <p:nvSpPr>
+          <p:cNvPr id="4" name="TextBox 3"/>
+          <p:cNvSpPr txBox="1"/>
+          <p:nvPr/>
+        </p:nvSpPr>
+        <p:spPr>
+          <a:xfrm>
             <a:off x="640080" y="566928"/>
             <a:ext cx="10058400" cy="530352"/>
           </a:xfrm>
@@ -23477,7 +25253,7 @@
       </p:sp>
       <p:sp>
         <p:nvSpPr>
-          <p:cNvPr id="4" name="Rectangle 3"/>
+          <p:cNvPr id="5" name="Rectangle 4"/>
           <p:cNvSpPr/>
           <p:nvPr/>
         </p:nvSpPr>
@@ -23526,7 +25302,7 @@
       </p:sp>
       <p:sp>
         <p:nvSpPr>
-          <p:cNvPr id="5" name="Rectangle 4"/>
+          <p:cNvPr id="6" name="Rectangle 5"/>
           <p:cNvSpPr/>
           <p:nvPr/>
         </p:nvSpPr>
@@ -23575,7 +25351,7 @@
       </p:sp>
       <p:sp>
         <p:nvSpPr>
-          <p:cNvPr id="6" name="TextBox 5"/>
+          <p:cNvPr id="7" name="TextBox 6"/>
           <p:cNvSpPr txBox="1"/>
           <p:nvPr/>
         </p:nvSpPr>
@@ -23617,7 +25393,7 @@
       </p:sp>
       <p:sp>
         <p:nvSpPr>
-          <p:cNvPr id="7" name="TextBox 6"/>
+          <p:cNvPr id="8" name="TextBox 7"/>
           <p:cNvSpPr txBox="1"/>
           <p:nvPr/>
         </p:nvSpPr>
@@ -23652,14 +25428,14 @@
               <a:rPr>
                 <a:latin typeface="Inter"/>
               </a:rPr>
-              <a:t>COMMITMENT CASH FLOW (TEST)</a:t>
+              <a:t>COMMITMENT CASH FLOW</a:t>
             </a:r>
           </a:p>
         </p:txBody>
       </p:sp>
       <p:graphicFrame>
         <p:nvGraphicFramePr>
-          <p:cNvPr id="8" name="Table 7"/>
+          <p:cNvPr id="9" name="Table 8"/>
           <p:cNvGraphicFramePr>
             <a:graphicFrameLocks noGrp="1"/>
           </p:cNvGraphicFramePr>
@@ -23797,7 +25573,7 @@
       </p:graphicFrame>
       <p:sp>
         <p:nvSpPr>
-          <p:cNvPr id="9" name="Rectangle 8"/>
+          <p:cNvPr id="10" name="Rectangle 9"/>
           <p:cNvSpPr/>
           <p:nvPr/>
         </p:nvSpPr>
@@ -23846,7 +25622,7 @@
       </p:sp>
       <p:sp>
         <p:nvSpPr>
-          <p:cNvPr id="10" name="TextBox 9"/>
+          <p:cNvPr id="11" name="TextBox 10"/>
           <p:cNvSpPr txBox="1"/>
           <p:nvPr/>
         </p:nvSpPr>
@@ -23888,7 +25664,7 @@
       </p:sp>
       <p:sp>
         <p:nvSpPr>
-          <p:cNvPr id="11" name="TextBox 10"/>
+          <p:cNvPr id="12" name="TextBox 11"/>
           <p:cNvSpPr txBox="1"/>
           <p:nvPr/>
         </p:nvSpPr>
@@ -23923,14 +25699,14 @@
               <a:rPr>
                 <a:latin typeface="Inter"/>
               </a:rPr>
-              <a:t>DRAFT — for committee review · Illustrative data · Data as of 2026-09-30</a:t>
-            </a:r>
-          </a:p>
-        </p:txBody>
-      </p:sp>
-      <p:sp>
-        <p:nvSpPr>
-          <p:cNvPr id="12" name="TextBox 11"/>
+              <a:t>Confidential — Investment Committee · Data as of 2026-09-30</a:t>
+            </a:r>
+          </a:p>
+        </p:txBody>
+      </p:sp>
+      <p:sp>
+        <p:nvSpPr>
+          <p:cNvPr id="13" name="TextBox 12"/>
           <p:cNvSpPr txBox="1"/>
           <p:nvPr/>
         </p:nvSpPr>
@@ -24045,6 +25821,48 @@
         </p:nvSpPr>
         <p:spPr>
           <a:xfrm>
+            <a:off x="5897880" y="310896"/>
+            <a:ext cx="4800600" cy="256032"/>
+          </a:xfrm>
+          <a:prstGeom prst="rect">
+            <a:avLst/>
+          </a:prstGeom>
+          <a:noFill/>
+        </p:spPr>
+        <p:txBody>
+          <a:bodyPr wrap="none" lIns="9144" rIns="9144" tIns="9144" bIns="9144" anchor="t">
+            <a:spAutoFit/>
+          </a:bodyPr>
+          <a:lstStyle/>
+          <a:p>
+            <a:pPr algn="r">
+              <a:spcAft>
+                <a:spcPts val="0"/>
+              </a:spcAft>
+              <a:defRPr sz="680" b="1">
+                <a:solidFill>
+                  <a:srgbClr val="4F6B00"/>
+                </a:solidFill>
+                <a:latin typeface="Inter"/>
+              </a:defRPr>
+            </a:pPr>
+            <a:r>
+              <a:rPr>
+                <a:latin typeface="Inter"/>
+              </a:rPr>
+              <a:t>Illustrative, Gradient Maintained — demo data, not the client's holdings or managers</a:t>
+            </a:r>
+          </a:p>
+        </p:txBody>
+      </p:sp>
+      <p:sp>
+        <p:nvSpPr>
+          <p:cNvPr id="4" name="TextBox 3"/>
+          <p:cNvSpPr txBox="1"/>
+          <p:nvPr/>
+        </p:nvSpPr>
+        <p:spPr>
+          <a:xfrm>
             <a:off x="640080" y="566928"/>
             <a:ext cx="10058400" cy="530352"/>
           </a:xfrm>
@@ -24081,7 +25899,7 @@
       </p:sp>
       <p:sp>
         <p:nvSpPr>
-          <p:cNvPr id="4" name="Rectangle 3"/>
+          <p:cNvPr id="5" name="Rectangle 4"/>
           <p:cNvSpPr/>
           <p:nvPr/>
         </p:nvSpPr>
@@ -24130,7 +25948,7 @@
       </p:sp>
       <p:sp>
         <p:nvSpPr>
-          <p:cNvPr id="5" name="Rectangle 4"/>
+          <p:cNvPr id="6" name="Rectangle 5"/>
           <p:cNvSpPr/>
           <p:nvPr/>
         </p:nvSpPr>
@@ -24179,7 +25997,7 @@
       </p:sp>
       <p:sp>
         <p:nvSpPr>
-          <p:cNvPr id="6" name="TextBox 5"/>
+          <p:cNvPr id="7" name="TextBox 6"/>
           <p:cNvSpPr txBox="1"/>
           <p:nvPr/>
         </p:nvSpPr>
@@ -24221,7 +26039,7 @@
       </p:sp>
       <p:sp>
         <p:nvSpPr>
-          <p:cNvPr id="7" name="Rectangle 6"/>
+          <p:cNvPr id="8" name="Rectangle 7"/>
           <p:cNvSpPr/>
           <p:nvPr/>
         </p:nvSpPr>
@@ -24270,7 +26088,7 @@
       </p:sp>
       <p:sp>
         <p:nvSpPr>
-          <p:cNvPr id="8" name="Rectangle 7"/>
+          <p:cNvPr id="9" name="Rectangle 8"/>
           <p:cNvSpPr/>
           <p:nvPr/>
         </p:nvSpPr>
@@ -24319,7 +26137,7 @@
       </p:sp>
       <p:sp>
         <p:nvSpPr>
-          <p:cNvPr id="9" name="TextBox 8"/>
+          <p:cNvPr id="10" name="TextBox 9"/>
           <p:cNvSpPr txBox="1"/>
           <p:nvPr/>
         </p:nvSpPr>
@@ -24361,7 +26179,7 @@
       </p:sp>
       <p:sp>
         <p:nvSpPr>
-          <p:cNvPr id="10" name="TextBox 9"/>
+          <p:cNvPr id="11" name="TextBox 10"/>
           <p:cNvSpPr txBox="1"/>
           <p:nvPr/>
         </p:nvSpPr>
@@ -24403,7 +26221,7 @@
       </p:sp>
       <p:sp>
         <p:nvSpPr>
-          <p:cNvPr id="11" name="Rectangle 10"/>
+          <p:cNvPr id="12" name="Rectangle 11"/>
           <p:cNvSpPr/>
           <p:nvPr/>
         </p:nvSpPr>
@@ -24452,7 +26270,7 @@
       </p:sp>
       <p:sp>
         <p:nvSpPr>
-          <p:cNvPr id="12" name="TextBox 11"/>
+          <p:cNvPr id="13" name="TextBox 12"/>
           <p:cNvSpPr txBox="1"/>
           <p:nvPr/>
         </p:nvSpPr>
@@ -24494,7 +26312,7 @@
       </p:sp>
       <p:sp>
         <p:nvSpPr>
-          <p:cNvPr id="13" name="TextBox 12"/>
+          <p:cNvPr id="14" name="TextBox 13"/>
           <p:cNvSpPr txBox="1"/>
           <p:nvPr/>
         </p:nvSpPr>
@@ -24529,14 +26347,14 @@
               <a:rPr>
                 <a:latin typeface="Inter"/>
               </a:rPr>
-              <a:t>DRAFT — for committee review · Illustrative data · Data as of 2026-09-30</a:t>
-            </a:r>
-          </a:p>
-        </p:txBody>
-      </p:sp>
-      <p:sp>
-        <p:nvSpPr>
-          <p:cNvPr id="14" name="TextBox 13"/>
+              <a:t>Confidential — Investment Committee · Data as of 2026-09-30</a:t>
+            </a:r>
+          </a:p>
+        </p:txBody>
+      </p:sp>
+      <p:sp>
+        <p:nvSpPr>
+          <p:cNvPr id="15" name="TextBox 14"/>
           <p:cNvSpPr txBox="1"/>
           <p:nvPr/>
         </p:nvSpPr>
@@ -24651,6 +26469,48 @@
         </p:nvSpPr>
         <p:spPr>
           <a:xfrm>
+            <a:off x="5897880" y="310896"/>
+            <a:ext cx="4800600" cy="256032"/>
+          </a:xfrm>
+          <a:prstGeom prst="rect">
+            <a:avLst/>
+          </a:prstGeom>
+          <a:noFill/>
+        </p:spPr>
+        <p:txBody>
+          <a:bodyPr wrap="none" lIns="9144" rIns="9144" tIns="9144" bIns="9144" anchor="t">
+            <a:spAutoFit/>
+          </a:bodyPr>
+          <a:lstStyle/>
+          <a:p>
+            <a:pPr algn="r">
+              <a:spcAft>
+                <a:spcPts val="0"/>
+              </a:spcAft>
+              <a:defRPr sz="680" b="1">
+                <a:solidFill>
+                  <a:srgbClr val="4F6B00"/>
+                </a:solidFill>
+                <a:latin typeface="Inter"/>
+              </a:defRPr>
+            </a:pPr>
+            <a:r>
+              <a:rPr>
+                <a:latin typeface="Inter"/>
+              </a:rPr>
+              <a:t>Illustrative, Gradient Maintained — demo data, not the client's holdings or managers</a:t>
+            </a:r>
+          </a:p>
+        </p:txBody>
+      </p:sp>
+      <p:sp>
+        <p:nvSpPr>
+          <p:cNvPr id="4" name="TextBox 3"/>
+          <p:cNvSpPr txBox="1"/>
+          <p:nvPr/>
+        </p:nvSpPr>
+        <p:spPr>
+          <a:xfrm>
             <a:off x="640080" y="566928"/>
             <a:ext cx="10058400" cy="530352"/>
           </a:xfrm>
@@ -24687,7 +26547,7 @@
       </p:sp>
       <p:sp>
         <p:nvSpPr>
-          <p:cNvPr id="4" name="Rectangle 3"/>
+          <p:cNvPr id="5" name="Rectangle 4"/>
           <p:cNvSpPr/>
           <p:nvPr/>
         </p:nvSpPr>
@@ -24736,7 +26596,7 @@
       </p:sp>
       <p:sp>
         <p:nvSpPr>
-          <p:cNvPr id="5" name="Rectangle 4"/>
+          <p:cNvPr id="6" name="Rectangle 5"/>
           <p:cNvSpPr/>
           <p:nvPr/>
         </p:nvSpPr>
@@ -24785,7 +26645,7 @@
       </p:sp>
       <p:sp>
         <p:nvSpPr>
-          <p:cNvPr id="6" name="TextBox 5"/>
+          <p:cNvPr id="7" name="TextBox 6"/>
           <p:cNvSpPr txBox="1"/>
           <p:nvPr/>
         </p:nvSpPr>
@@ -24827,7 +26687,7 @@
       </p:sp>
       <p:sp>
         <p:nvSpPr>
-          <p:cNvPr id="7" name="TextBox 6"/>
+          <p:cNvPr id="8" name="TextBox 7"/>
           <p:cNvSpPr txBox="1"/>
           <p:nvPr/>
         </p:nvSpPr>
@@ -24869,7 +26729,7 @@
       </p:sp>
       <p:graphicFrame>
         <p:nvGraphicFramePr>
-          <p:cNvPr id="8" name="Table 7"/>
+          <p:cNvPr id="9" name="Table 8"/>
           <p:cNvGraphicFramePr>
             <a:graphicFrameLocks noGrp="1"/>
           </p:cNvGraphicFramePr>
@@ -25062,7 +26922,7 @@
       </p:graphicFrame>
       <p:sp>
         <p:nvSpPr>
-          <p:cNvPr id="9" name="TextBox 8"/>
+          <p:cNvPr id="10" name="TextBox 9"/>
           <p:cNvSpPr txBox="1"/>
           <p:nvPr/>
         </p:nvSpPr>
@@ -25123,7 +26983,7 @@
       </p:sp>
       <p:sp>
         <p:nvSpPr>
-          <p:cNvPr id="10" name="Rectangle 9"/>
+          <p:cNvPr id="11" name="Rectangle 10"/>
           <p:cNvSpPr/>
           <p:nvPr/>
         </p:nvSpPr>
@@ -25172,7 +27032,7 @@
       </p:sp>
       <p:sp>
         <p:nvSpPr>
-          <p:cNvPr id="11" name="Rectangle 10"/>
+          <p:cNvPr id="12" name="Rectangle 11"/>
           <p:cNvSpPr/>
           <p:nvPr/>
         </p:nvSpPr>
@@ -25221,7 +27081,7 @@
       </p:sp>
       <p:sp>
         <p:nvSpPr>
-          <p:cNvPr id="12" name="TextBox 11"/>
+          <p:cNvPr id="13" name="TextBox 12"/>
           <p:cNvSpPr txBox="1"/>
           <p:nvPr/>
         </p:nvSpPr>
@@ -25263,7 +27123,7 @@
       </p:sp>
       <p:sp>
         <p:nvSpPr>
-          <p:cNvPr id="13" name="TextBox 12"/>
+          <p:cNvPr id="14" name="TextBox 13"/>
           <p:cNvSpPr txBox="1"/>
           <p:nvPr/>
         </p:nvSpPr>
@@ -25305,7 +27165,7 @@
       </p:sp>
       <p:sp>
         <p:nvSpPr>
-          <p:cNvPr id="14" name="Rectangle 13"/>
+          <p:cNvPr id="15" name="Rectangle 14"/>
           <p:cNvSpPr/>
           <p:nvPr/>
         </p:nvSpPr>
@@ -25354,7 +27214,7 @@
       </p:sp>
       <p:sp>
         <p:nvSpPr>
-          <p:cNvPr id="15" name="TextBox 14"/>
+          <p:cNvPr id="16" name="TextBox 15"/>
           <p:cNvSpPr txBox="1"/>
           <p:nvPr/>
         </p:nvSpPr>
@@ -25396,7 +27256,7 @@
       </p:sp>
       <p:sp>
         <p:nvSpPr>
-          <p:cNvPr id="16" name="TextBox 15"/>
+          <p:cNvPr id="17" name="TextBox 16"/>
           <p:cNvSpPr txBox="1"/>
           <p:nvPr/>
         </p:nvSpPr>
@@ -25431,14 +27291,14 @@
               <a:rPr>
                 <a:latin typeface="Inter"/>
               </a:rPr>
-              <a:t>DRAFT — for committee review · Illustrative data · Data as of 2026-09-30</a:t>
-            </a:r>
-          </a:p>
-        </p:txBody>
-      </p:sp>
-      <p:sp>
-        <p:nvSpPr>
-          <p:cNvPr id="17" name="TextBox 16"/>
+              <a:t>Confidential — Investment Committee · Data as of 2026-09-30</a:t>
+            </a:r>
+          </a:p>
+        </p:txBody>
+      </p:sp>
+      <p:sp>
+        <p:nvSpPr>
+          <p:cNvPr id="18" name="TextBox 17"/>
           <p:cNvSpPr txBox="1"/>
           <p:nvPr/>
         </p:nvSpPr>
@@ -25553,6 +27413,48 @@
         </p:nvSpPr>
         <p:spPr>
           <a:xfrm>
+            <a:off x="5897880" y="310896"/>
+            <a:ext cx="4800600" cy="256032"/>
+          </a:xfrm>
+          <a:prstGeom prst="rect">
+            <a:avLst/>
+          </a:prstGeom>
+          <a:noFill/>
+        </p:spPr>
+        <p:txBody>
+          <a:bodyPr wrap="none" lIns="9144" rIns="9144" tIns="9144" bIns="9144" anchor="t">
+            <a:spAutoFit/>
+          </a:bodyPr>
+          <a:lstStyle/>
+          <a:p>
+            <a:pPr algn="r">
+              <a:spcAft>
+                <a:spcPts val="0"/>
+              </a:spcAft>
+              <a:defRPr sz="680" b="1">
+                <a:solidFill>
+                  <a:srgbClr val="4F6B00"/>
+                </a:solidFill>
+                <a:latin typeface="Inter"/>
+              </a:defRPr>
+            </a:pPr>
+            <a:r>
+              <a:rPr>
+                <a:latin typeface="Inter"/>
+              </a:rPr>
+              <a:t>Illustrative, Gradient Maintained — demo data, not the client's holdings or managers</a:t>
+            </a:r>
+          </a:p>
+        </p:txBody>
+      </p:sp>
+      <p:sp>
+        <p:nvSpPr>
+          <p:cNvPr id="4" name="TextBox 3"/>
+          <p:cNvSpPr txBox="1"/>
+          <p:nvPr/>
+        </p:nvSpPr>
+        <p:spPr>
+          <a:xfrm>
             <a:off x="640080" y="566928"/>
             <a:ext cx="10058400" cy="530352"/>
           </a:xfrm>
@@ -25589,7 +27491,7 @@
       </p:sp>
       <p:sp>
         <p:nvSpPr>
-          <p:cNvPr id="4" name="Rectangle 3"/>
+          <p:cNvPr id="5" name="Rectangle 4"/>
           <p:cNvSpPr/>
           <p:nvPr/>
         </p:nvSpPr>
@@ -25638,7 +27540,7 @@
       </p:sp>
       <p:sp>
         <p:nvSpPr>
-          <p:cNvPr id="5" name="Rectangle 4"/>
+          <p:cNvPr id="6" name="Rectangle 5"/>
           <p:cNvSpPr/>
           <p:nvPr/>
         </p:nvSpPr>
@@ -25687,7 +27589,7 @@
       </p:sp>
       <p:sp>
         <p:nvSpPr>
-          <p:cNvPr id="6" name="TextBox 5"/>
+          <p:cNvPr id="7" name="TextBox 6"/>
           <p:cNvSpPr txBox="1"/>
           <p:nvPr/>
         </p:nvSpPr>
@@ -25729,7 +27631,7 @@
       </p:sp>
       <p:sp>
         <p:nvSpPr>
-          <p:cNvPr id="7" name="TextBox 6"/>
+          <p:cNvPr id="8" name="TextBox 7"/>
           <p:cNvSpPr txBox="1"/>
           <p:nvPr/>
         </p:nvSpPr>
@@ -25771,7 +27673,7 @@
       </p:sp>
       <p:graphicFrame>
         <p:nvGraphicFramePr>
-          <p:cNvPr id="8" name="Table 7"/>
+          <p:cNvPr id="9" name="Table 8"/>
           <p:cNvGraphicFramePr>
             <a:graphicFrameLocks noGrp="1"/>
           </p:cNvGraphicFramePr>
@@ -26047,7 +27949,7 @@
       </p:graphicFrame>
       <p:sp>
         <p:nvSpPr>
-          <p:cNvPr id="9" name="Rectangle 8"/>
+          <p:cNvPr id="10" name="Rectangle 9"/>
           <p:cNvSpPr/>
           <p:nvPr/>
         </p:nvSpPr>
@@ -26096,7 +27998,7 @@
       </p:sp>
       <p:sp>
         <p:nvSpPr>
-          <p:cNvPr id="10" name="Rectangle 9"/>
+          <p:cNvPr id="11" name="Rectangle 10"/>
           <p:cNvSpPr/>
           <p:nvPr/>
         </p:nvSpPr>
@@ -26145,7 +28047,7 @@
       </p:sp>
       <p:sp>
         <p:nvSpPr>
-          <p:cNvPr id="11" name="TextBox 10"/>
+          <p:cNvPr id="12" name="TextBox 11"/>
           <p:cNvSpPr txBox="1"/>
           <p:nvPr/>
         </p:nvSpPr>
@@ -26187,7 +28089,7 @@
       </p:sp>
       <p:sp>
         <p:nvSpPr>
-          <p:cNvPr id="12" name="TextBox 11"/>
+          <p:cNvPr id="13" name="TextBox 12"/>
           <p:cNvSpPr txBox="1"/>
           <p:nvPr/>
         </p:nvSpPr>
@@ -26229,7 +28131,7 @@
       </p:sp>
       <p:sp>
         <p:nvSpPr>
-          <p:cNvPr id="13" name="TextBox 12"/>
+          <p:cNvPr id="14" name="TextBox 13"/>
           <p:cNvSpPr txBox="1"/>
           <p:nvPr/>
         </p:nvSpPr>
@@ -26271,7 +28173,7 @@
       </p:sp>
       <p:sp>
         <p:nvSpPr>
-          <p:cNvPr id="14" name="Rectangle 13"/>
+          <p:cNvPr id="15" name="Rectangle 14"/>
           <p:cNvSpPr/>
           <p:nvPr/>
         </p:nvSpPr>
@@ -26320,7 +28222,7 @@
       </p:sp>
       <p:sp>
         <p:nvSpPr>
-          <p:cNvPr id="15" name="TextBox 14"/>
+          <p:cNvPr id="16" name="TextBox 15"/>
           <p:cNvSpPr txBox="1"/>
           <p:nvPr/>
         </p:nvSpPr>
@@ -26362,7 +28264,7 @@
       </p:sp>
       <p:sp>
         <p:nvSpPr>
-          <p:cNvPr id="16" name="TextBox 15"/>
+          <p:cNvPr id="17" name="TextBox 16"/>
           <p:cNvSpPr txBox="1"/>
           <p:nvPr/>
         </p:nvSpPr>
@@ -26397,14 +28299,14 @@
               <a:rPr>
                 <a:latin typeface="Inter"/>
               </a:rPr>
-              <a:t>DRAFT — for committee review · Illustrative data · Data as of 2026-09-30</a:t>
-            </a:r>
-          </a:p>
-        </p:txBody>
-      </p:sp>
-      <p:sp>
-        <p:nvSpPr>
-          <p:cNvPr id="17" name="TextBox 16"/>
+              <a:t>Confidential — Investment Committee · Data as of 2026-09-30</a:t>
+            </a:r>
+          </a:p>
+        </p:txBody>
+      </p:sp>
+      <p:sp>
+        <p:nvSpPr>
+          <p:cNvPr id="18" name="TextBox 17"/>
           <p:cNvSpPr txBox="1"/>
           <p:nvPr/>
         </p:nvSpPr>
@@ -26519,6 +28421,48 @@
         </p:nvSpPr>
         <p:spPr>
           <a:xfrm>
+            <a:off x="5897880" y="310896"/>
+            <a:ext cx="4800600" cy="256032"/>
+          </a:xfrm>
+          <a:prstGeom prst="rect">
+            <a:avLst/>
+          </a:prstGeom>
+          <a:noFill/>
+        </p:spPr>
+        <p:txBody>
+          <a:bodyPr wrap="none" lIns="9144" rIns="9144" tIns="9144" bIns="9144" anchor="t">
+            <a:spAutoFit/>
+          </a:bodyPr>
+          <a:lstStyle/>
+          <a:p>
+            <a:pPr algn="r">
+              <a:spcAft>
+                <a:spcPts val="0"/>
+              </a:spcAft>
+              <a:defRPr sz="680" b="1">
+                <a:solidFill>
+                  <a:srgbClr val="4F6B00"/>
+                </a:solidFill>
+                <a:latin typeface="Inter"/>
+              </a:defRPr>
+            </a:pPr>
+            <a:r>
+              <a:rPr>
+                <a:latin typeface="Inter"/>
+              </a:rPr>
+              <a:t>Illustrative, Gradient Maintained — demo data, not the client's holdings or managers</a:t>
+            </a:r>
+          </a:p>
+        </p:txBody>
+      </p:sp>
+      <p:sp>
+        <p:nvSpPr>
+          <p:cNvPr id="4" name="TextBox 3"/>
+          <p:cNvSpPr txBox="1"/>
+          <p:nvPr/>
+        </p:nvSpPr>
+        <p:spPr>
+          <a:xfrm>
             <a:off x="640080" y="566928"/>
             <a:ext cx="10058400" cy="530352"/>
           </a:xfrm>
@@ -26555,7 +28499,7 @@
       </p:sp>
       <p:sp>
         <p:nvSpPr>
-          <p:cNvPr id="4" name="Rectangle 3"/>
+          <p:cNvPr id="5" name="Rectangle 4"/>
           <p:cNvSpPr/>
           <p:nvPr/>
         </p:nvSpPr>
@@ -26604,7 +28548,7 @@
       </p:sp>
       <p:sp>
         <p:nvSpPr>
-          <p:cNvPr id="5" name="Rectangle 4"/>
+          <p:cNvPr id="6" name="Rectangle 5"/>
           <p:cNvSpPr/>
           <p:nvPr/>
         </p:nvSpPr>
@@ -26653,7 +28597,7 @@
       </p:sp>
       <p:sp>
         <p:nvSpPr>
-          <p:cNvPr id="6" name="TextBox 5"/>
+          <p:cNvPr id="7" name="TextBox 6"/>
           <p:cNvSpPr txBox="1"/>
           <p:nvPr/>
         </p:nvSpPr>
@@ -26695,7 +28639,7 @@
       </p:sp>
       <p:sp>
         <p:nvSpPr>
-          <p:cNvPr id="7" name="TextBox 6"/>
+          <p:cNvPr id="8" name="TextBox 7"/>
           <p:cNvSpPr txBox="1"/>
           <p:nvPr/>
         </p:nvSpPr>
@@ -26794,7 +28738,7 @@
       </p:sp>
       <p:sp>
         <p:nvSpPr>
-          <p:cNvPr id="8" name="TextBox 7"/>
+          <p:cNvPr id="9" name="TextBox 8"/>
           <p:cNvSpPr txBox="1"/>
           <p:nvPr/>
         </p:nvSpPr>
@@ -26836,7 +28780,7 @@
       </p:sp>
       <p:sp>
         <p:nvSpPr>
-          <p:cNvPr id="9" name="Rectangle 8"/>
+          <p:cNvPr id="10" name="Rectangle 9"/>
           <p:cNvSpPr/>
           <p:nvPr/>
         </p:nvSpPr>
@@ -26885,7 +28829,7 @@
       </p:sp>
       <p:sp>
         <p:nvSpPr>
-          <p:cNvPr id="10" name="Rectangle 9"/>
+          <p:cNvPr id="11" name="Rectangle 10"/>
           <p:cNvSpPr/>
           <p:nvPr/>
         </p:nvSpPr>
@@ -26934,7 +28878,7 @@
       </p:sp>
       <p:sp>
         <p:nvSpPr>
-          <p:cNvPr id="11" name="TextBox 10"/>
+          <p:cNvPr id="12" name="TextBox 11"/>
           <p:cNvSpPr txBox="1"/>
           <p:nvPr/>
         </p:nvSpPr>
@@ -26976,7 +28920,7 @@
       </p:sp>
       <p:sp>
         <p:nvSpPr>
-          <p:cNvPr id="12" name="TextBox 11"/>
+          <p:cNvPr id="13" name="TextBox 12"/>
           <p:cNvSpPr txBox="1"/>
           <p:nvPr/>
         </p:nvSpPr>
@@ -27018,7 +28962,7 @@
       </p:sp>
       <p:sp>
         <p:nvSpPr>
-          <p:cNvPr id="13" name="TextBox 12"/>
+          <p:cNvPr id="14" name="TextBox 13"/>
           <p:cNvSpPr txBox="1"/>
           <p:nvPr/>
         </p:nvSpPr>
@@ -27060,7 +29004,7 @@
       </p:sp>
       <p:sp>
         <p:nvSpPr>
-          <p:cNvPr id="14" name="Rectangle 13"/>
+          <p:cNvPr id="15" name="Rectangle 14"/>
           <p:cNvSpPr/>
           <p:nvPr/>
         </p:nvSpPr>
@@ -27109,7 +29053,7 @@
       </p:sp>
       <p:sp>
         <p:nvSpPr>
-          <p:cNvPr id="15" name="Rectangle 14"/>
+          <p:cNvPr id="16" name="Rectangle 15"/>
           <p:cNvSpPr/>
           <p:nvPr/>
         </p:nvSpPr>
@@ -27158,7 +29102,7 @@
       </p:sp>
       <p:sp>
         <p:nvSpPr>
-          <p:cNvPr id="16" name="TextBox 15"/>
+          <p:cNvPr id="17" name="TextBox 16"/>
           <p:cNvSpPr txBox="1"/>
           <p:nvPr/>
         </p:nvSpPr>
@@ -27200,7 +29144,7 @@
       </p:sp>
       <p:sp>
         <p:nvSpPr>
-          <p:cNvPr id="17" name="TextBox 16"/>
+          <p:cNvPr id="18" name="TextBox 17"/>
           <p:cNvSpPr txBox="1"/>
           <p:nvPr/>
         </p:nvSpPr>
@@ -27242,7 +29186,7 @@
       </p:sp>
       <p:sp>
         <p:nvSpPr>
-          <p:cNvPr id="18" name="TextBox 17"/>
+          <p:cNvPr id="19" name="TextBox 18"/>
           <p:cNvSpPr txBox="1"/>
           <p:nvPr/>
         </p:nvSpPr>
@@ -27284,7 +29228,7 @@
       </p:sp>
       <p:sp>
         <p:nvSpPr>
-          <p:cNvPr id="19" name="Rectangle 18"/>
+          <p:cNvPr id="20" name="Rectangle 19"/>
           <p:cNvSpPr/>
           <p:nvPr/>
         </p:nvSpPr>
@@ -27333,7 +29277,7 @@
       </p:sp>
       <p:sp>
         <p:nvSpPr>
-          <p:cNvPr id="20" name="Rectangle 19"/>
+          <p:cNvPr id="21" name="Rectangle 20"/>
           <p:cNvSpPr/>
           <p:nvPr/>
         </p:nvSpPr>
@@ -27382,7 +29326,7 @@
       </p:sp>
       <p:sp>
         <p:nvSpPr>
-          <p:cNvPr id="21" name="TextBox 20"/>
+          <p:cNvPr id="22" name="TextBox 21"/>
           <p:cNvSpPr txBox="1"/>
           <p:nvPr/>
         </p:nvSpPr>
@@ -27424,7 +29368,7 @@
       </p:sp>
       <p:sp>
         <p:nvSpPr>
-          <p:cNvPr id="22" name="TextBox 21"/>
+          <p:cNvPr id="23" name="TextBox 22"/>
           <p:cNvSpPr txBox="1"/>
           <p:nvPr/>
         </p:nvSpPr>
@@ -27466,7 +29410,7 @@
       </p:sp>
       <p:sp>
         <p:nvSpPr>
-          <p:cNvPr id="23" name="TextBox 22"/>
+          <p:cNvPr id="24" name="TextBox 23"/>
           <p:cNvSpPr txBox="1"/>
           <p:nvPr/>
         </p:nvSpPr>
@@ -27508,7 +29452,7 @@
       </p:sp>
       <p:sp>
         <p:nvSpPr>
-          <p:cNvPr id="24" name="Rectangle 23"/>
+          <p:cNvPr id="25" name="Rectangle 24"/>
           <p:cNvSpPr/>
           <p:nvPr/>
         </p:nvSpPr>
@@ -27557,7 +29501,7 @@
       </p:sp>
       <p:sp>
         <p:nvSpPr>
-          <p:cNvPr id="25" name="Rectangle 24"/>
+          <p:cNvPr id="26" name="Rectangle 25"/>
           <p:cNvSpPr/>
           <p:nvPr/>
         </p:nvSpPr>
@@ -27606,7 +29550,7 @@
       </p:sp>
       <p:sp>
         <p:nvSpPr>
-          <p:cNvPr id="26" name="TextBox 25"/>
+          <p:cNvPr id="27" name="TextBox 26"/>
           <p:cNvSpPr txBox="1"/>
           <p:nvPr/>
         </p:nvSpPr>
@@ -27648,7 +29592,7 @@
       </p:sp>
       <p:sp>
         <p:nvSpPr>
-          <p:cNvPr id="27" name="TextBox 26"/>
+          <p:cNvPr id="28" name="TextBox 27"/>
           <p:cNvSpPr txBox="1"/>
           <p:nvPr/>
         </p:nvSpPr>
@@ -27690,7 +29634,7 @@
       </p:sp>
       <p:sp>
         <p:nvSpPr>
-          <p:cNvPr id="28" name="Rectangle 27"/>
+          <p:cNvPr id="29" name="Rectangle 28"/>
           <p:cNvSpPr/>
           <p:nvPr/>
         </p:nvSpPr>
@@ -27739,7 +29683,7 @@
       </p:sp>
       <p:sp>
         <p:nvSpPr>
-          <p:cNvPr id="29" name="TextBox 28"/>
+          <p:cNvPr id="30" name="TextBox 29"/>
           <p:cNvSpPr txBox="1"/>
           <p:nvPr/>
         </p:nvSpPr>
@@ -27781,7 +29725,7 @@
       </p:sp>
       <p:sp>
         <p:nvSpPr>
-          <p:cNvPr id="30" name="TextBox 29"/>
+          <p:cNvPr id="31" name="TextBox 30"/>
           <p:cNvSpPr txBox="1"/>
           <p:nvPr/>
         </p:nvSpPr>
@@ -27816,14 +29760,14 @@
               <a:rPr>
                 <a:latin typeface="Inter"/>
               </a:rPr>
-              <a:t>DRAFT — for committee review · Illustrative data · Data as of 2026-09-30</a:t>
-            </a:r>
-          </a:p>
-        </p:txBody>
-      </p:sp>
-      <p:sp>
-        <p:nvSpPr>
-          <p:cNvPr id="31" name="TextBox 30"/>
+              <a:t>Confidential — Investment Committee · Data as of 2026-09-30</a:t>
+            </a:r>
+          </a:p>
+        </p:txBody>
+      </p:sp>
+      <p:sp>
+        <p:nvSpPr>
+          <p:cNvPr id="32" name="TextBox 31"/>
           <p:cNvSpPr txBox="1"/>
           <p:nvPr/>
         </p:nvSpPr>
@@ -27938,6 +29882,48 @@
         </p:nvSpPr>
         <p:spPr>
           <a:xfrm>
+            <a:off x="5897880" y="310896"/>
+            <a:ext cx="4800600" cy="256032"/>
+          </a:xfrm>
+          <a:prstGeom prst="rect">
+            <a:avLst/>
+          </a:prstGeom>
+          <a:noFill/>
+        </p:spPr>
+        <p:txBody>
+          <a:bodyPr wrap="none" lIns="9144" rIns="9144" tIns="9144" bIns="9144" anchor="t">
+            <a:spAutoFit/>
+          </a:bodyPr>
+          <a:lstStyle/>
+          <a:p>
+            <a:pPr algn="r">
+              <a:spcAft>
+                <a:spcPts val="0"/>
+              </a:spcAft>
+              <a:defRPr sz="680" b="1">
+                <a:solidFill>
+                  <a:srgbClr val="4F6B00"/>
+                </a:solidFill>
+                <a:latin typeface="Inter"/>
+              </a:defRPr>
+            </a:pPr>
+            <a:r>
+              <a:rPr>
+                <a:latin typeface="Inter"/>
+              </a:rPr>
+              <a:t>Illustrative, Gradient Maintained — demo data, not the client's holdings or managers</a:t>
+            </a:r>
+          </a:p>
+        </p:txBody>
+      </p:sp>
+      <p:sp>
+        <p:nvSpPr>
+          <p:cNvPr id="4" name="TextBox 3"/>
+          <p:cNvSpPr txBox="1"/>
+          <p:nvPr/>
+        </p:nvSpPr>
+        <p:spPr>
+          <a:xfrm>
             <a:off x="640080" y="566928"/>
             <a:ext cx="10058400" cy="530352"/>
           </a:xfrm>
@@ -27974,7 +29960,7 @@
       </p:sp>
       <p:sp>
         <p:nvSpPr>
-          <p:cNvPr id="4" name="Rectangle 3"/>
+          <p:cNvPr id="5" name="Rectangle 4"/>
           <p:cNvSpPr/>
           <p:nvPr/>
         </p:nvSpPr>
@@ -28023,7 +30009,7 @@
       </p:sp>
       <p:sp>
         <p:nvSpPr>
-          <p:cNvPr id="5" name="Rectangle 4"/>
+          <p:cNvPr id="6" name="Rectangle 5"/>
           <p:cNvSpPr/>
           <p:nvPr/>
         </p:nvSpPr>
@@ -28072,7 +30058,7 @@
       </p:sp>
       <p:sp>
         <p:nvSpPr>
-          <p:cNvPr id="6" name="TextBox 5"/>
+          <p:cNvPr id="7" name="TextBox 6"/>
           <p:cNvSpPr txBox="1"/>
           <p:nvPr/>
         </p:nvSpPr>
@@ -28114,7 +30100,7 @@
       </p:sp>
       <p:sp>
         <p:nvSpPr>
-          <p:cNvPr id="7" name="TextBox 6"/>
+          <p:cNvPr id="8" name="TextBox 7"/>
           <p:cNvSpPr txBox="1"/>
           <p:nvPr/>
         </p:nvSpPr>
@@ -28232,7 +30218,7 @@
       </p:sp>
       <p:sp>
         <p:nvSpPr>
-          <p:cNvPr id="8" name="Rectangle 7"/>
+          <p:cNvPr id="9" name="Rectangle 8"/>
           <p:cNvSpPr/>
           <p:nvPr/>
         </p:nvSpPr>
@@ -28281,7 +30267,7 @@
       </p:sp>
       <p:sp>
         <p:nvSpPr>
-          <p:cNvPr id="9" name="TextBox 8"/>
+          <p:cNvPr id="10" name="TextBox 9"/>
           <p:cNvSpPr txBox="1"/>
           <p:nvPr/>
         </p:nvSpPr>
@@ -28323,7 +30309,7 @@
       </p:sp>
       <p:sp>
         <p:nvSpPr>
-          <p:cNvPr id="10" name="TextBox 9"/>
+          <p:cNvPr id="11" name="TextBox 10"/>
           <p:cNvSpPr txBox="1"/>
           <p:nvPr/>
         </p:nvSpPr>
@@ -28358,14 +30344,14 @@
               <a:rPr>
                 <a:latin typeface="Inter"/>
               </a:rPr>
-              <a:t>DRAFT — for committee review · Illustrative data · Data as of 2026-09-30</a:t>
-            </a:r>
-          </a:p>
-        </p:txBody>
-      </p:sp>
-      <p:sp>
-        <p:nvSpPr>
-          <p:cNvPr id="11" name="TextBox 10"/>
+              <a:t>Confidential — Investment Committee · Data as of 2026-09-30</a:t>
+            </a:r>
+          </a:p>
+        </p:txBody>
+      </p:sp>
+      <p:sp>
+        <p:nvSpPr>
+          <p:cNvPr id="12" name="TextBox 11"/>
           <p:cNvSpPr txBox="1"/>
           <p:nvPr/>
         </p:nvSpPr>
@@ -28480,6 +30466,48 @@
         </p:nvSpPr>
         <p:spPr>
           <a:xfrm>
+            <a:off x="5897880" y="310896"/>
+            <a:ext cx="4800600" cy="256032"/>
+          </a:xfrm>
+          <a:prstGeom prst="rect">
+            <a:avLst/>
+          </a:prstGeom>
+          <a:noFill/>
+        </p:spPr>
+        <p:txBody>
+          <a:bodyPr wrap="none" lIns="9144" rIns="9144" tIns="9144" bIns="9144" anchor="t">
+            <a:spAutoFit/>
+          </a:bodyPr>
+          <a:lstStyle/>
+          <a:p>
+            <a:pPr algn="r">
+              <a:spcAft>
+                <a:spcPts val="0"/>
+              </a:spcAft>
+              <a:defRPr sz="680" b="1">
+                <a:solidFill>
+                  <a:srgbClr val="4F6B00"/>
+                </a:solidFill>
+                <a:latin typeface="Inter"/>
+              </a:defRPr>
+            </a:pPr>
+            <a:r>
+              <a:rPr>
+                <a:latin typeface="Inter"/>
+              </a:rPr>
+              <a:t>Illustrative, Gradient Maintained — demo data, not the client's holdings or managers</a:t>
+            </a:r>
+          </a:p>
+        </p:txBody>
+      </p:sp>
+      <p:sp>
+        <p:nvSpPr>
+          <p:cNvPr id="4" name="TextBox 3"/>
+          <p:cNvSpPr txBox="1"/>
+          <p:nvPr/>
+        </p:nvSpPr>
+        <p:spPr>
+          <a:xfrm>
             <a:off x="640080" y="566928"/>
             <a:ext cx="10058400" cy="530352"/>
           </a:xfrm>
@@ -28516,7 +30544,7 @@
       </p:sp>
       <p:sp>
         <p:nvSpPr>
-          <p:cNvPr id="4" name="Rectangle 3"/>
+          <p:cNvPr id="5" name="Rectangle 4"/>
           <p:cNvSpPr/>
           <p:nvPr/>
         </p:nvSpPr>
@@ -28565,7 +30593,7 @@
       </p:sp>
       <p:sp>
         <p:nvSpPr>
-          <p:cNvPr id="5" name="Rectangle 4"/>
+          <p:cNvPr id="6" name="Rectangle 5"/>
           <p:cNvSpPr/>
           <p:nvPr/>
         </p:nvSpPr>
@@ -28614,7 +30642,7 @@
       </p:sp>
       <p:sp>
         <p:nvSpPr>
-          <p:cNvPr id="6" name="TextBox 5"/>
+          <p:cNvPr id="7" name="TextBox 6"/>
           <p:cNvSpPr txBox="1"/>
           <p:nvPr/>
         </p:nvSpPr>
@@ -28656,7 +30684,7 @@
       </p:sp>
       <p:sp>
         <p:nvSpPr>
-          <p:cNvPr id="7" name="TextBox 6"/>
+          <p:cNvPr id="8" name="TextBox 7"/>
           <p:cNvSpPr txBox="1"/>
           <p:nvPr/>
         </p:nvSpPr>
@@ -28698,7 +30726,7 @@
       </p:sp>
       <p:sp>
         <p:nvSpPr>
-          <p:cNvPr id="8" name="Rectangle 7"/>
+          <p:cNvPr id="9" name="Rectangle 8"/>
           <p:cNvSpPr/>
           <p:nvPr/>
         </p:nvSpPr>
@@ -28747,7 +30775,7 @@
       </p:sp>
       <p:sp>
         <p:nvSpPr>
-          <p:cNvPr id="9" name="TextBox 8"/>
+          <p:cNvPr id="10" name="TextBox 9"/>
           <p:cNvSpPr txBox="1"/>
           <p:nvPr/>
         </p:nvSpPr>
@@ -28789,7 +30817,7 @@
       </p:sp>
       <p:sp>
         <p:nvSpPr>
-          <p:cNvPr id="10" name="TextBox 9"/>
+          <p:cNvPr id="11" name="TextBox 10"/>
           <p:cNvSpPr txBox="1"/>
           <p:nvPr/>
         </p:nvSpPr>
@@ -28824,14 +30852,14 @@
               <a:rPr>
                 <a:latin typeface="Inter"/>
               </a:rPr>
-              <a:t>DRAFT — for committee review · Illustrative data · Data as of 2026-09-30</a:t>
-            </a:r>
-          </a:p>
-        </p:txBody>
-      </p:sp>
-      <p:sp>
-        <p:nvSpPr>
-          <p:cNvPr id="11" name="TextBox 10"/>
+              <a:t>Confidential — Investment Committee · Data as of 2026-09-30</a:t>
+            </a:r>
+          </a:p>
+        </p:txBody>
+      </p:sp>
+      <p:sp>
+        <p:nvSpPr>
+          <p:cNvPr id="12" name="TextBox 11"/>
           <p:cNvSpPr txBox="1"/>
           <p:nvPr/>
         </p:nvSpPr>
@@ -28946,6 +30974,48 @@
         </p:nvSpPr>
         <p:spPr>
           <a:xfrm>
+            <a:off x="5897880" y="310896"/>
+            <a:ext cx="4800600" cy="256032"/>
+          </a:xfrm>
+          <a:prstGeom prst="rect">
+            <a:avLst/>
+          </a:prstGeom>
+          <a:noFill/>
+        </p:spPr>
+        <p:txBody>
+          <a:bodyPr wrap="none" lIns="9144" rIns="9144" tIns="9144" bIns="9144" anchor="t">
+            <a:spAutoFit/>
+          </a:bodyPr>
+          <a:lstStyle/>
+          <a:p>
+            <a:pPr algn="r">
+              <a:spcAft>
+                <a:spcPts val="0"/>
+              </a:spcAft>
+              <a:defRPr sz="680" b="1">
+                <a:solidFill>
+                  <a:srgbClr val="4F6B00"/>
+                </a:solidFill>
+                <a:latin typeface="Inter"/>
+              </a:defRPr>
+            </a:pPr>
+            <a:r>
+              <a:rPr>
+                <a:latin typeface="Inter"/>
+              </a:rPr>
+              <a:t>Illustrative, Gradient Maintained — demo data, not the client's holdings or managers</a:t>
+            </a:r>
+          </a:p>
+        </p:txBody>
+      </p:sp>
+      <p:sp>
+        <p:nvSpPr>
+          <p:cNvPr id="4" name="TextBox 3"/>
+          <p:cNvSpPr txBox="1"/>
+          <p:nvPr/>
+        </p:nvSpPr>
+        <p:spPr>
+          <a:xfrm>
             <a:off x="640080" y="566928"/>
             <a:ext cx="10058400" cy="530352"/>
           </a:xfrm>
@@ -28982,7 +31052,7 @@
       </p:sp>
       <p:sp>
         <p:nvSpPr>
-          <p:cNvPr id="4" name="Rectangle 3"/>
+          <p:cNvPr id="5" name="Rectangle 4"/>
           <p:cNvSpPr/>
           <p:nvPr/>
         </p:nvSpPr>
@@ -29031,7 +31101,7 @@
       </p:sp>
       <p:sp>
         <p:nvSpPr>
-          <p:cNvPr id="5" name="Rectangle 4"/>
+          <p:cNvPr id="6" name="Rectangle 5"/>
           <p:cNvSpPr/>
           <p:nvPr/>
         </p:nvSpPr>
@@ -29080,7 +31150,7 @@
       </p:sp>
       <p:sp>
         <p:nvSpPr>
-          <p:cNvPr id="6" name="TextBox 5"/>
+          <p:cNvPr id="7" name="TextBox 6"/>
           <p:cNvSpPr txBox="1"/>
           <p:nvPr/>
         </p:nvSpPr>
@@ -29122,7 +31192,7 @@
       </p:sp>
       <p:sp>
         <p:nvSpPr>
-          <p:cNvPr id="7" name="TextBox 6"/>
+          <p:cNvPr id="8" name="TextBox 7"/>
           <p:cNvSpPr txBox="1"/>
           <p:nvPr/>
         </p:nvSpPr>
@@ -29164,7 +31234,7 @@
       </p:sp>
       <p:graphicFrame>
         <p:nvGraphicFramePr>
-          <p:cNvPr id="8" name="Chart 7"/>
+          <p:cNvPr id="9" name="Chart 8"/>
           <p:cNvGraphicFramePr>
             <a:graphicFrameLocks noGrp="1"/>
           </p:cNvGraphicFramePr>
@@ -29182,7 +31252,7 @@
       </p:graphicFrame>
       <p:sp>
         <p:nvSpPr>
-          <p:cNvPr id="9" name="Rectangle 8"/>
+          <p:cNvPr id="10" name="Rectangle 9"/>
           <p:cNvSpPr/>
           <p:nvPr/>
         </p:nvSpPr>
@@ -29231,7 +31301,7 @@
       </p:sp>
       <p:sp>
         <p:nvSpPr>
-          <p:cNvPr id="10" name="TextBox 9"/>
+          <p:cNvPr id="11" name="TextBox 10"/>
           <p:cNvSpPr txBox="1"/>
           <p:nvPr/>
         </p:nvSpPr>
@@ -29273,7 +31343,7 @@
       </p:sp>
       <p:graphicFrame>
         <p:nvGraphicFramePr>
-          <p:cNvPr id="11" name="Chart 10"/>
+          <p:cNvPr id="12" name="Chart 11"/>
           <p:cNvGraphicFramePr>
             <a:graphicFrameLocks noGrp="1"/>
           </p:cNvGraphicFramePr>
@@ -29291,7 +31361,7 @@
       </p:graphicFrame>
       <p:sp>
         <p:nvSpPr>
-          <p:cNvPr id="12" name="Rectangle 11"/>
+          <p:cNvPr id="13" name="Rectangle 12"/>
           <p:cNvSpPr/>
           <p:nvPr/>
         </p:nvSpPr>
@@ -29340,7 +31410,7 @@
       </p:sp>
       <p:sp>
         <p:nvSpPr>
-          <p:cNvPr id="13" name="TextBox 12"/>
+          <p:cNvPr id="14" name="TextBox 13"/>
           <p:cNvSpPr txBox="1"/>
           <p:nvPr/>
         </p:nvSpPr>
@@ -29382,7 +31452,7 @@
       </p:sp>
       <p:sp>
         <p:nvSpPr>
-          <p:cNvPr id="14" name="TextBox 13"/>
+          <p:cNvPr id="15" name="TextBox 14"/>
           <p:cNvSpPr txBox="1"/>
           <p:nvPr/>
         </p:nvSpPr>
@@ -29417,14 +31487,14 @@
               <a:rPr>
                 <a:latin typeface="Inter"/>
               </a:rPr>
-              <a:t>DRAFT — for committee review · Illustrative data · Data as of 2026-09-30</a:t>
-            </a:r>
-          </a:p>
-        </p:txBody>
-      </p:sp>
-      <p:sp>
-        <p:nvSpPr>
-          <p:cNvPr id="15" name="TextBox 14"/>
+              <a:t>Confidential — Investment Committee · Data as of 2026-09-30</a:t>
+            </a:r>
+          </a:p>
+        </p:txBody>
+      </p:sp>
+      <p:sp>
+        <p:nvSpPr>
+          <p:cNvPr id="16" name="TextBox 15"/>
           <p:cNvSpPr txBox="1"/>
           <p:nvPr/>
         </p:nvSpPr>
@@ -29539,6 +31609,48 @@
         </p:nvSpPr>
         <p:spPr>
           <a:xfrm>
+            <a:off x="5897880" y="310896"/>
+            <a:ext cx="4800600" cy="256032"/>
+          </a:xfrm>
+          <a:prstGeom prst="rect">
+            <a:avLst/>
+          </a:prstGeom>
+          <a:noFill/>
+        </p:spPr>
+        <p:txBody>
+          <a:bodyPr wrap="none" lIns="9144" rIns="9144" tIns="9144" bIns="9144" anchor="t">
+            <a:spAutoFit/>
+          </a:bodyPr>
+          <a:lstStyle/>
+          <a:p>
+            <a:pPr algn="r">
+              <a:spcAft>
+                <a:spcPts val="0"/>
+              </a:spcAft>
+              <a:defRPr sz="680" b="1">
+                <a:solidFill>
+                  <a:srgbClr val="4F6B00"/>
+                </a:solidFill>
+                <a:latin typeface="Inter"/>
+              </a:defRPr>
+            </a:pPr>
+            <a:r>
+              <a:rPr>
+                <a:latin typeface="Inter"/>
+              </a:rPr>
+              <a:t>Illustrative, Gradient Maintained — demo data, not the client's holdings or managers</a:t>
+            </a:r>
+          </a:p>
+        </p:txBody>
+      </p:sp>
+      <p:sp>
+        <p:nvSpPr>
+          <p:cNvPr id="4" name="TextBox 3"/>
+          <p:cNvSpPr txBox="1"/>
+          <p:nvPr/>
+        </p:nvSpPr>
+        <p:spPr>
+          <a:xfrm>
             <a:off x="640080" y="566928"/>
             <a:ext cx="10058400" cy="530352"/>
           </a:xfrm>
@@ -29575,7 +31687,7 @@
       </p:sp>
       <p:sp>
         <p:nvSpPr>
-          <p:cNvPr id="4" name="Rectangle 3"/>
+          <p:cNvPr id="5" name="Rectangle 4"/>
           <p:cNvSpPr/>
           <p:nvPr/>
         </p:nvSpPr>
@@ -29624,7 +31736,7 @@
       </p:sp>
       <p:sp>
         <p:nvSpPr>
-          <p:cNvPr id="5" name="Rectangle 4"/>
+          <p:cNvPr id="6" name="Rectangle 5"/>
           <p:cNvSpPr/>
           <p:nvPr/>
         </p:nvSpPr>
@@ -29673,7 +31785,7 @@
       </p:sp>
       <p:sp>
         <p:nvSpPr>
-          <p:cNvPr id="6" name="TextBox 5"/>
+          <p:cNvPr id="7" name="TextBox 6"/>
           <p:cNvSpPr txBox="1"/>
           <p:nvPr/>
         </p:nvSpPr>
@@ -29715,7 +31827,7 @@
       </p:sp>
       <p:sp>
         <p:nvSpPr>
-          <p:cNvPr id="7" name="Rectangle 6"/>
+          <p:cNvPr id="8" name="Rectangle 7"/>
           <p:cNvSpPr/>
           <p:nvPr/>
         </p:nvSpPr>
@@ -29764,7 +31876,7 @@
       </p:sp>
       <p:sp>
         <p:nvSpPr>
-          <p:cNvPr id="8" name="Rectangle 7"/>
+          <p:cNvPr id="9" name="Rectangle 8"/>
           <p:cNvSpPr/>
           <p:nvPr/>
         </p:nvSpPr>
@@ -29813,7 +31925,7 @@
       </p:sp>
       <p:sp>
         <p:nvSpPr>
-          <p:cNvPr id="9" name="TextBox 8"/>
+          <p:cNvPr id="10" name="TextBox 9"/>
           <p:cNvSpPr txBox="1"/>
           <p:nvPr/>
         </p:nvSpPr>
@@ -29855,7 +31967,7 @@
       </p:sp>
       <p:sp>
         <p:nvSpPr>
-          <p:cNvPr id="10" name="TextBox 9"/>
+          <p:cNvPr id="11" name="TextBox 10"/>
           <p:cNvSpPr txBox="1"/>
           <p:nvPr/>
         </p:nvSpPr>
@@ -29897,7 +32009,7 @@
       </p:sp>
       <p:sp>
         <p:nvSpPr>
-          <p:cNvPr id="11" name="TextBox 10"/>
+          <p:cNvPr id="12" name="TextBox 11"/>
           <p:cNvSpPr txBox="1"/>
           <p:nvPr/>
         </p:nvSpPr>
@@ -29977,7 +32089,7 @@
       </p:sp>
       <p:sp>
         <p:nvSpPr>
-          <p:cNvPr id="12" name="Rectangle 11"/>
+          <p:cNvPr id="13" name="Rectangle 12"/>
           <p:cNvSpPr/>
           <p:nvPr/>
         </p:nvSpPr>
@@ -30026,7 +32138,7 @@
       </p:sp>
       <p:sp>
         <p:nvSpPr>
-          <p:cNvPr id="13" name="TextBox 12"/>
+          <p:cNvPr id="14" name="TextBox 13"/>
           <p:cNvSpPr txBox="1"/>
           <p:nvPr/>
         </p:nvSpPr>
@@ -30068,7 +32180,7 @@
       </p:sp>
       <p:sp>
         <p:nvSpPr>
-          <p:cNvPr id="14" name="TextBox 13"/>
+          <p:cNvPr id="15" name="TextBox 14"/>
           <p:cNvSpPr txBox="1"/>
           <p:nvPr/>
         </p:nvSpPr>
@@ -30103,14 +32215,14 @@
               <a:rPr>
                 <a:latin typeface="Inter"/>
               </a:rPr>
-              <a:t>DRAFT — for committee review · Illustrative data · Data as of 2026-09-30</a:t>
-            </a:r>
-          </a:p>
-        </p:txBody>
-      </p:sp>
-      <p:sp>
-        <p:nvSpPr>
-          <p:cNvPr id="15" name="TextBox 14"/>
+              <a:t>Confidential — Investment Committee · Data as of 2026-09-30</a:t>
+            </a:r>
+          </a:p>
+        </p:txBody>
+      </p:sp>
+      <p:sp>
+        <p:nvSpPr>
+          <p:cNvPr id="16" name="TextBox 15"/>
           <p:cNvSpPr txBox="1"/>
           <p:nvPr/>
         </p:nvSpPr>
@@ -30225,6 +32337,48 @@
         </p:nvSpPr>
         <p:spPr>
           <a:xfrm>
+            <a:off x="5897880" y="310896"/>
+            <a:ext cx="4800600" cy="256032"/>
+          </a:xfrm>
+          <a:prstGeom prst="rect">
+            <a:avLst/>
+          </a:prstGeom>
+          <a:noFill/>
+        </p:spPr>
+        <p:txBody>
+          <a:bodyPr wrap="none" lIns="9144" rIns="9144" tIns="9144" bIns="9144" anchor="t">
+            <a:spAutoFit/>
+          </a:bodyPr>
+          <a:lstStyle/>
+          <a:p>
+            <a:pPr algn="r">
+              <a:spcAft>
+                <a:spcPts val="0"/>
+              </a:spcAft>
+              <a:defRPr sz="680" b="1">
+                <a:solidFill>
+                  <a:srgbClr val="4F6B00"/>
+                </a:solidFill>
+                <a:latin typeface="Inter"/>
+              </a:defRPr>
+            </a:pPr>
+            <a:r>
+              <a:rPr>
+                <a:latin typeface="Inter"/>
+              </a:rPr>
+              <a:t>Illustrative, Gradient Maintained — demo data, not the client's holdings or managers</a:t>
+            </a:r>
+          </a:p>
+        </p:txBody>
+      </p:sp>
+      <p:sp>
+        <p:nvSpPr>
+          <p:cNvPr id="4" name="TextBox 3"/>
+          <p:cNvSpPr txBox="1"/>
+          <p:nvPr/>
+        </p:nvSpPr>
+        <p:spPr>
+          <a:xfrm>
             <a:off x="640080" y="566928"/>
             <a:ext cx="10058400" cy="530352"/>
           </a:xfrm>
@@ -30261,7 +32415,7 @@
       </p:sp>
       <p:sp>
         <p:nvSpPr>
-          <p:cNvPr id="4" name="Rectangle 3"/>
+          <p:cNvPr id="5" name="Rectangle 4"/>
           <p:cNvSpPr/>
           <p:nvPr/>
         </p:nvSpPr>
@@ -30310,7 +32464,7 @@
       </p:sp>
       <p:sp>
         <p:nvSpPr>
-          <p:cNvPr id="5" name="Rectangle 4"/>
+          <p:cNvPr id="6" name="Rectangle 5"/>
           <p:cNvSpPr/>
           <p:nvPr/>
         </p:nvSpPr>
@@ -30359,7 +32513,7 @@
       </p:sp>
       <p:sp>
         <p:nvSpPr>
-          <p:cNvPr id="6" name="TextBox 5"/>
+          <p:cNvPr id="7" name="TextBox 6"/>
           <p:cNvSpPr txBox="1"/>
           <p:nvPr/>
         </p:nvSpPr>
@@ -30401,7 +32555,7 @@
       </p:sp>
       <p:sp>
         <p:nvSpPr>
-          <p:cNvPr id="7" name="Rectangle 6"/>
+          <p:cNvPr id="8" name="Rectangle 7"/>
           <p:cNvSpPr/>
           <p:nvPr/>
         </p:nvSpPr>
@@ -30450,7 +32604,7 @@
       </p:sp>
       <p:sp>
         <p:nvSpPr>
-          <p:cNvPr id="8" name="Rectangle 7"/>
+          <p:cNvPr id="9" name="Rectangle 8"/>
           <p:cNvSpPr/>
           <p:nvPr/>
         </p:nvSpPr>
@@ -30499,7 +32653,7 @@
       </p:sp>
       <p:sp>
         <p:nvSpPr>
-          <p:cNvPr id="9" name="TextBox 8"/>
+          <p:cNvPr id="10" name="TextBox 9"/>
           <p:cNvSpPr txBox="1"/>
           <p:nvPr/>
         </p:nvSpPr>
@@ -30541,7 +32695,7 @@
       </p:sp>
       <p:sp>
         <p:nvSpPr>
-          <p:cNvPr id="10" name="TextBox 9"/>
+          <p:cNvPr id="11" name="TextBox 10"/>
           <p:cNvSpPr txBox="1"/>
           <p:nvPr/>
         </p:nvSpPr>
@@ -30583,7 +32737,7 @@
       </p:sp>
       <p:sp>
         <p:nvSpPr>
-          <p:cNvPr id="11" name="Rectangle 10"/>
+          <p:cNvPr id="12" name="Rectangle 11"/>
           <p:cNvSpPr/>
           <p:nvPr/>
         </p:nvSpPr>
@@ -30632,7 +32786,7 @@
       </p:sp>
       <p:sp>
         <p:nvSpPr>
-          <p:cNvPr id="12" name="TextBox 11"/>
+          <p:cNvPr id="13" name="TextBox 12"/>
           <p:cNvSpPr txBox="1"/>
           <p:nvPr/>
         </p:nvSpPr>
@@ -30674,7 +32828,7 @@
       </p:sp>
       <p:sp>
         <p:nvSpPr>
-          <p:cNvPr id="13" name="TextBox 12"/>
+          <p:cNvPr id="14" name="TextBox 13"/>
           <p:cNvSpPr txBox="1"/>
           <p:nvPr/>
         </p:nvSpPr>
@@ -30709,14 +32863,14 @@
               <a:rPr>
                 <a:latin typeface="Inter"/>
               </a:rPr>
-              <a:t>DRAFT — for committee review · Illustrative data · Data as of 2026-09-30</a:t>
-            </a:r>
-          </a:p>
-        </p:txBody>
-      </p:sp>
-      <p:sp>
-        <p:nvSpPr>
-          <p:cNvPr id="14" name="TextBox 13"/>
+              <a:t>Confidential — Investment Committee · Data as of 2026-09-30</a:t>
+            </a:r>
+          </a:p>
+        </p:txBody>
+      </p:sp>
+      <p:sp>
+        <p:nvSpPr>
+          <p:cNvPr id="15" name="TextBox 14"/>
           <p:cNvSpPr txBox="1"/>
           <p:nvPr/>
         </p:nvSpPr>
@@ -30831,6 +32985,48 @@
         </p:nvSpPr>
         <p:spPr>
           <a:xfrm>
+            <a:off x="5897880" y="310896"/>
+            <a:ext cx="4800600" cy="256032"/>
+          </a:xfrm>
+          <a:prstGeom prst="rect">
+            <a:avLst/>
+          </a:prstGeom>
+          <a:noFill/>
+        </p:spPr>
+        <p:txBody>
+          <a:bodyPr wrap="none" lIns="9144" rIns="9144" tIns="9144" bIns="9144" anchor="t">
+            <a:spAutoFit/>
+          </a:bodyPr>
+          <a:lstStyle/>
+          <a:p>
+            <a:pPr algn="r">
+              <a:spcAft>
+                <a:spcPts val="0"/>
+              </a:spcAft>
+              <a:defRPr sz="680" b="1">
+                <a:solidFill>
+                  <a:srgbClr val="4F6B00"/>
+                </a:solidFill>
+                <a:latin typeface="Inter"/>
+              </a:defRPr>
+            </a:pPr>
+            <a:r>
+              <a:rPr>
+                <a:latin typeface="Inter"/>
+              </a:rPr>
+              <a:t>Illustrative, Gradient Maintained — demo data, not the client's holdings or managers</a:t>
+            </a:r>
+          </a:p>
+        </p:txBody>
+      </p:sp>
+      <p:sp>
+        <p:nvSpPr>
+          <p:cNvPr id="4" name="TextBox 3"/>
+          <p:cNvSpPr txBox="1"/>
+          <p:nvPr/>
+        </p:nvSpPr>
+        <p:spPr>
+          <a:xfrm>
             <a:off x="640080" y="566928"/>
             <a:ext cx="10058400" cy="530352"/>
           </a:xfrm>
@@ -30867,7 +33063,7 @@
       </p:sp>
       <p:sp>
         <p:nvSpPr>
-          <p:cNvPr id="4" name="Rectangle 3"/>
+          <p:cNvPr id="5" name="Rectangle 4"/>
           <p:cNvSpPr/>
           <p:nvPr/>
         </p:nvSpPr>
@@ -30916,7 +33112,7 @@
       </p:sp>
       <p:sp>
         <p:nvSpPr>
-          <p:cNvPr id="5" name="Rectangle 4"/>
+          <p:cNvPr id="6" name="Rectangle 5"/>
           <p:cNvSpPr/>
           <p:nvPr/>
         </p:nvSpPr>
@@ -30965,7 +33161,7 @@
       </p:sp>
       <p:sp>
         <p:nvSpPr>
-          <p:cNvPr id="6" name="TextBox 5"/>
+          <p:cNvPr id="7" name="TextBox 6"/>
           <p:cNvSpPr txBox="1"/>
           <p:nvPr/>
         </p:nvSpPr>
@@ -31007,7 +33203,7 @@
       </p:sp>
       <p:sp>
         <p:nvSpPr>
-          <p:cNvPr id="7" name="TextBox 6"/>
+          <p:cNvPr id="8" name="TextBox 7"/>
           <p:cNvSpPr txBox="1"/>
           <p:nvPr/>
         </p:nvSpPr>
@@ -31049,7 +33245,7 @@
       </p:sp>
       <p:sp>
         <p:nvSpPr>
-          <p:cNvPr id="8" name="Rectangle 7"/>
+          <p:cNvPr id="9" name="Rectangle 8"/>
           <p:cNvSpPr/>
           <p:nvPr/>
         </p:nvSpPr>
@@ -31098,7 +33294,7 @@
       </p:sp>
       <p:sp>
         <p:nvSpPr>
-          <p:cNvPr id="9" name="Rectangle 8"/>
+          <p:cNvPr id="10" name="Rectangle 9"/>
           <p:cNvSpPr/>
           <p:nvPr/>
         </p:nvSpPr>
@@ -31147,7 +33343,7 @@
       </p:sp>
       <p:sp>
         <p:nvSpPr>
-          <p:cNvPr id="10" name="TextBox 9"/>
+          <p:cNvPr id="11" name="TextBox 10"/>
           <p:cNvSpPr txBox="1"/>
           <p:nvPr/>
         </p:nvSpPr>
@@ -31189,7 +33385,7 @@
       </p:sp>
       <p:sp>
         <p:nvSpPr>
-          <p:cNvPr id="11" name="TextBox 10"/>
+          <p:cNvPr id="12" name="TextBox 11"/>
           <p:cNvSpPr txBox="1"/>
           <p:nvPr/>
         </p:nvSpPr>
@@ -31231,7 +33427,7 @@
       </p:sp>
       <p:sp>
         <p:nvSpPr>
-          <p:cNvPr id="12" name="TextBox 11"/>
+          <p:cNvPr id="13" name="TextBox 12"/>
           <p:cNvSpPr txBox="1"/>
           <p:nvPr/>
         </p:nvSpPr>
@@ -31273,7 +33469,7 @@
       </p:sp>
       <p:sp>
         <p:nvSpPr>
-          <p:cNvPr id="13" name="Rectangle 12"/>
+          <p:cNvPr id="14" name="Rectangle 13"/>
           <p:cNvSpPr/>
           <p:nvPr/>
         </p:nvSpPr>
@@ -31322,7 +33518,7 @@
       </p:sp>
       <p:sp>
         <p:nvSpPr>
-          <p:cNvPr id="14" name="Rectangle 13"/>
+          <p:cNvPr id="15" name="Rectangle 14"/>
           <p:cNvSpPr/>
           <p:nvPr/>
         </p:nvSpPr>
@@ -31371,7 +33567,7 @@
       </p:sp>
       <p:sp>
         <p:nvSpPr>
-          <p:cNvPr id="15" name="TextBox 14"/>
+          <p:cNvPr id="16" name="TextBox 15"/>
           <p:cNvSpPr txBox="1"/>
           <p:nvPr/>
         </p:nvSpPr>
@@ -31413,7 +33609,7 @@
       </p:sp>
       <p:sp>
         <p:nvSpPr>
-          <p:cNvPr id="16" name="TextBox 15"/>
+          <p:cNvPr id="17" name="TextBox 16"/>
           <p:cNvSpPr txBox="1"/>
           <p:nvPr/>
         </p:nvSpPr>
@@ -31455,7 +33651,7 @@
       </p:sp>
       <p:sp>
         <p:nvSpPr>
-          <p:cNvPr id="17" name="TextBox 16"/>
+          <p:cNvPr id="18" name="TextBox 17"/>
           <p:cNvSpPr txBox="1"/>
           <p:nvPr/>
         </p:nvSpPr>
@@ -31497,7 +33693,7 @@
       </p:sp>
       <p:sp>
         <p:nvSpPr>
-          <p:cNvPr id="18" name="Rectangle 17"/>
+          <p:cNvPr id="19" name="Rectangle 18"/>
           <p:cNvSpPr/>
           <p:nvPr/>
         </p:nvSpPr>
@@ -31546,7 +33742,7 @@
       </p:sp>
       <p:sp>
         <p:nvSpPr>
-          <p:cNvPr id="19" name="Rectangle 18"/>
+          <p:cNvPr id="20" name="Rectangle 19"/>
           <p:cNvSpPr/>
           <p:nvPr/>
         </p:nvSpPr>
@@ -31595,7 +33791,7 @@
       </p:sp>
       <p:sp>
         <p:nvSpPr>
-          <p:cNvPr id="20" name="TextBox 19"/>
+          <p:cNvPr id="21" name="TextBox 20"/>
           <p:cNvSpPr txBox="1"/>
           <p:nvPr/>
         </p:nvSpPr>
@@ -31637,7 +33833,7 @@
       </p:sp>
       <p:sp>
         <p:nvSpPr>
-          <p:cNvPr id="21" name="TextBox 20"/>
+          <p:cNvPr id="22" name="TextBox 21"/>
           <p:cNvSpPr txBox="1"/>
           <p:nvPr/>
         </p:nvSpPr>
@@ -31679,7 +33875,7 @@
       </p:sp>
       <p:sp>
         <p:nvSpPr>
-          <p:cNvPr id="22" name="TextBox 21"/>
+          <p:cNvPr id="23" name="TextBox 22"/>
           <p:cNvSpPr txBox="1"/>
           <p:nvPr/>
         </p:nvSpPr>
@@ -31721,7 +33917,7 @@
       </p:sp>
       <p:sp>
         <p:nvSpPr>
-          <p:cNvPr id="23" name="TextBox 22"/>
+          <p:cNvPr id="24" name="TextBox 23"/>
           <p:cNvSpPr txBox="1"/>
           <p:nvPr/>
         </p:nvSpPr>
@@ -31787,7 +33983,7 @@
       </p:sp>
       <p:sp>
         <p:nvSpPr>
-          <p:cNvPr id="24" name="Rectangle 23"/>
+          <p:cNvPr id="25" name="Rectangle 24"/>
           <p:cNvSpPr/>
           <p:nvPr/>
         </p:nvSpPr>
@@ -31836,7 +34032,7 @@
       </p:sp>
       <p:sp>
         <p:nvSpPr>
-          <p:cNvPr id="25" name="Rectangle 24"/>
+          <p:cNvPr id="26" name="Rectangle 25"/>
           <p:cNvSpPr/>
           <p:nvPr/>
         </p:nvSpPr>
@@ -31885,7 +34081,7 @@
       </p:sp>
       <p:sp>
         <p:nvSpPr>
-          <p:cNvPr id="26" name="TextBox 25"/>
+          <p:cNvPr id="27" name="TextBox 26"/>
           <p:cNvSpPr txBox="1"/>
           <p:nvPr/>
         </p:nvSpPr>
@@ -31927,7 +34123,7 @@
       </p:sp>
       <p:sp>
         <p:nvSpPr>
-          <p:cNvPr id="27" name="TextBox 26"/>
+          <p:cNvPr id="28" name="TextBox 27"/>
           <p:cNvSpPr txBox="1"/>
           <p:nvPr/>
         </p:nvSpPr>
@@ -31969,7 +34165,7 @@
       </p:sp>
       <p:sp>
         <p:nvSpPr>
-          <p:cNvPr id="28" name="Rectangle 27"/>
+          <p:cNvPr id="29" name="Rectangle 28"/>
           <p:cNvSpPr/>
           <p:nvPr/>
         </p:nvSpPr>
@@ -32018,7 +34214,7 @@
       </p:sp>
       <p:sp>
         <p:nvSpPr>
-          <p:cNvPr id="29" name="TextBox 28"/>
+          <p:cNvPr id="30" name="TextBox 29"/>
           <p:cNvSpPr txBox="1"/>
           <p:nvPr/>
         </p:nvSpPr>
@@ -32060,7 +34256,7 @@
       </p:sp>
       <p:sp>
         <p:nvSpPr>
-          <p:cNvPr id="30" name="TextBox 29"/>
+          <p:cNvPr id="31" name="TextBox 30"/>
           <p:cNvSpPr txBox="1"/>
           <p:nvPr/>
         </p:nvSpPr>
@@ -32095,14 +34291,14 @@
               <a:rPr>
                 <a:latin typeface="Inter"/>
               </a:rPr>
-              <a:t>DRAFT — for committee review · Illustrative data · Data as of 2026-09-30</a:t>
-            </a:r>
-          </a:p>
-        </p:txBody>
-      </p:sp>
-      <p:sp>
-        <p:nvSpPr>
-          <p:cNvPr id="31" name="TextBox 30"/>
+              <a:t>Confidential — Investment Committee · Data as of 2026-09-30</a:t>
+            </a:r>
+          </a:p>
+        </p:txBody>
+      </p:sp>
+      <p:sp>
+        <p:nvSpPr>
+          <p:cNvPr id="32" name="TextBox 31"/>
           <p:cNvSpPr txBox="1"/>
           <p:nvPr/>
         </p:nvSpPr>
@@ -32217,6 +34413,48 @@
         </p:nvSpPr>
         <p:spPr>
           <a:xfrm>
+            <a:off x="5897880" y="310896"/>
+            <a:ext cx="4800600" cy="256032"/>
+          </a:xfrm>
+          <a:prstGeom prst="rect">
+            <a:avLst/>
+          </a:prstGeom>
+          <a:noFill/>
+        </p:spPr>
+        <p:txBody>
+          <a:bodyPr wrap="none" lIns="9144" rIns="9144" tIns="9144" bIns="9144" anchor="t">
+            <a:spAutoFit/>
+          </a:bodyPr>
+          <a:lstStyle/>
+          <a:p>
+            <a:pPr algn="r">
+              <a:spcAft>
+                <a:spcPts val="0"/>
+              </a:spcAft>
+              <a:defRPr sz="680" b="1">
+                <a:solidFill>
+                  <a:srgbClr val="4F6B00"/>
+                </a:solidFill>
+                <a:latin typeface="Inter"/>
+              </a:defRPr>
+            </a:pPr>
+            <a:r>
+              <a:rPr>
+                <a:latin typeface="Inter"/>
+              </a:rPr>
+              <a:t>Illustrative, Gradient Maintained — demo data, not the client's holdings or managers</a:t>
+            </a:r>
+          </a:p>
+        </p:txBody>
+      </p:sp>
+      <p:sp>
+        <p:nvSpPr>
+          <p:cNvPr id="4" name="TextBox 3"/>
+          <p:cNvSpPr txBox="1"/>
+          <p:nvPr/>
+        </p:nvSpPr>
+        <p:spPr>
+          <a:xfrm>
             <a:off x="640080" y="566928"/>
             <a:ext cx="10058400" cy="530352"/>
           </a:xfrm>
@@ -32253,7 +34491,7 @@
       </p:sp>
       <p:sp>
         <p:nvSpPr>
-          <p:cNvPr id="4" name="Rectangle 3"/>
+          <p:cNvPr id="5" name="Rectangle 4"/>
           <p:cNvSpPr/>
           <p:nvPr/>
         </p:nvSpPr>
@@ -32302,7 +34540,7 @@
       </p:sp>
       <p:sp>
         <p:nvSpPr>
-          <p:cNvPr id="5" name="Rectangle 4"/>
+          <p:cNvPr id="6" name="Rectangle 5"/>
           <p:cNvSpPr/>
           <p:nvPr/>
         </p:nvSpPr>
@@ -32351,7 +34589,7 @@
       </p:sp>
       <p:sp>
         <p:nvSpPr>
-          <p:cNvPr id="6" name="TextBox 5"/>
+          <p:cNvPr id="7" name="TextBox 6"/>
           <p:cNvSpPr txBox="1"/>
           <p:nvPr/>
         </p:nvSpPr>
@@ -32393,7 +34631,7 @@
       </p:sp>
       <p:sp>
         <p:nvSpPr>
-          <p:cNvPr id="7" name="TextBox 6"/>
+          <p:cNvPr id="8" name="TextBox 7"/>
           <p:cNvSpPr txBox="1"/>
           <p:nvPr/>
         </p:nvSpPr>
@@ -32475,7 +34713,7 @@
       </p:sp>
       <p:sp>
         <p:nvSpPr>
-          <p:cNvPr id="8" name="Rectangle 7"/>
+          <p:cNvPr id="9" name="Rectangle 8"/>
           <p:cNvSpPr/>
           <p:nvPr/>
         </p:nvSpPr>
@@ -32524,7 +34762,7 @@
       </p:sp>
       <p:sp>
         <p:nvSpPr>
-          <p:cNvPr id="9" name="TextBox 8"/>
+          <p:cNvPr id="10" name="TextBox 9"/>
           <p:cNvSpPr txBox="1"/>
           <p:nvPr/>
         </p:nvSpPr>
@@ -32566,7 +34804,7 @@
       </p:sp>
       <p:sp>
         <p:nvSpPr>
-          <p:cNvPr id="10" name="TextBox 9"/>
+          <p:cNvPr id="11" name="TextBox 10"/>
           <p:cNvSpPr txBox="1"/>
           <p:nvPr/>
         </p:nvSpPr>
@@ -32601,14 +34839,14 @@
               <a:rPr>
                 <a:latin typeface="Inter"/>
               </a:rPr>
-              <a:t>DRAFT — for committee review · Illustrative data · Data as of 2026-09-30</a:t>
-            </a:r>
-          </a:p>
-        </p:txBody>
-      </p:sp>
-      <p:sp>
-        <p:nvSpPr>
-          <p:cNvPr id="11" name="TextBox 10"/>
+              <a:t>Confidential — Investment Committee · Data as of 2026-09-30</a:t>
+            </a:r>
+          </a:p>
+        </p:txBody>
+      </p:sp>
+      <p:sp>
+        <p:nvSpPr>
+          <p:cNvPr id="12" name="TextBox 11"/>
           <p:cNvSpPr txBox="1"/>
           <p:nvPr/>
         </p:nvSpPr>
@@ -32723,6 +34961,48 @@
         </p:nvSpPr>
         <p:spPr>
           <a:xfrm>
+            <a:off x="5897880" y="310896"/>
+            <a:ext cx="4800600" cy="256032"/>
+          </a:xfrm>
+          <a:prstGeom prst="rect">
+            <a:avLst/>
+          </a:prstGeom>
+          <a:noFill/>
+        </p:spPr>
+        <p:txBody>
+          <a:bodyPr wrap="none" lIns="9144" rIns="9144" tIns="9144" bIns="9144" anchor="t">
+            <a:spAutoFit/>
+          </a:bodyPr>
+          <a:lstStyle/>
+          <a:p>
+            <a:pPr algn="r">
+              <a:spcAft>
+                <a:spcPts val="0"/>
+              </a:spcAft>
+              <a:defRPr sz="680" b="1">
+                <a:solidFill>
+                  <a:srgbClr val="4F6B00"/>
+                </a:solidFill>
+                <a:latin typeface="Inter"/>
+              </a:defRPr>
+            </a:pPr>
+            <a:r>
+              <a:rPr>
+                <a:latin typeface="Inter"/>
+              </a:rPr>
+              <a:t>Illustrative, Gradient Maintained — demo data, not the client's holdings or managers</a:t>
+            </a:r>
+          </a:p>
+        </p:txBody>
+      </p:sp>
+      <p:sp>
+        <p:nvSpPr>
+          <p:cNvPr id="4" name="TextBox 3"/>
+          <p:cNvSpPr txBox="1"/>
+          <p:nvPr/>
+        </p:nvSpPr>
+        <p:spPr>
+          <a:xfrm>
             <a:off x="640080" y="566928"/>
             <a:ext cx="10058400" cy="530352"/>
           </a:xfrm>
@@ -32759,7 +35039,7 @@
       </p:sp>
       <p:sp>
         <p:nvSpPr>
-          <p:cNvPr id="4" name="Rectangle 3"/>
+          <p:cNvPr id="5" name="Rectangle 4"/>
           <p:cNvSpPr/>
           <p:nvPr/>
         </p:nvSpPr>
@@ -32808,7 +35088,7 @@
       </p:sp>
       <p:sp>
         <p:nvSpPr>
-          <p:cNvPr id="5" name="Rectangle 4"/>
+          <p:cNvPr id="6" name="Rectangle 5"/>
           <p:cNvSpPr/>
           <p:nvPr/>
         </p:nvSpPr>
@@ -32857,7 +35137,7 @@
       </p:sp>
       <p:sp>
         <p:nvSpPr>
-          <p:cNvPr id="6" name="TextBox 5"/>
+          <p:cNvPr id="7" name="TextBox 6"/>
           <p:cNvSpPr txBox="1"/>
           <p:nvPr/>
         </p:nvSpPr>
@@ -32899,7 +35179,7 @@
       </p:sp>
       <p:sp>
         <p:nvSpPr>
-          <p:cNvPr id="7" name="TextBox 6"/>
+          <p:cNvPr id="8" name="TextBox 7"/>
           <p:cNvSpPr txBox="1"/>
           <p:nvPr/>
         </p:nvSpPr>
@@ -32979,7 +35259,7 @@
       </p:sp>
       <p:sp>
         <p:nvSpPr>
-          <p:cNvPr id="8" name="Rectangle 7"/>
+          <p:cNvPr id="9" name="Rectangle 8"/>
           <p:cNvSpPr/>
           <p:nvPr/>
         </p:nvSpPr>
@@ -33028,7 +35308,7 @@
       </p:sp>
       <p:sp>
         <p:nvSpPr>
-          <p:cNvPr id="9" name="TextBox 8"/>
+          <p:cNvPr id="10" name="TextBox 9"/>
           <p:cNvSpPr txBox="1"/>
           <p:nvPr/>
         </p:nvSpPr>
@@ -33070,7 +35350,7 @@
       </p:sp>
       <p:sp>
         <p:nvSpPr>
-          <p:cNvPr id="10" name="TextBox 9"/>
+          <p:cNvPr id="11" name="TextBox 10"/>
           <p:cNvSpPr txBox="1"/>
           <p:nvPr/>
         </p:nvSpPr>
@@ -33105,14 +35385,14 @@
               <a:rPr>
                 <a:latin typeface="Inter"/>
               </a:rPr>
-              <a:t>DRAFT — for committee review · Illustrative data · Data as of 2026-09-30</a:t>
-            </a:r>
-          </a:p>
-        </p:txBody>
-      </p:sp>
-      <p:sp>
-        <p:nvSpPr>
-          <p:cNvPr id="11" name="TextBox 10"/>
+              <a:t>Confidential — Investment Committee · Data as of 2026-09-30</a:t>
+            </a:r>
+          </a:p>
+        </p:txBody>
+      </p:sp>
+      <p:sp>
+        <p:nvSpPr>
+          <p:cNvPr id="12" name="TextBox 11"/>
           <p:cNvSpPr txBox="1"/>
           <p:nvPr/>
         </p:nvSpPr>
@@ -33227,6 +35507,48 @@
         </p:nvSpPr>
         <p:spPr>
           <a:xfrm>
+            <a:off x="5897880" y="310896"/>
+            <a:ext cx="4800600" cy="256032"/>
+          </a:xfrm>
+          <a:prstGeom prst="rect">
+            <a:avLst/>
+          </a:prstGeom>
+          <a:noFill/>
+        </p:spPr>
+        <p:txBody>
+          <a:bodyPr wrap="none" lIns="9144" rIns="9144" tIns="9144" bIns="9144" anchor="t">
+            <a:spAutoFit/>
+          </a:bodyPr>
+          <a:lstStyle/>
+          <a:p>
+            <a:pPr algn="r">
+              <a:spcAft>
+                <a:spcPts val="0"/>
+              </a:spcAft>
+              <a:defRPr sz="680" b="1">
+                <a:solidFill>
+                  <a:srgbClr val="4F6B00"/>
+                </a:solidFill>
+                <a:latin typeface="Inter"/>
+              </a:defRPr>
+            </a:pPr>
+            <a:r>
+              <a:rPr>
+                <a:latin typeface="Inter"/>
+              </a:rPr>
+              <a:t>Illustrative, Gradient Maintained — demo data, not the client's holdings or managers</a:t>
+            </a:r>
+          </a:p>
+        </p:txBody>
+      </p:sp>
+      <p:sp>
+        <p:nvSpPr>
+          <p:cNvPr id="4" name="TextBox 3"/>
+          <p:cNvSpPr txBox="1"/>
+          <p:nvPr/>
+        </p:nvSpPr>
+        <p:spPr>
+          <a:xfrm>
             <a:off x="640080" y="566928"/>
             <a:ext cx="10058400" cy="530352"/>
           </a:xfrm>
@@ -33256,14 +35578,14 @@
               <a:rPr>
                 <a:latin typeface="Inter"/>
               </a:rPr>
-              <a:t>Appendix — Sources</a:t>
-            </a:r>
-          </a:p>
-        </p:txBody>
-      </p:sp>
-      <p:sp>
-        <p:nvSpPr>
-          <p:cNvPr id="4" name="Rectangle 3"/>
+              <a:t>Appendix — Sources and methods</a:t>
+            </a:r>
+          </a:p>
+        </p:txBody>
+      </p:sp>
+      <p:sp>
+        <p:nvSpPr>
+          <p:cNvPr id="5" name="Rectangle 4"/>
           <p:cNvSpPr/>
           <p:nvPr/>
         </p:nvSpPr>
@@ -33312,7 +35634,7 @@
       </p:sp>
       <p:sp>
         <p:nvSpPr>
-          <p:cNvPr id="5" name="Rectangle 4"/>
+          <p:cNvPr id="6" name="Rectangle 5"/>
           <p:cNvSpPr/>
           <p:nvPr/>
         </p:nvSpPr>
@@ -33361,7 +35683,7 @@
       </p:sp>
       <p:sp>
         <p:nvSpPr>
-          <p:cNvPr id="6" name="TextBox 5"/>
+          <p:cNvPr id="7" name="TextBox 6"/>
           <p:cNvSpPr txBox="1"/>
           <p:nvPr/>
         </p:nvSpPr>
@@ -33403,7 +35725,7 @@
       </p:sp>
       <p:sp>
         <p:nvSpPr>
-          <p:cNvPr id="7" name="TextBox 6"/>
+          <p:cNvPr id="8" name="TextBox 7"/>
           <p:cNvSpPr txBox="1"/>
           <p:nvPr/>
         </p:nvSpPr>
@@ -33438,7 +35760,7 @@
               <a:rPr>
                 <a:latin typeface="Inter"/>
               </a:rPr>
-              <a:t>·  Ref  ·  Source  ·  Parameters  ·  As of  ·  Data scope  ·  Validation  ·  Digest  · </a:t>
+              <a:t>Illustrative, Gradient Maintained — demo data, not the client's holdings or managers. All organizations,</a:t>
             </a:r>
             <a:br/>
             <a:br/>
@@ -33446,7 +35768,7 @@
               <a:rPr>
                 <a:latin typeface="Inter"/>
               </a:rPr>
-              <a:t> ·  S1  ·  get_portfolio_exposure; get_portfolio_structure; check_portfolio_policy  ·  portfolio_id=example; governed policy and exposure views  ·  2026-09-30  ·  Illustrative, Gradient Maintained — demo data, not the client's holdings or managers  ·  passed  ·  n/a  · </a:t>
+              <a:t>portfolios, managers and results in this public example are illustrative.</a:t>
             </a:r>
             <a:br/>
             <a:br/>
@@ -33454,7 +35776,7 @@
               <a:rPr>
                 <a:latin typeface="Inter"/>
               </a:rPr>
-              <a:t> ·  S2  ·  get_portfolio_historical_returns; get_portfolio_attribution  ·  portfolio_id=example; policy benchmark; performance available; attribution unavailable (no_weight_cohorts)  ·  2026-09-30  ·  Illustrative, Gradient Maintained — demo data, not the client's holdings or managers  ·  partial  ·  n/a  · </a:t>
+              <a:t> ·  Ref  ·  Evidence  ·  Basis  ·  Tool / view  ·  Key parameters  ·  As of  ·  Data scope  ·  Validation  ·  Digest  · </a:t>
             </a:r>
             <a:br/>
             <a:br/>
@@ -33462,7 +35784,7 @@
               <a:rPr>
                 <a:latin typeface="Inter"/>
               </a:rPr>
-              <a:t> ·  S3  ·  check_portfolio_policy; user document  ·  return_objective; forward-analysis.pdf  ·  2026-09-11  ·  Illustrative, Gradient Maintained — demo data, not the client's holdings or managers  ·  passed  ·  n/a  · </a:t>
+              <a:t> ·  S1  ·  get_portfolio_exposure; get_portfolio_structure; check_portfolio_policy  ·  gradient_tool  ·  get_portfolio_exposure; get_portfolio_structure; check_portfolio_policy  ·  portfolio_id=example; governed policy and exposure views  ·  2026-09-30  ·  Illustrative, Gradient Maintained — demo data, not the client's holdings or managers  ·  passed  ·  sha256:test-s1  · </a:t>
             </a:r>
             <a:br/>
             <a:br/>
@@ -33470,7 +35792,7 @@
               <a:rPr>
                 <a:latin typeface="Inter"/>
               </a:rPr>
-              <a:t> ·  S4  ·  get_cma_consensus_check  ·  mode=allocation  ·  2026-06-30  ·  Mixed — Illustrative, Gradient Maintained — demo data, not the client's holdings or managers + User-Authorized Live  ·  passed  ·  n/a  · </a:t>
+              <a:t> ·  S2  ·  get_portfolio_historical_returns; get_portfolio_attribution  ·  gradient_tool  ·  get_portfolio_historical_returns; get_portfolio_attribution  ·  portfolio_id=example; policy benchmark; performance available; attribution unavailable (no_weight_cohorts)  ·  2026-09-30  ·  Illustrative, Gradient Maintained — demo data, not the client's holdings or managers  ·  partial  ·  sha256:test-s2  · </a:t>
             </a:r>
             <a:br/>
             <a:br/>
@@ -33478,7 +35800,7 @@
               <a:rPr>
                 <a:latin typeface="Inter"/>
               </a:rPr>
-              <a:t> ·  S5  ·  get_manager_diligence_findings  ·  view=exposure_weighted  ·  2026-10-02  ·  Illustrative, Gradient Maintained — demo data, not the client's holdings or managers  ·  advisory  ·  n/a  · </a:t>
+              <a:t> ·  S3  ·  check_portfolio_policy; user document  ·  gradient_tool  ·  check_portfolio_policy  ·  return_objective; forward-analysis.pdf  ·  2026-09-11  ·  Illustrative, Gradient Maintained — demo data, not the client's holdings or managers  ·  passed  ·  sha256:test-s3  · </a:t>
             </a:r>
             <a:br/>
             <a:br/>
@@ -33486,7 +35808,7 @@
               <a:rPr>
                 <a:latin typeface="Inter"/>
               </a:rPr>
-              <a:t> ·  S6  ·  get_chart_data  ·  portfolio_id=example; analysis_type=allocations  ·  2026-09-30  ·  Illustrative, Gradient Maintained — demo data, not the client's holdings or managers  ·  passed  ·  n/a  · </a:t>
+              <a:t> ·  S4  ·  get_cma_consensus_check  ·  gradient_tool  ·  get_cma_consensus_check  ·  mode=allocation  ·  2026-06-30  ·  Mixed — Illustrative, Gradient Maintained — demo data, not the client's holdings or managers + User-Authorized Live  ·  passed  ·  sha256:test-s4  · </a:t>
             </a:r>
             <a:br/>
             <a:br/>
@@ -33494,7 +35816,7 @@
               <a:rPr>
                 <a:latin typeface="Inter"/>
               </a:rPr>
-              <a:t> ·  S7  ·  get_macro_signals  ·  view=gradient_signal (sources.grip)  ·  2026-10-01  ·  User-Authorized Live  ·  passed  ·  n/a  · </a:t>
+              <a:t> ·  S5  ·  get_manager_diligence_findings  ·  gradient_tool  ·  get_manager_diligence_findings  ·  view=exposure_weighted  ·  2026-10-02  ·  Illustrative, Gradient Maintained — demo data, not the client's holdings or managers  ·  advisory  ·  sha256:test-s5  · </a:t>
             </a:r>
             <a:br/>
             <a:br/>
@@ -33502,7 +35824,7 @@
               <a:rPr>
                 <a:latin typeface="Inter"/>
               </a:rPr>
-              <a:t> ·  S8  ·  Illustrative scenario assumptions  ·  2008 historical; 5th percentile  ·  2026-09-30  ·  Illustrative, Gradient Maintained — demo data, not the client's holdings or managers  ·  not applicable  ·  n/a  · </a:t>
+              <a:t> ·  S6  ·  get_chart_data  ·  gradient_tool  ·  get_chart_data  ·  portfolio_id=example; analysis_type=allocations  ·  2026-09-30  ·  Illustrative, Gradient Maintained — demo data, not the client's holdings or managers  ·  passed  ·  sha256:test-s6  · </a:t>
             </a:r>
             <a:br/>
             <a:br/>
@@ -33510,7 +35832,7 @@
               <a:rPr>
                 <a:latin typeface="Inter"/>
               </a:rPr>
-              <a:t> ·  S9  ·  get_chart_data  ·  portfolio_id=example; analysis_type=commitments  ·  2026-06-30  ·  Illustrative, Gradient Maintained — demo data, not the client's holdings or managers  ·  passed  ·  n/a  · </a:t>
+              <a:t> ·  S7  ·  get_macro_signals  ·  gradient_tool  ·  get_macro_signals  ·  view=gradient_signal (sources.grip)  ·  2026-10-01  ·  User-Authorized Live  ·  passed  ·  sha256:test-s7  · </a:t>
             </a:r>
             <a:br/>
             <a:br/>
@@ -33518,7 +35840,7 @@
               <a:rPr>
                 <a:latin typeface="Inter"/>
               </a:rPr>
-              <a:t> ·  S10  ·  get_macro_conditions; get_the_read; get_macro_calendar  ·  theme=inflation; am edition; 30 days  ·  2026-10-02  ·  User-Authorized Live  ·  passed  ·  n/a  · </a:t>
+              <a:t> ·  S8  ·  Illustrative scenario assumptions  ·  user_document  ·  User-supplied assumptions  ·  2008 historical; 5th percentile  ·  2026-09-30  ·  Illustrative, Gradient Maintained — demo data, not the client's holdings or managers  ·  not applicable  ·  sha256:test-s8  · </a:t>
             </a:r>
             <a:br/>
             <a:br/>
@@ -33526,14 +35848,30 @@
               <a:rPr>
                 <a:latin typeface="Inter"/>
               </a:rPr>
-              <a:t> ·  S11  ·  Server-returned illustrative proposed-case analysis  ·  target weights and implementation estimate per Section 13.1  ·  2026-09-30  ·  Illustrative, Gradient Maintained — demo data, not the client's holdings or managers  ·  passed  ·  n/a  ·</a:t>
-            </a:r>
-          </a:p>
-        </p:txBody>
-      </p:sp>
-      <p:sp>
-        <p:nvSpPr>
-          <p:cNvPr id="8" name="Rectangle 7"/>
+              <a:t> ·  S9  ·  get_chart_data  ·  gradient_tool  ·  get_chart_data  ·  portfolio_id=example; analysis_type=commitments  ·  2026-06-30  ·  Illustrative, Gradient Maintained — demo data, not the client's holdings or managers  ·  passed  ·  sha256:test-s9  · </a:t>
+            </a:r>
+            <a:br/>
+            <a:br/>
+            <a:r>
+              <a:rPr>
+                <a:latin typeface="Inter"/>
+              </a:rPr>
+              <a:t> ·  S10  ·  get_macro_conditions; get_the_read; get_macro_calendar  ·  gradient_tool  ·  get_macro_conditions; get_the_read; get_macro_calendar  ·  theme=inflation; am edition; 30 days  ·  2026-10-02  ·  User-Authorized Live  ·  passed  ·  sha256:test-s10  · </a:t>
+            </a:r>
+            <a:br/>
+            <a:br/>
+            <a:r>
+              <a:rPr>
+                <a:latin typeface="Inter"/>
+              </a:rPr>
+              <a:t> ·  S11  ·  Server-returned illustrative proposed-case analysis  ·  user_document  ·  User-supplied assumptions  ·  target weights and implementation estimate per Section 13.1  ·  2026-09-30  ·  Illustrative, Gradient Maintained — demo data, not the client's holdings or managers  ·  passed  ·  sha256:test-s11  ·</a:t>
+            </a:r>
+          </a:p>
+        </p:txBody>
+      </p:sp>
+      <p:sp>
+        <p:nvSpPr>
+          <p:cNvPr id="9" name="Rectangle 8"/>
           <p:cNvSpPr/>
           <p:nvPr/>
         </p:nvSpPr>
@@ -33582,7 +35920,7 @@
       </p:sp>
       <p:sp>
         <p:nvSpPr>
-          <p:cNvPr id="9" name="TextBox 8"/>
+          <p:cNvPr id="10" name="TextBox 9"/>
           <p:cNvSpPr txBox="1"/>
           <p:nvPr/>
         </p:nvSpPr>
@@ -33624,7 +35962,7 @@
       </p:sp>
       <p:sp>
         <p:nvSpPr>
-          <p:cNvPr id="10" name="TextBox 9"/>
+          <p:cNvPr id="11" name="TextBox 10"/>
           <p:cNvSpPr txBox="1"/>
           <p:nvPr/>
         </p:nvSpPr>
@@ -33659,14 +35997,14 @@
               <a:rPr>
                 <a:latin typeface="Inter"/>
               </a:rPr>
-              <a:t>DRAFT — for committee review · Illustrative data · Data as of 2026-09-30</a:t>
-            </a:r>
-          </a:p>
-        </p:txBody>
-      </p:sp>
-      <p:sp>
-        <p:nvSpPr>
-          <p:cNvPr id="11" name="TextBox 10"/>
+              <a:t>Confidential — Investment Committee · Data as of 2026-09-30</a:t>
+            </a:r>
+          </a:p>
+        </p:txBody>
+      </p:sp>
+      <p:sp>
+        <p:nvSpPr>
+          <p:cNvPr id="12" name="TextBox 11"/>
           <p:cNvSpPr txBox="1"/>
           <p:nvPr/>
         </p:nvSpPr>
@@ -33781,6 +36119,48 @@
         </p:nvSpPr>
         <p:spPr>
           <a:xfrm>
+            <a:off x="5897880" y="310896"/>
+            <a:ext cx="4800600" cy="256032"/>
+          </a:xfrm>
+          <a:prstGeom prst="rect">
+            <a:avLst/>
+          </a:prstGeom>
+          <a:noFill/>
+        </p:spPr>
+        <p:txBody>
+          <a:bodyPr wrap="none" lIns="9144" rIns="9144" tIns="9144" bIns="9144" anchor="t">
+            <a:spAutoFit/>
+          </a:bodyPr>
+          <a:lstStyle/>
+          <a:p>
+            <a:pPr algn="r">
+              <a:spcAft>
+                <a:spcPts val="0"/>
+              </a:spcAft>
+              <a:defRPr sz="680" b="1">
+                <a:solidFill>
+                  <a:srgbClr val="4F6B00"/>
+                </a:solidFill>
+                <a:latin typeface="Inter"/>
+              </a:defRPr>
+            </a:pPr>
+            <a:r>
+              <a:rPr>
+                <a:latin typeface="Inter"/>
+              </a:rPr>
+              <a:t>Illustrative, Gradient Maintained — demo data, not the client's holdings or managers</a:t>
+            </a:r>
+          </a:p>
+        </p:txBody>
+      </p:sp>
+      <p:sp>
+        <p:nvSpPr>
+          <p:cNvPr id="4" name="TextBox 3"/>
+          <p:cNvSpPr txBox="1"/>
+          <p:nvPr/>
+        </p:nvSpPr>
+        <p:spPr>
+          <a:xfrm>
             <a:off x="640080" y="566928"/>
             <a:ext cx="10058400" cy="530352"/>
           </a:xfrm>
@@ -33817,7 +36197,7 @@
       </p:sp>
       <p:sp>
         <p:nvSpPr>
-          <p:cNvPr id="4" name="Rectangle 3"/>
+          <p:cNvPr id="5" name="Rectangle 4"/>
           <p:cNvSpPr/>
           <p:nvPr/>
         </p:nvSpPr>
@@ -33866,7 +36246,7 @@
       </p:sp>
       <p:sp>
         <p:nvSpPr>
-          <p:cNvPr id="5" name="Rectangle 4"/>
+          <p:cNvPr id="6" name="Rectangle 5"/>
           <p:cNvSpPr/>
           <p:nvPr/>
         </p:nvSpPr>
@@ -33915,7 +36295,7 @@
       </p:sp>
       <p:sp>
         <p:nvSpPr>
-          <p:cNvPr id="6" name="TextBox 5"/>
+          <p:cNvPr id="7" name="TextBox 6"/>
           <p:cNvSpPr txBox="1"/>
           <p:nvPr/>
         </p:nvSpPr>
@@ -33957,7 +36337,7 @@
       </p:sp>
       <p:sp>
         <p:nvSpPr>
-          <p:cNvPr id="7" name="TextBox 6"/>
+          <p:cNvPr id="8" name="TextBox 7"/>
           <p:cNvSpPr txBox="1"/>
           <p:nvPr/>
         </p:nvSpPr>
@@ -34039,7 +36419,7 @@
       </p:sp>
       <p:sp>
         <p:nvSpPr>
-          <p:cNvPr id="8" name="Rectangle 7"/>
+          <p:cNvPr id="9" name="Rectangle 8"/>
           <p:cNvSpPr/>
           <p:nvPr/>
         </p:nvSpPr>
@@ -34088,7 +36468,7 @@
       </p:sp>
       <p:sp>
         <p:nvSpPr>
-          <p:cNvPr id="9" name="TextBox 8"/>
+          <p:cNvPr id="10" name="TextBox 9"/>
           <p:cNvSpPr txBox="1"/>
           <p:nvPr/>
         </p:nvSpPr>
@@ -34130,7 +36510,7 @@
       </p:sp>
       <p:sp>
         <p:nvSpPr>
-          <p:cNvPr id="10" name="TextBox 9"/>
+          <p:cNvPr id="11" name="TextBox 10"/>
           <p:cNvSpPr txBox="1"/>
           <p:nvPr/>
         </p:nvSpPr>
@@ -34165,14 +36545,14 @@
               <a:rPr>
                 <a:latin typeface="Inter"/>
               </a:rPr>
-              <a:t>DRAFT — for committee review · Illustrative data · Data as of 2026-09-30</a:t>
-            </a:r>
-          </a:p>
-        </p:txBody>
-      </p:sp>
-      <p:sp>
-        <p:nvSpPr>
-          <p:cNvPr id="11" name="TextBox 10"/>
+              <a:t>Confidential — Investment Committee · Data as of 2026-09-30</a:t>
+            </a:r>
+          </a:p>
+        </p:txBody>
+      </p:sp>
+      <p:sp>
+        <p:nvSpPr>
+          <p:cNvPr id="12" name="TextBox 11"/>
           <p:cNvSpPr txBox="1"/>
           <p:nvPr/>
         </p:nvSpPr>
@@ -34287,6 +36667,48 @@
         </p:nvSpPr>
         <p:spPr>
           <a:xfrm>
+            <a:off x="5897880" y="310896"/>
+            <a:ext cx="4800600" cy="256032"/>
+          </a:xfrm>
+          <a:prstGeom prst="rect">
+            <a:avLst/>
+          </a:prstGeom>
+          <a:noFill/>
+        </p:spPr>
+        <p:txBody>
+          <a:bodyPr wrap="none" lIns="9144" rIns="9144" tIns="9144" bIns="9144" anchor="t">
+            <a:spAutoFit/>
+          </a:bodyPr>
+          <a:lstStyle/>
+          <a:p>
+            <a:pPr algn="r">
+              <a:spcAft>
+                <a:spcPts val="0"/>
+              </a:spcAft>
+              <a:defRPr sz="680" b="1">
+                <a:solidFill>
+                  <a:srgbClr val="4F6B00"/>
+                </a:solidFill>
+                <a:latin typeface="Inter"/>
+              </a:defRPr>
+            </a:pPr>
+            <a:r>
+              <a:rPr>
+                <a:latin typeface="Inter"/>
+              </a:rPr>
+              <a:t>Illustrative, Gradient Maintained — demo data, not the client's holdings or managers</a:t>
+            </a:r>
+          </a:p>
+        </p:txBody>
+      </p:sp>
+      <p:sp>
+        <p:nvSpPr>
+          <p:cNvPr id="4" name="TextBox 3"/>
+          <p:cNvSpPr txBox="1"/>
+          <p:nvPr/>
+        </p:nvSpPr>
+        <p:spPr>
+          <a:xfrm>
             <a:off x="640080" y="566928"/>
             <a:ext cx="10058400" cy="530352"/>
           </a:xfrm>
@@ -34323,7 +36745,7 @@
       </p:sp>
       <p:sp>
         <p:nvSpPr>
-          <p:cNvPr id="4" name="Rectangle 3"/>
+          <p:cNvPr id="5" name="Rectangle 4"/>
           <p:cNvSpPr/>
           <p:nvPr/>
         </p:nvSpPr>
@@ -34372,7 +36794,7 @@
       </p:sp>
       <p:sp>
         <p:nvSpPr>
-          <p:cNvPr id="5" name="Rectangle 4"/>
+          <p:cNvPr id="6" name="Rectangle 5"/>
           <p:cNvSpPr/>
           <p:nvPr/>
         </p:nvSpPr>
@@ -34421,7 +36843,7 @@
       </p:sp>
       <p:sp>
         <p:nvSpPr>
-          <p:cNvPr id="6" name="TextBox 5"/>
+          <p:cNvPr id="7" name="TextBox 6"/>
           <p:cNvSpPr txBox="1"/>
           <p:nvPr/>
         </p:nvSpPr>
@@ -34463,7 +36885,7 @@
       </p:sp>
       <p:sp>
         <p:nvSpPr>
-          <p:cNvPr id="7" name="TextBox 6"/>
+          <p:cNvPr id="8" name="TextBox 7"/>
           <p:cNvSpPr txBox="1"/>
           <p:nvPr/>
         </p:nvSpPr>
@@ -34676,7 +37098,7 @@
       </p:sp>
       <p:sp>
         <p:nvSpPr>
-          <p:cNvPr id="8" name="Rectangle 7"/>
+          <p:cNvPr id="9" name="Rectangle 8"/>
           <p:cNvSpPr/>
           <p:nvPr/>
         </p:nvSpPr>
@@ -34725,7 +37147,7 @@
       </p:sp>
       <p:sp>
         <p:nvSpPr>
-          <p:cNvPr id="9" name="TextBox 8"/>
+          <p:cNvPr id="10" name="TextBox 9"/>
           <p:cNvSpPr txBox="1"/>
           <p:nvPr/>
         </p:nvSpPr>
@@ -34767,7 +37189,7 @@
       </p:sp>
       <p:sp>
         <p:nvSpPr>
-          <p:cNvPr id="10" name="TextBox 9"/>
+          <p:cNvPr id="11" name="TextBox 10"/>
           <p:cNvSpPr txBox="1"/>
           <p:nvPr/>
         </p:nvSpPr>
@@ -34802,14 +37224,14 @@
               <a:rPr>
                 <a:latin typeface="Inter"/>
               </a:rPr>
-              <a:t>DRAFT — for committee review · Illustrative data · Data as of 2026-09-30</a:t>
-            </a:r>
-          </a:p>
-        </p:txBody>
-      </p:sp>
-      <p:sp>
-        <p:nvSpPr>
-          <p:cNvPr id="11" name="TextBox 10"/>
+              <a:t>Confidential — Investment Committee · Data as of 2026-09-30</a:t>
+            </a:r>
+          </a:p>
+        </p:txBody>
+      </p:sp>
+      <p:sp>
+        <p:nvSpPr>
+          <p:cNvPr id="12" name="TextBox 11"/>
           <p:cNvSpPr txBox="1"/>
           <p:nvPr/>
         </p:nvSpPr>
@@ -34924,6 +37346,48 @@
         </p:nvSpPr>
         <p:spPr>
           <a:xfrm>
+            <a:off x="5897880" y="310896"/>
+            <a:ext cx="4800600" cy="256032"/>
+          </a:xfrm>
+          <a:prstGeom prst="rect">
+            <a:avLst/>
+          </a:prstGeom>
+          <a:noFill/>
+        </p:spPr>
+        <p:txBody>
+          <a:bodyPr wrap="none" lIns="9144" rIns="9144" tIns="9144" bIns="9144" anchor="t">
+            <a:spAutoFit/>
+          </a:bodyPr>
+          <a:lstStyle/>
+          <a:p>
+            <a:pPr algn="r">
+              <a:spcAft>
+                <a:spcPts val="0"/>
+              </a:spcAft>
+              <a:defRPr sz="680" b="1">
+                <a:solidFill>
+                  <a:srgbClr val="4F6B00"/>
+                </a:solidFill>
+                <a:latin typeface="Inter"/>
+              </a:defRPr>
+            </a:pPr>
+            <a:r>
+              <a:rPr>
+                <a:latin typeface="Inter"/>
+              </a:rPr>
+              <a:t>Illustrative, Gradient Maintained — demo data, not the client's holdings or managers</a:t>
+            </a:r>
+          </a:p>
+        </p:txBody>
+      </p:sp>
+      <p:sp>
+        <p:nvSpPr>
+          <p:cNvPr id="4" name="TextBox 3"/>
+          <p:cNvSpPr txBox="1"/>
+          <p:nvPr/>
+        </p:nvSpPr>
+        <p:spPr>
+          <a:xfrm>
             <a:off x="640080" y="566928"/>
             <a:ext cx="10058400" cy="530352"/>
           </a:xfrm>
@@ -34960,7 +37424,7 @@
       </p:sp>
       <p:sp>
         <p:nvSpPr>
-          <p:cNvPr id="4" name="Rectangle 3"/>
+          <p:cNvPr id="5" name="Rectangle 4"/>
           <p:cNvSpPr/>
           <p:nvPr/>
         </p:nvSpPr>
@@ -35009,7 +37473,7 @@
       </p:sp>
       <p:sp>
         <p:nvSpPr>
-          <p:cNvPr id="5" name="Rectangle 4"/>
+          <p:cNvPr id="6" name="Rectangle 5"/>
           <p:cNvSpPr/>
           <p:nvPr/>
         </p:nvSpPr>
@@ -35058,7 +37522,7 @@
       </p:sp>
       <p:sp>
         <p:nvSpPr>
-          <p:cNvPr id="6" name="TextBox 5"/>
+          <p:cNvPr id="7" name="TextBox 6"/>
           <p:cNvSpPr txBox="1"/>
           <p:nvPr/>
         </p:nvSpPr>
@@ -35100,7 +37564,7 @@
       </p:sp>
       <p:sp>
         <p:nvSpPr>
-          <p:cNvPr id="7" name="TextBox 6"/>
+          <p:cNvPr id="8" name="TextBox 7"/>
           <p:cNvSpPr txBox="1"/>
           <p:nvPr/>
         </p:nvSpPr>
@@ -35135,14 +37599,14 @@
               <a:rPr>
                 <a:latin typeface="Inter"/>
               </a:rPr>
-              <a:t>DECISION RANGES (TEST)</a:t>
-            </a:r>
-          </a:p>
-        </p:txBody>
-      </p:sp>
-      <p:sp>
-        <p:nvSpPr>
-          <p:cNvPr id="8" name="TextBox 7"/>
+              <a:t>DECISION RANGES</a:t>
+            </a:r>
+          </a:p>
+        </p:txBody>
+      </p:sp>
+      <p:sp>
+        <p:nvSpPr>
+          <p:cNvPr id="9" name="TextBox 8"/>
           <p:cNvSpPr txBox="1"/>
           <p:nvPr/>
         </p:nvSpPr>
@@ -35184,7 +37648,7 @@
       </p:sp>
       <p:sp>
         <p:nvSpPr>
-          <p:cNvPr id="9" name="Rectangle 8"/>
+          <p:cNvPr id="10" name="Rectangle 9"/>
           <p:cNvSpPr/>
           <p:nvPr/>
         </p:nvSpPr>
@@ -35233,7 +37697,7 @@
       </p:sp>
       <p:sp>
         <p:nvSpPr>
-          <p:cNvPr id="10" name="Oval 9"/>
+          <p:cNvPr id="11" name="Oval 10"/>
           <p:cNvSpPr/>
           <p:nvPr/>
         </p:nvSpPr>
@@ -35282,7 +37746,7 @@
       </p:sp>
       <p:sp>
         <p:nvSpPr>
-          <p:cNvPr id="11" name="Rectangle 10"/>
+          <p:cNvPr id="12" name="Rectangle 11"/>
           <p:cNvSpPr/>
           <p:nvPr/>
         </p:nvSpPr>
@@ -35331,7 +37795,7 @@
       </p:sp>
       <p:sp>
         <p:nvSpPr>
-          <p:cNvPr id="12" name="TextBox 11"/>
+          <p:cNvPr id="13" name="TextBox 12"/>
           <p:cNvSpPr txBox="1"/>
           <p:nvPr/>
         </p:nvSpPr>
@@ -35373,7 +37837,7 @@
       </p:sp>
       <p:sp>
         <p:nvSpPr>
-          <p:cNvPr id="13" name="Rectangle 12"/>
+          <p:cNvPr id="14" name="Rectangle 13"/>
           <p:cNvSpPr/>
           <p:nvPr/>
         </p:nvSpPr>
@@ -35422,7 +37886,7 @@
       </p:sp>
       <p:sp>
         <p:nvSpPr>
-          <p:cNvPr id="14" name="Oval 13"/>
+          <p:cNvPr id="15" name="Oval 14"/>
           <p:cNvSpPr/>
           <p:nvPr/>
         </p:nvSpPr>
@@ -35471,7 +37935,7 @@
       </p:sp>
       <p:sp>
         <p:nvSpPr>
-          <p:cNvPr id="15" name="Rectangle 14"/>
+          <p:cNvPr id="16" name="Rectangle 15"/>
           <p:cNvSpPr/>
           <p:nvPr/>
         </p:nvSpPr>
@@ -35520,7 +37984,7 @@
       </p:sp>
       <p:sp>
         <p:nvSpPr>
-          <p:cNvPr id="16" name="TextBox 15"/>
+          <p:cNvPr id="17" name="TextBox 16"/>
           <p:cNvSpPr txBox="1"/>
           <p:nvPr/>
         </p:nvSpPr>
@@ -35562,7 +38026,7 @@
       </p:sp>
       <p:sp>
         <p:nvSpPr>
-          <p:cNvPr id="17" name="Rectangle 16"/>
+          <p:cNvPr id="18" name="Rectangle 17"/>
           <p:cNvSpPr/>
           <p:nvPr/>
         </p:nvSpPr>
@@ -35611,7 +38075,7 @@
       </p:sp>
       <p:sp>
         <p:nvSpPr>
-          <p:cNvPr id="18" name="Oval 17"/>
+          <p:cNvPr id="19" name="Oval 18"/>
           <p:cNvSpPr/>
           <p:nvPr/>
         </p:nvSpPr>
@@ -35660,7 +38124,7 @@
       </p:sp>
       <p:sp>
         <p:nvSpPr>
-          <p:cNvPr id="19" name="Rectangle 18"/>
+          <p:cNvPr id="20" name="Rectangle 19"/>
           <p:cNvSpPr/>
           <p:nvPr/>
         </p:nvSpPr>
@@ -35709,7 +38173,7 @@
       </p:sp>
       <p:sp>
         <p:nvSpPr>
-          <p:cNvPr id="20" name="Rectangle 19"/>
+          <p:cNvPr id="21" name="Rectangle 20"/>
           <p:cNvSpPr/>
           <p:nvPr/>
         </p:nvSpPr>
@@ -35758,7 +38222,7 @@
       </p:sp>
       <p:sp>
         <p:nvSpPr>
-          <p:cNvPr id="21" name="TextBox 20"/>
+          <p:cNvPr id="22" name="TextBox 21"/>
           <p:cNvSpPr txBox="1"/>
           <p:nvPr/>
         </p:nvSpPr>
@@ -35800,7 +38264,7 @@
       </p:sp>
       <p:sp>
         <p:nvSpPr>
-          <p:cNvPr id="22" name="TextBox 21"/>
+          <p:cNvPr id="23" name="TextBox 22"/>
           <p:cNvSpPr txBox="1"/>
           <p:nvPr/>
         </p:nvSpPr>
@@ -35835,14 +38299,14 @@
               <a:rPr>
                 <a:latin typeface="Inter"/>
               </a:rPr>
-              <a:t>DRAFT — for committee review · Illustrative data · Data as of 2026-09-30</a:t>
-            </a:r>
-          </a:p>
-        </p:txBody>
-      </p:sp>
-      <p:sp>
-        <p:nvSpPr>
-          <p:cNvPr id="23" name="TextBox 22"/>
+              <a:t>Confidential — Investment Committee · Data as of 2026-09-30</a:t>
+            </a:r>
+          </a:p>
+        </p:txBody>
+      </p:sp>
+      <p:sp>
+        <p:nvSpPr>
+          <p:cNvPr id="24" name="TextBox 23"/>
           <p:cNvSpPr txBox="1"/>
           <p:nvPr/>
         </p:nvSpPr>
@@ -35957,6 +38421,48 @@
         </p:nvSpPr>
         <p:spPr>
           <a:xfrm>
+            <a:off x="5897880" y="310896"/>
+            <a:ext cx="4800600" cy="256032"/>
+          </a:xfrm>
+          <a:prstGeom prst="rect">
+            <a:avLst/>
+          </a:prstGeom>
+          <a:noFill/>
+        </p:spPr>
+        <p:txBody>
+          <a:bodyPr wrap="none" lIns="9144" rIns="9144" tIns="9144" bIns="9144" anchor="t">
+            <a:spAutoFit/>
+          </a:bodyPr>
+          <a:lstStyle/>
+          <a:p>
+            <a:pPr algn="r">
+              <a:spcAft>
+                <a:spcPts val="0"/>
+              </a:spcAft>
+              <a:defRPr sz="680" b="1">
+                <a:solidFill>
+                  <a:srgbClr val="4F6B00"/>
+                </a:solidFill>
+                <a:latin typeface="Inter"/>
+              </a:defRPr>
+            </a:pPr>
+            <a:r>
+              <a:rPr>
+                <a:latin typeface="Inter"/>
+              </a:rPr>
+              <a:t>Illustrative, Gradient Maintained — demo data, not the client's holdings or managers</a:t>
+            </a:r>
+          </a:p>
+        </p:txBody>
+      </p:sp>
+      <p:sp>
+        <p:nvSpPr>
+          <p:cNvPr id="4" name="TextBox 3"/>
+          <p:cNvSpPr txBox="1"/>
+          <p:nvPr/>
+        </p:nvSpPr>
+        <p:spPr>
+          <a:xfrm>
             <a:off x="640080" y="566928"/>
             <a:ext cx="10058400" cy="530352"/>
           </a:xfrm>
@@ -35993,7 +38499,7 @@
       </p:sp>
       <p:sp>
         <p:nvSpPr>
-          <p:cNvPr id="4" name="Rectangle 3"/>
+          <p:cNvPr id="5" name="Rectangle 4"/>
           <p:cNvSpPr/>
           <p:nvPr/>
         </p:nvSpPr>
@@ -36042,7 +38548,7 @@
       </p:sp>
       <p:sp>
         <p:nvSpPr>
-          <p:cNvPr id="5" name="Rectangle 4"/>
+          <p:cNvPr id="6" name="Rectangle 5"/>
           <p:cNvSpPr/>
           <p:nvPr/>
         </p:nvSpPr>
@@ -36091,7 +38597,7 @@
       </p:sp>
       <p:sp>
         <p:nvSpPr>
-          <p:cNvPr id="6" name="TextBox 5"/>
+          <p:cNvPr id="7" name="TextBox 6"/>
           <p:cNvSpPr txBox="1"/>
           <p:nvPr/>
         </p:nvSpPr>
@@ -36133,7 +38639,7 @@
       </p:sp>
       <p:sp>
         <p:nvSpPr>
-          <p:cNvPr id="7" name="Rectangle 6"/>
+          <p:cNvPr id="8" name="Rectangle 7"/>
           <p:cNvSpPr/>
           <p:nvPr/>
         </p:nvSpPr>
@@ -36182,7 +38688,7 @@
       </p:sp>
       <p:sp>
         <p:nvSpPr>
-          <p:cNvPr id="8" name="Rectangle 7"/>
+          <p:cNvPr id="9" name="Rectangle 8"/>
           <p:cNvSpPr/>
           <p:nvPr/>
         </p:nvSpPr>
@@ -36231,7 +38737,7 @@
       </p:sp>
       <p:sp>
         <p:nvSpPr>
-          <p:cNvPr id="9" name="TextBox 8"/>
+          <p:cNvPr id="10" name="TextBox 9"/>
           <p:cNvSpPr txBox="1"/>
           <p:nvPr/>
         </p:nvSpPr>
@@ -36273,7 +38779,7 @@
       </p:sp>
       <p:sp>
         <p:nvSpPr>
-          <p:cNvPr id="10" name="TextBox 9"/>
+          <p:cNvPr id="11" name="TextBox 10"/>
           <p:cNvSpPr txBox="1"/>
           <p:nvPr/>
         </p:nvSpPr>
@@ -36315,7 +38821,7 @@
       </p:sp>
       <p:sp>
         <p:nvSpPr>
-          <p:cNvPr id="11" name="Rectangle 10"/>
+          <p:cNvPr id="12" name="Rectangle 11"/>
           <p:cNvSpPr/>
           <p:nvPr/>
         </p:nvSpPr>
@@ -36364,7 +38870,7 @@
       </p:sp>
       <p:sp>
         <p:nvSpPr>
-          <p:cNvPr id="12" name="Rectangle 11"/>
+          <p:cNvPr id="13" name="Rectangle 12"/>
           <p:cNvSpPr/>
           <p:nvPr/>
         </p:nvSpPr>
@@ -36413,7 +38919,7 @@
       </p:sp>
       <p:sp>
         <p:nvSpPr>
-          <p:cNvPr id="13" name="TextBox 12"/>
+          <p:cNvPr id="14" name="TextBox 13"/>
           <p:cNvSpPr txBox="1"/>
           <p:nvPr/>
         </p:nvSpPr>
@@ -36455,7 +38961,7 @@
       </p:sp>
       <p:sp>
         <p:nvSpPr>
-          <p:cNvPr id="14" name="TextBox 13"/>
+          <p:cNvPr id="15" name="TextBox 14"/>
           <p:cNvSpPr txBox="1"/>
           <p:nvPr/>
         </p:nvSpPr>
@@ -36497,7 +39003,7 @@
       </p:sp>
       <p:sp>
         <p:nvSpPr>
-          <p:cNvPr id="15" name="Rectangle 14"/>
+          <p:cNvPr id="16" name="Rectangle 15"/>
           <p:cNvSpPr/>
           <p:nvPr/>
         </p:nvSpPr>
@@ -36546,7 +39052,7 @@
       </p:sp>
       <p:sp>
         <p:nvSpPr>
-          <p:cNvPr id="16" name="Rectangle 15"/>
+          <p:cNvPr id="17" name="Rectangle 16"/>
           <p:cNvSpPr/>
           <p:nvPr/>
         </p:nvSpPr>
@@ -36595,7 +39101,7 @@
       </p:sp>
       <p:sp>
         <p:nvSpPr>
-          <p:cNvPr id="17" name="TextBox 16"/>
+          <p:cNvPr id="18" name="TextBox 17"/>
           <p:cNvSpPr txBox="1"/>
           <p:nvPr/>
         </p:nvSpPr>
@@ -36637,7 +39143,7 @@
       </p:sp>
       <p:sp>
         <p:nvSpPr>
-          <p:cNvPr id="18" name="TextBox 17"/>
+          <p:cNvPr id="19" name="TextBox 18"/>
           <p:cNvSpPr txBox="1"/>
           <p:nvPr/>
         </p:nvSpPr>
@@ -36679,7 +39185,7 @@
       </p:sp>
       <p:sp>
         <p:nvSpPr>
-          <p:cNvPr id="19" name="Rectangle 18"/>
+          <p:cNvPr id="20" name="Rectangle 19"/>
           <p:cNvSpPr/>
           <p:nvPr/>
         </p:nvSpPr>
@@ -36728,7 +39234,7 @@
       </p:sp>
       <p:sp>
         <p:nvSpPr>
-          <p:cNvPr id="20" name="TextBox 19"/>
+          <p:cNvPr id="21" name="TextBox 20"/>
           <p:cNvSpPr txBox="1"/>
           <p:nvPr/>
         </p:nvSpPr>
@@ -36770,7 +39276,7 @@
       </p:sp>
       <p:sp>
         <p:nvSpPr>
-          <p:cNvPr id="21" name="TextBox 20"/>
+          <p:cNvPr id="22" name="TextBox 21"/>
           <p:cNvSpPr txBox="1"/>
           <p:nvPr/>
         </p:nvSpPr>
@@ -36805,14 +39311,14 @@
               <a:rPr>
                 <a:latin typeface="Inter"/>
               </a:rPr>
-              <a:t>DRAFT — for committee review · Illustrative data · Data as of 2026-09-30</a:t>
-            </a:r>
-          </a:p>
-        </p:txBody>
-      </p:sp>
-      <p:sp>
-        <p:nvSpPr>
-          <p:cNvPr id="22" name="TextBox 21"/>
+              <a:t>Confidential — Investment Committee · Data as of 2026-09-30</a:t>
+            </a:r>
+          </a:p>
+        </p:txBody>
+      </p:sp>
+      <p:sp>
+        <p:nvSpPr>
+          <p:cNvPr id="23" name="TextBox 22"/>
           <p:cNvSpPr txBox="1"/>
           <p:nvPr/>
         </p:nvSpPr>
@@ -36927,6 +39433,48 @@
         </p:nvSpPr>
         <p:spPr>
           <a:xfrm>
+            <a:off x="5897880" y="310896"/>
+            <a:ext cx="4800600" cy="256032"/>
+          </a:xfrm>
+          <a:prstGeom prst="rect">
+            <a:avLst/>
+          </a:prstGeom>
+          <a:noFill/>
+        </p:spPr>
+        <p:txBody>
+          <a:bodyPr wrap="none" lIns="9144" rIns="9144" tIns="9144" bIns="9144" anchor="t">
+            <a:spAutoFit/>
+          </a:bodyPr>
+          <a:lstStyle/>
+          <a:p>
+            <a:pPr algn="r">
+              <a:spcAft>
+                <a:spcPts val="0"/>
+              </a:spcAft>
+              <a:defRPr sz="680" b="1">
+                <a:solidFill>
+                  <a:srgbClr val="4F6B00"/>
+                </a:solidFill>
+                <a:latin typeface="Inter"/>
+              </a:defRPr>
+            </a:pPr>
+            <a:r>
+              <a:rPr>
+                <a:latin typeface="Inter"/>
+              </a:rPr>
+              <a:t>Illustrative, Gradient Maintained — demo data, not the client's holdings or managers</a:t>
+            </a:r>
+          </a:p>
+        </p:txBody>
+      </p:sp>
+      <p:sp>
+        <p:nvSpPr>
+          <p:cNvPr id="4" name="TextBox 3"/>
+          <p:cNvSpPr txBox="1"/>
+          <p:nvPr/>
+        </p:nvSpPr>
+        <p:spPr>
+          <a:xfrm>
             <a:off x="640080" y="566928"/>
             <a:ext cx="10058400" cy="530352"/>
           </a:xfrm>
@@ -36963,7 +39511,7 @@
       </p:sp>
       <p:sp>
         <p:nvSpPr>
-          <p:cNvPr id="4" name="Rectangle 3"/>
+          <p:cNvPr id="5" name="Rectangle 4"/>
           <p:cNvSpPr/>
           <p:nvPr/>
         </p:nvSpPr>
@@ -37012,7 +39560,7 @@
       </p:sp>
       <p:sp>
         <p:nvSpPr>
-          <p:cNvPr id="5" name="Rectangle 4"/>
+          <p:cNvPr id="6" name="Rectangle 5"/>
           <p:cNvSpPr/>
           <p:nvPr/>
         </p:nvSpPr>
@@ -37061,7 +39609,7 @@
       </p:sp>
       <p:sp>
         <p:nvSpPr>
-          <p:cNvPr id="6" name="TextBox 5"/>
+          <p:cNvPr id="7" name="TextBox 6"/>
           <p:cNvSpPr txBox="1"/>
           <p:nvPr/>
         </p:nvSpPr>
@@ -37103,7 +39651,7 @@
       </p:sp>
       <p:sp>
         <p:nvSpPr>
-          <p:cNvPr id="7" name="TextBox 6"/>
+          <p:cNvPr id="8" name="TextBox 7"/>
           <p:cNvSpPr txBox="1"/>
           <p:nvPr/>
         </p:nvSpPr>
@@ -37145,7 +39693,7 @@
       </p:sp>
       <p:graphicFrame>
         <p:nvGraphicFramePr>
-          <p:cNvPr id="8" name="Chart 7"/>
+          <p:cNvPr id="9" name="Chart 8"/>
           <p:cNvGraphicFramePr>
             <a:graphicFrameLocks noGrp="1"/>
           </p:cNvGraphicFramePr>
@@ -37163,7 +39711,7 @@
       </p:graphicFrame>
       <p:sp>
         <p:nvSpPr>
-          <p:cNvPr id="9" name="Rectangle 8"/>
+          <p:cNvPr id="10" name="Rectangle 9"/>
           <p:cNvSpPr/>
           <p:nvPr/>
         </p:nvSpPr>
@@ -37212,7 +39760,7 @@
       </p:sp>
       <p:sp>
         <p:nvSpPr>
-          <p:cNvPr id="10" name="TextBox 9"/>
+          <p:cNvPr id="11" name="TextBox 10"/>
           <p:cNvSpPr txBox="1"/>
           <p:nvPr/>
         </p:nvSpPr>
@@ -37254,7 +39802,7 @@
       </p:sp>
       <p:graphicFrame>
         <p:nvGraphicFramePr>
-          <p:cNvPr id="11" name="Chart 10"/>
+          <p:cNvPr id="12" name="Chart 11"/>
           <p:cNvGraphicFramePr>
             <a:graphicFrameLocks noGrp="1"/>
           </p:cNvGraphicFramePr>
@@ -37272,7 +39820,7 @@
       </p:graphicFrame>
       <p:sp>
         <p:nvSpPr>
-          <p:cNvPr id="12" name="Rectangle 11"/>
+          <p:cNvPr id="13" name="Rectangle 12"/>
           <p:cNvSpPr/>
           <p:nvPr/>
         </p:nvSpPr>
@@ -37321,7 +39869,7 @@
       </p:sp>
       <p:sp>
         <p:nvSpPr>
-          <p:cNvPr id="13" name="TextBox 12"/>
+          <p:cNvPr id="14" name="TextBox 13"/>
           <p:cNvSpPr txBox="1"/>
           <p:nvPr/>
         </p:nvSpPr>
@@ -37363,7 +39911,7 @@
       </p:sp>
       <p:sp>
         <p:nvSpPr>
-          <p:cNvPr id="14" name="TextBox 13"/>
+          <p:cNvPr id="15" name="TextBox 14"/>
           <p:cNvSpPr txBox="1"/>
           <p:nvPr/>
         </p:nvSpPr>
@@ -37398,14 +39946,14 @@
               <a:rPr>
                 <a:latin typeface="Inter"/>
               </a:rPr>
-              <a:t>DRAFT — for committee review · Illustrative data · Data as of 2026-09-30</a:t>
-            </a:r>
-          </a:p>
-        </p:txBody>
-      </p:sp>
-      <p:sp>
-        <p:nvSpPr>
-          <p:cNvPr id="15" name="TextBox 14"/>
+              <a:t>Confidential — Investment Committee · Data as of 2026-09-30</a:t>
+            </a:r>
+          </a:p>
+        </p:txBody>
+      </p:sp>
+      <p:sp>
+        <p:nvSpPr>
+          <p:cNvPr id="16" name="TextBox 15"/>
           <p:cNvSpPr txBox="1"/>
           <p:nvPr/>
         </p:nvSpPr>
@@ -37520,6 +40068,48 @@
         </p:nvSpPr>
         <p:spPr>
           <a:xfrm>
+            <a:off x="5897880" y="310896"/>
+            <a:ext cx="4800600" cy="256032"/>
+          </a:xfrm>
+          <a:prstGeom prst="rect">
+            <a:avLst/>
+          </a:prstGeom>
+          <a:noFill/>
+        </p:spPr>
+        <p:txBody>
+          <a:bodyPr wrap="none" lIns="9144" rIns="9144" tIns="9144" bIns="9144" anchor="t">
+            <a:spAutoFit/>
+          </a:bodyPr>
+          <a:lstStyle/>
+          <a:p>
+            <a:pPr algn="r">
+              <a:spcAft>
+                <a:spcPts val="0"/>
+              </a:spcAft>
+              <a:defRPr sz="680" b="1">
+                <a:solidFill>
+                  <a:srgbClr val="4F6B00"/>
+                </a:solidFill>
+                <a:latin typeface="Inter"/>
+              </a:defRPr>
+            </a:pPr>
+            <a:r>
+              <a:rPr>
+                <a:latin typeface="Inter"/>
+              </a:rPr>
+              <a:t>Illustrative, Gradient Maintained — demo data, not the client's holdings or managers</a:t>
+            </a:r>
+          </a:p>
+        </p:txBody>
+      </p:sp>
+      <p:sp>
+        <p:nvSpPr>
+          <p:cNvPr id="4" name="TextBox 3"/>
+          <p:cNvSpPr txBox="1"/>
+          <p:nvPr/>
+        </p:nvSpPr>
+        <p:spPr>
+          <a:xfrm>
             <a:off x="640080" y="566928"/>
             <a:ext cx="10058400" cy="530352"/>
           </a:xfrm>
@@ -37556,7 +40146,7 @@
       </p:sp>
       <p:sp>
         <p:nvSpPr>
-          <p:cNvPr id="4" name="Rectangle 3"/>
+          <p:cNvPr id="5" name="Rectangle 4"/>
           <p:cNvSpPr/>
           <p:nvPr/>
         </p:nvSpPr>
@@ -37605,7 +40195,7 @@
       </p:sp>
       <p:sp>
         <p:nvSpPr>
-          <p:cNvPr id="5" name="Rectangle 4"/>
+          <p:cNvPr id="6" name="Rectangle 5"/>
           <p:cNvSpPr/>
           <p:nvPr/>
         </p:nvSpPr>
@@ -37654,7 +40244,7 @@
       </p:sp>
       <p:sp>
         <p:nvSpPr>
-          <p:cNvPr id="6" name="TextBox 5"/>
+          <p:cNvPr id="7" name="TextBox 6"/>
           <p:cNvSpPr txBox="1"/>
           <p:nvPr/>
         </p:nvSpPr>
@@ -37696,7 +40286,7 @@
       </p:sp>
       <p:sp>
         <p:nvSpPr>
-          <p:cNvPr id="7" name="TextBox 6"/>
+          <p:cNvPr id="8" name="TextBox 7"/>
           <p:cNvSpPr txBox="1"/>
           <p:nvPr/>
         </p:nvSpPr>
@@ -37834,7 +40424,7 @@
       </p:sp>
       <p:sp>
         <p:nvSpPr>
-          <p:cNvPr id="8" name="Rectangle 7"/>
+          <p:cNvPr id="9" name="Rectangle 8"/>
           <p:cNvSpPr/>
           <p:nvPr/>
         </p:nvSpPr>
@@ -37883,7 +40473,7 @@
       </p:sp>
       <p:sp>
         <p:nvSpPr>
-          <p:cNvPr id="9" name="Rectangle 8"/>
+          <p:cNvPr id="10" name="Rectangle 9"/>
           <p:cNvSpPr/>
           <p:nvPr/>
         </p:nvSpPr>
@@ -37932,7 +40522,7 @@
       </p:sp>
       <p:sp>
         <p:nvSpPr>
-          <p:cNvPr id="10" name="TextBox 9"/>
+          <p:cNvPr id="11" name="TextBox 10"/>
           <p:cNvSpPr txBox="1"/>
           <p:nvPr/>
         </p:nvSpPr>
@@ -37974,7 +40564,7 @@
       </p:sp>
       <p:sp>
         <p:nvSpPr>
-          <p:cNvPr id="11" name="TextBox 10"/>
+          <p:cNvPr id="12" name="TextBox 11"/>
           <p:cNvSpPr txBox="1"/>
           <p:nvPr/>
         </p:nvSpPr>
@@ -38016,7 +40606,7 @@
       </p:sp>
       <p:sp>
         <p:nvSpPr>
-          <p:cNvPr id="12" name="Rectangle 11"/>
+          <p:cNvPr id="13" name="Rectangle 12"/>
           <p:cNvSpPr/>
           <p:nvPr/>
         </p:nvSpPr>
@@ -38065,7 +40655,7 @@
       </p:sp>
       <p:sp>
         <p:nvSpPr>
-          <p:cNvPr id="13" name="TextBox 12"/>
+          <p:cNvPr id="14" name="TextBox 13"/>
           <p:cNvSpPr txBox="1"/>
           <p:nvPr/>
         </p:nvSpPr>
@@ -38107,7 +40697,7 @@
       </p:sp>
       <p:sp>
         <p:nvSpPr>
-          <p:cNvPr id="14" name="TextBox 13"/>
+          <p:cNvPr id="15" name="TextBox 14"/>
           <p:cNvSpPr txBox="1"/>
           <p:nvPr/>
         </p:nvSpPr>
@@ -38142,14 +40732,14 @@
               <a:rPr>
                 <a:latin typeface="Inter"/>
               </a:rPr>
-              <a:t>DRAFT — for committee review · Illustrative data · Data as of 2026-09-30</a:t>
-            </a:r>
-          </a:p>
-        </p:txBody>
-      </p:sp>
-      <p:sp>
-        <p:nvSpPr>
-          <p:cNvPr id="15" name="TextBox 14"/>
+              <a:t>Confidential — Investment Committee · Data as of 2026-09-30</a:t>
+            </a:r>
+          </a:p>
+        </p:txBody>
+      </p:sp>
+      <p:sp>
+        <p:nvSpPr>
+          <p:cNvPr id="16" name="TextBox 15"/>
           <p:cNvSpPr txBox="1"/>
           <p:nvPr/>
         </p:nvSpPr>
@@ -38264,6 +40854,48 @@
         </p:nvSpPr>
         <p:spPr>
           <a:xfrm>
+            <a:off x="5897880" y="310896"/>
+            <a:ext cx="4800600" cy="256032"/>
+          </a:xfrm>
+          <a:prstGeom prst="rect">
+            <a:avLst/>
+          </a:prstGeom>
+          <a:noFill/>
+        </p:spPr>
+        <p:txBody>
+          <a:bodyPr wrap="none" lIns="9144" rIns="9144" tIns="9144" bIns="9144" anchor="t">
+            <a:spAutoFit/>
+          </a:bodyPr>
+          <a:lstStyle/>
+          <a:p>
+            <a:pPr algn="r">
+              <a:spcAft>
+                <a:spcPts val="0"/>
+              </a:spcAft>
+              <a:defRPr sz="680" b="1">
+                <a:solidFill>
+                  <a:srgbClr val="4F6B00"/>
+                </a:solidFill>
+                <a:latin typeface="Inter"/>
+              </a:defRPr>
+            </a:pPr>
+            <a:r>
+              <a:rPr>
+                <a:latin typeface="Inter"/>
+              </a:rPr>
+              <a:t>Illustrative, Gradient Maintained — demo data, not the client's holdings or managers</a:t>
+            </a:r>
+          </a:p>
+        </p:txBody>
+      </p:sp>
+      <p:sp>
+        <p:nvSpPr>
+          <p:cNvPr id="4" name="TextBox 3"/>
+          <p:cNvSpPr txBox="1"/>
+          <p:nvPr/>
+        </p:nvSpPr>
+        <p:spPr>
+          <a:xfrm>
             <a:off x="640080" y="566928"/>
             <a:ext cx="10058400" cy="530352"/>
           </a:xfrm>
@@ -38300,7 +40932,7 @@
       </p:sp>
       <p:sp>
         <p:nvSpPr>
-          <p:cNvPr id="4" name="Rectangle 3"/>
+          <p:cNvPr id="5" name="Rectangle 4"/>
           <p:cNvSpPr/>
           <p:nvPr/>
         </p:nvSpPr>
@@ -38349,7 +40981,7 @@
       </p:sp>
       <p:sp>
         <p:nvSpPr>
-          <p:cNvPr id="5" name="Rectangle 4"/>
+          <p:cNvPr id="6" name="Rectangle 5"/>
           <p:cNvSpPr/>
           <p:nvPr/>
         </p:nvSpPr>
@@ -38398,7 +41030,7 @@
       </p:sp>
       <p:sp>
         <p:nvSpPr>
-          <p:cNvPr id="6" name="TextBox 5"/>
+          <p:cNvPr id="7" name="TextBox 6"/>
           <p:cNvSpPr txBox="1"/>
           <p:nvPr/>
         </p:nvSpPr>
@@ -38440,7 +41072,7 @@
       </p:sp>
       <p:sp>
         <p:nvSpPr>
-          <p:cNvPr id="7" name="TextBox 6"/>
+          <p:cNvPr id="8" name="TextBox 7"/>
           <p:cNvSpPr txBox="1"/>
           <p:nvPr/>
         </p:nvSpPr>
@@ -38482,7 +41114,7 @@
       </p:sp>
       <p:graphicFrame>
         <p:nvGraphicFramePr>
-          <p:cNvPr id="8" name="Table 7"/>
+          <p:cNvPr id="9" name="Table 8"/>
           <p:cNvGraphicFramePr>
             <a:graphicFrameLocks noGrp="1"/>
           </p:cNvGraphicFramePr>
@@ -39007,7 +41639,7 @@
       </p:graphicFrame>
       <p:sp>
         <p:nvSpPr>
-          <p:cNvPr id="9" name="Rectangle 8"/>
+          <p:cNvPr id="10" name="Rectangle 9"/>
           <p:cNvSpPr/>
           <p:nvPr/>
         </p:nvSpPr>
@@ -39056,7 +41688,7 @@
       </p:sp>
       <p:sp>
         <p:nvSpPr>
-          <p:cNvPr id="10" name="TextBox 9"/>
+          <p:cNvPr id="11" name="TextBox 10"/>
           <p:cNvSpPr txBox="1"/>
           <p:nvPr/>
         </p:nvSpPr>
@@ -39098,7 +41730,7 @@
       </p:sp>
       <p:sp>
         <p:nvSpPr>
-          <p:cNvPr id="11" name="TextBox 10"/>
+          <p:cNvPr id="12" name="TextBox 11"/>
           <p:cNvSpPr txBox="1"/>
           <p:nvPr/>
         </p:nvSpPr>
@@ -39133,14 +41765,14 @@
               <a:rPr>
                 <a:latin typeface="Inter"/>
               </a:rPr>
-              <a:t>DRAFT — for committee review · Illustrative data · Data as of 2026-09-30</a:t>
-            </a:r>
-          </a:p>
-        </p:txBody>
-      </p:sp>
-      <p:sp>
-        <p:nvSpPr>
-          <p:cNvPr id="12" name="TextBox 11"/>
+              <a:t>Confidential — Investment Committee · Data as of 2026-09-30</a:t>
+            </a:r>
+          </a:p>
+        </p:txBody>
+      </p:sp>
+      <p:sp>
+        <p:nvSpPr>
+          <p:cNvPr id="13" name="TextBox 12"/>
           <p:cNvSpPr txBox="1"/>
           <p:nvPr/>
         </p:nvSpPr>

--- a/plugins/gradient-cio/assets/examples/gradient-decision-ic-memo.pptx
+++ b/plugins/gradient-cio/assets/examples/gradient-decision-ic-memo.pptx
@@ -8147,7 +8147,7 @@
               <a:rPr>
                 <a:latin typeface="Inter"/>
               </a:rPr>
-              <a:t>•  Summary:** 6 Compliant, 1 Watch, 2 Breach, 3 Not assessed.</a:t>
+              <a:t>•  Summary:** 6 Compliant, 1 Near limit, 2 Breach, 3 Not assessed.</a:t>
             </a:r>
           </a:p>
           <a:p>
@@ -13574,7 +13574,7 @@
               <a:rPr>
                 <a:latin typeface="Inter"/>
               </a:rPr>
-              <a:t>1 additional Watch [S1]</a:t>
+              <a:t>1 more near its limit [S1]</a:t>
             </a:r>
           </a:p>
         </p:txBody>
@@ -28728,7 +28728,7 @@
               <a:rPr>
                 <a:latin typeface="Inter"/>
               </a:rPr>
-              <a:t>•  IPS:** 6 constraints Compliant, 1 Watch, 2 Breach, 3 Not assessed. Breaches: fixed income band and cash band.</a:t>
+              <a:t>•  IPS:** 6 constraints Compliant, 1 Near limit, 2 Breach, 3 Not assessed. Breaches: fixed income band and cash band.</a:t>
             </a:r>
           </a:p>
           <a:p>

--- a/plugins/gradient-cio/assets/examples/gradient-decision-ic-memo.pptx
+++ b/plugins/gradient-cio/assets/examples/gradient-decision-ic-memo.pptx
@@ -35824,7 +35824,7 @@
               <a:rPr>
                 <a:latin typeface="Inter"/>
               </a:rPr>
-              <a:t> ·  S6  ·  get_chart_data  ·  gradient_tool  ·  get_chart_data  ·  portfolio_id=example; analysis_type=allocations  ·  2026-09-30  ·  Illustrative, Gradient Maintained — demo data, not the client's holdings or managers  ·  passed  ·  sha256:test-s6  · </a:t>
+              <a:t> ·  S6  ·  get_portfolio_exposure  ·  gradient_tool  ·  get_portfolio_exposure  ·  portfolio_id=example; include=factor_currency_exposure,risk_contribution  ·  2026-09-30  ·  Illustrative, Gradient Maintained — demo data, not the client's holdings or managers  ·  passed  ·  sha256:test-s6  · </a:t>
             </a:r>
             <a:br/>
             <a:br/>
@@ -35848,7 +35848,7 @@
               <a:rPr>
                 <a:latin typeface="Inter"/>
               </a:rPr>
-              <a:t> ·  S9  ·  get_chart_data  ·  gradient_tool  ·  get_chart_data  ·  portfolio_id=example; analysis_type=commitments  ·  2026-06-30  ·  Illustrative, Gradient Maintained — demo data, not the client's holdings or managers  ·  passed  ·  sha256:test-s9  · </a:t>
+              <a:t> ·  S9  ·  get_portfolio_exposure  ·  gradient_tool  ·  get_portfolio_exposure  ·  portfolio_id=example; include=commitment_pacing,liquidity_scorecard  ·  2026-06-30  ·  Illustrative, Gradient Maintained — demo data, not the client's holdings or managers  ·  passed  ·  sha256:test-s9  · </a:t>
             </a:r>
             <a:br/>
             <a:br/>
